--- a/learning/P01_zephyr_make_project/slides/P003_SDK准备与编译器选型_Windows.pptx
+++ b/learning/P01_zephyr_make_project/slides/P003_SDK准备与编译器选型_Windows.pptx
@@ -23866,6 +23866,11 @@
               </a:defRPr>
             </a:pPr>
             <a:r>
+              <a:rPr>
+                <a:solidFill>
+                  <a:srgbClr val="646173"/>
+                </a:solidFill>
+              </a:rPr>
               <a:t># Windows UCRT64；下载目录；选择 Minimal 才执行。</a:t>
             </a:r>
           </a:p>
@@ -23895,6 +23900,11 @@
               <a:t>cd</a:t>
             </a:r>
             <a:r>
+              <a:rPr>
+                <a:solidFill>
+                  <a:srgbClr val="29263B"/>
+                </a:solidFill>
+              </a:rPr>
               <a:t> </a:t>
             </a:r>
             <a:r>
@@ -23924,6 +23934,11 @@
               </a:defRPr>
             </a:pPr>
             <a:r>
+              <a:rPr>
+                <a:solidFill>
+                  <a:srgbClr val="646173"/>
+                </a:solidFill>
+              </a:rPr>
               <a:t># 必须输出 OK；失败就停止，不解压。</a:t>
             </a:r>
           </a:p>
@@ -23953,17 +23968,43 @@
               <a:t>grep</a:t>
             </a:r>
             <a:r>
-              <a:t> -F ' </a:t>
-            </a:r>
-            <a:r>
               <a:rPr>
                 <a:solidFill>
+                  <a:srgbClr val="29263B"/>
+                </a:solidFill>
+              </a:rPr>
+              <a:t> </a:t>
+            </a:r>
+            <a:r>
+              <a:rPr>
+                <a:solidFill>
+                  <a:srgbClr val="B84E00"/>
+                </a:solidFill>
+              </a:rPr>
+              <a:t>-F</a:t>
+            </a:r>
+            <a:r>
+              <a:rPr>
+                <a:solidFill>
+                  <a:srgbClr val="29263B"/>
+                </a:solidFill>
+              </a:rPr>
+              <a:t> ' </a:t>
+            </a:r>
+            <a:r>
+              <a:rPr>
+                <a:solidFill>
                   <a:srgbClr val="0070C0"/>
                 </a:solidFill>
               </a:rPr>
               <a:t>zephyr-sdk-1.0.1_windows-x86_64_minimal.7z</a:t>
             </a:r>
             <a:r>
+              <a:rPr>
+                <a:solidFill>
+                  <a:srgbClr val="29263B"/>
+                </a:solidFill>
+              </a:rPr>
               <a:t>' </a:t>
             </a:r>
             <a:r>
@@ -23975,6 +24016,11 @@
               <a:t>sha256.sum</a:t>
             </a:r>
             <a:r>
+              <a:rPr>
+                <a:solidFill>
+                  <a:srgbClr val="29263B"/>
+                </a:solidFill>
+              </a:rPr>
               <a:t> |</a:t>
             </a:r>
           </a:p>
@@ -23996,6 +24042,11 @@
               </a:defRPr>
             </a:pPr>
             <a:r>
+              <a:rPr>
+                <a:solidFill>
+                  <a:srgbClr val="29263B"/>
+                </a:solidFill>
+              </a:rPr>
               <a:t>  </a:t>
             </a:r>
             <a:r>
@@ -24007,7 +24058,28 @@
               <a:t>sha256sum</a:t>
             </a:r>
             <a:r>
-              <a:t> --check &amp;&amp;</a:t>
+              <a:rPr>
+                <a:solidFill>
+                  <a:srgbClr val="29263B"/>
+                </a:solidFill>
+              </a:rPr>
+              <a:t> </a:t>
+            </a:r>
+            <a:r>
+              <a:rPr>
+                <a:solidFill>
+                  <a:srgbClr val="B84E00"/>
+                </a:solidFill>
+              </a:rPr>
+              <a:t>--check</a:t>
+            </a:r>
+            <a:r>
+              <a:rPr>
+                <a:solidFill>
+                  <a:srgbClr val="29263B"/>
+                </a:solidFill>
+              </a:rPr>
+              <a:t> &amp;&amp;</a:t>
             </a:r>
           </a:p>
           <a:p>
@@ -24028,6 +24100,11 @@
               </a:defRPr>
             </a:pPr>
             <a:r>
+              <a:rPr>
+                <a:solidFill>
+                  <a:srgbClr val="29263B"/>
+                </a:solidFill>
+              </a:rPr>
               <a:t>  </a:t>
             </a:r>
             <a:r>
@@ -24039,6 +24116,11 @@
               <a:t>7z</a:t>
             </a:r>
             <a:r>
+              <a:rPr>
+                <a:solidFill>
+                  <a:srgbClr val="29263B"/>
+                </a:solidFill>
+              </a:rPr>
               <a:t> x </a:t>
             </a:r>
             <a:r>
@@ -24050,7 +24132,76 @@
               <a:t>zephyr-sdk-1.0.1_windows-x86_64_minimal.7z</a:t>
             </a:r>
             <a:r>
-              <a:t> "-o$(cygpath -m "$PWD")"</a:t>
+              <a:rPr>
+                <a:solidFill>
+                  <a:srgbClr val="29263B"/>
+                </a:solidFill>
+              </a:rPr>
+              <a:t> "</a:t>
+            </a:r>
+            <a:r>
+              <a:rPr>
+                <a:solidFill>
+                  <a:srgbClr val="B84E00"/>
+                </a:solidFill>
+              </a:rPr>
+              <a:t>-o</a:t>
+            </a:r>
+            <a:r>
+              <a:rPr>
+                <a:solidFill>
+                  <a:srgbClr val="29263B"/>
+                </a:solidFill>
+              </a:rPr>
+              <a:t>$(</a:t>
+            </a:r>
+            <a:r>
+              <a:rPr>
+                <a:solidFill>
+                  <a:srgbClr val="A02B93"/>
+                </a:solidFill>
+              </a:rPr>
+              <a:t>cygpath</a:t>
+            </a:r>
+            <a:r>
+              <a:rPr>
+                <a:solidFill>
+                  <a:srgbClr val="29263B"/>
+                </a:solidFill>
+              </a:rPr>
+              <a:t> </a:t>
+            </a:r>
+            <a:r>
+              <a:rPr>
+                <a:solidFill>
+                  <a:srgbClr val="B84E00"/>
+                </a:solidFill>
+              </a:rPr>
+              <a:t>-m</a:t>
+            </a:r>
+            <a:r>
+              <a:rPr>
+                <a:solidFill>
+                  <a:srgbClr val="29263B"/>
+                </a:solidFill>
+              </a:rPr>
+              <a:t> "</a:t>
+            </a:r>
+            <a:r>
+              <a:rPr>
+                <a:solidFill>
+                  <a:srgbClr val="B84E00"/>
+                </a:solidFill>
+              </a:rPr>
+              <a:t>$PWD</a:t>
+            </a:r>
+            <a:r>
+              <a:rPr>
+                <a:solidFill>
+                  <a:srgbClr val="29263B"/>
+                </a:solidFill>
+              </a:rPr>
+              <a:t>")"</a:t>
             </a:r>
           </a:p>
         </p:txBody>
@@ -24116,6 +24267,7 @@
               </a:defRPr>
             </a:pPr>
             <a:r>
+              <a:rPr/>
               <a:t>与上一页二选一；不要把 GNU 与 Minimal 同时解压到同一目录。</a:t>
             </a:r>
           </a:p>
@@ -24137,7 +24289,32 @@
               </a:defRPr>
             </a:pPr>
             <a:r>
-              <a:t>此时已有 cmake 与 setup.cmd，下一步只补所需的 ARM 工具链。</a:t>
+              <a:rPr/>
+              <a:t>此时已有 </a:t>
+            </a:r>
+            <a:r>
+              <a:rPr>
+                <a:solidFill>
+                  <a:srgbClr val="0070C0"/>
+                </a:solidFill>
+              </a:rPr>
+              <a:t>cmake</a:t>
+            </a:r>
+            <a:r>
+              <a:rPr/>
+              <a:t> 与 </a:t>
+            </a:r>
+            <a:r>
+              <a:rPr>
+                <a:solidFill>
+                  <a:srgbClr val="0070C0"/>
+                </a:solidFill>
+              </a:rPr>
+              <a:t>setup.cmd</a:t>
+            </a:r>
+            <a:r>
+              <a:rPr/>
+              <a:t>，下一步只补所需的 ARM 工具链。</a:t>
             </a:r>
           </a:p>
         </p:txBody>
@@ -24659,6 +24836,11 @@
               </a:defRPr>
             </a:pPr>
             <a:r>
+              <a:rPr>
+                <a:solidFill>
+                  <a:srgbClr val="646173"/>
+                </a:solidFill>
+              </a:rPr>
               <a:t># Windows PowerShell；Minimal 已解压，且尚未安装 ARM 工具链。</a:t>
             </a:r>
           </a:p>
@@ -24688,7 +24870,44 @@
               <a:t>Set-Location</a:t>
             </a:r>
             <a:r>
-              <a:t> -LiteralPath 'G:\zephyr_practice\zephyr-sdk-1.0.1'</a:t>
+              <a:rPr>
+                <a:solidFill>
+                  <a:srgbClr val="29263B"/>
+                </a:solidFill>
+              </a:rPr>
+              <a:t> </a:t>
+            </a:r>
+            <a:r>
+              <a:rPr>
+                <a:solidFill>
+                  <a:srgbClr val="B84E00"/>
+                </a:solidFill>
+              </a:rPr>
+              <a:t>-LiteralPath</a:t>
+            </a:r>
+            <a:r>
+              <a:rPr>
+                <a:solidFill>
+                  <a:srgbClr val="29263B"/>
+                </a:solidFill>
+              </a:rPr>
+              <a:t> '</a:t>
+            </a:r>
+            <a:r>
+              <a:rPr>
+                <a:solidFill>
+                  <a:srgbClr val="0070C0"/>
+                </a:solidFill>
+              </a:rPr>
+              <a:t>G:\zephyr_practice\zephyr-sdk-1.0.1</a:t>
+            </a:r>
+            <a:r>
+              <a:rPr>
+                <a:solidFill>
+                  <a:srgbClr val="29263B"/>
+                </a:solidFill>
+              </a:rPr>
+              <a:t>'</a:t>
             </a:r>
           </a:p>
           <a:p>
@@ -24717,6 +24936,11 @@
               <a:t>Get-Command</a:t>
             </a:r>
             <a:r>
+              <a:rPr>
+                <a:solidFill>
+                  <a:srgbClr val="29263B"/>
+                </a:solidFill>
+              </a:rPr>
               <a:t> </a:t>
             </a:r>
             <a:r>
@@ -24728,6 +24952,11 @@
               <a:t>cmake</a:t>
             </a:r>
             <a:r>
+              <a:rPr>
+                <a:solidFill>
+                  <a:srgbClr val="29263B"/>
+                </a:solidFill>
+              </a:rPr>
               <a:t>, </a:t>
             </a:r>
             <a:r>
@@ -24739,7 +24968,28 @@
               <a:t>7z</a:t>
             </a:r>
             <a:r>
-              <a:t> -ErrorAction Stop</a:t>
+              <a:rPr>
+                <a:solidFill>
+                  <a:srgbClr val="29263B"/>
+                </a:solidFill>
+              </a:rPr>
+              <a:t> </a:t>
+            </a:r>
+            <a:r>
+              <a:rPr>
+                <a:solidFill>
+                  <a:srgbClr val="B84E00"/>
+                </a:solidFill>
+              </a:rPr>
+              <a:t>-ErrorAction</a:t>
+            </a:r>
+            <a:r>
+              <a:rPr>
+                <a:solidFill>
+                  <a:srgbClr val="29263B"/>
+                </a:solidFill>
+              </a:rPr>
+              <a:t> Stop</a:t>
             </a:r>
           </a:p>
           <a:p>
@@ -24760,17 +25010,35 @@
               </a:defRPr>
             </a:pPr>
             <a:r>
-              <a:t>if (</a:t>
-            </a:r>
-            <a:r>
               <a:rPr>
                 <a:solidFill>
                   <a:srgbClr val="A02B93"/>
                 </a:solidFill>
               </a:rPr>
+              <a:t>if</a:t>
+            </a:r>
+            <a:r>
+              <a:rPr>
+                <a:solidFill>
+                  <a:srgbClr val="29263B"/>
+                </a:solidFill>
+              </a:rPr>
+              <a:t> (</a:t>
+            </a:r>
+            <a:r>
+              <a:rPr>
+                <a:solidFill>
+                  <a:srgbClr val="A02B93"/>
+                </a:solidFill>
+              </a:rPr>
               <a:t>Test-Path</a:t>
             </a:r>
             <a:r>
+              <a:rPr>
+                <a:solidFill>
+                  <a:srgbClr val="29263B"/>
+                </a:solidFill>
+              </a:rPr>
               <a:t> '.\gnu\arm-zephyr-eabi') {</a:t>
             </a:r>
           </a:p>
@@ -24792,7 +25060,28 @@
               </a:defRPr>
             </a:pPr>
             <a:r>
-              <a:t>    throw '已有 ARM 目录，请先核验，不重复安装'</a:t>
+              <a:rPr>
+                <a:solidFill>
+                  <a:srgbClr val="29263B"/>
+                </a:solidFill>
+              </a:rPr>
+              <a:t>    </a:t>
+            </a:r>
+            <a:r>
+              <a:rPr>
+                <a:solidFill>
+                  <a:srgbClr val="A02B93"/>
+                </a:solidFill>
+              </a:rPr>
+              <a:t>throw</a:t>
+            </a:r>
+            <a:r>
+              <a:rPr>
+                <a:solidFill>
+                  <a:srgbClr val="29263B"/>
+                </a:solidFill>
+              </a:rPr>
+              <a:t> '已有 ARM 目录，请先核验，不重复安装'</a:t>
             </a:r>
           </a:p>
           <a:p>
@@ -24813,6 +25102,11 @@
               </a:defRPr>
             </a:pPr>
             <a:r>
+              <a:rPr>
+                <a:solidFill>
+                  <a:srgbClr val="29263B"/>
+                </a:solidFill>
+              </a:rPr>
               <a:t>}</a:t>
             </a:r>
           </a:p>
@@ -24834,7 +25128,28 @@
               </a:defRPr>
             </a:pPr>
             <a:r>
-              <a:t>.\setup.cmd /t arm-zephyr-eabi</a:t>
+              <a:rPr>
+                <a:solidFill>
+                  <a:srgbClr val="29263B"/>
+                </a:solidFill>
+              </a:rPr>
+              <a:t>.\</a:t>
+            </a:r>
+            <a:r>
+              <a:rPr>
+                <a:solidFill>
+                  <a:srgbClr val="0070C0"/>
+                </a:solidFill>
+              </a:rPr>
+              <a:t>setup.cmd</a:t>
+            </a:r>
+            <a:r>
+              <a:rPr>
+                <a:solidFill>
+                  <a:srgbClr val="29263B"/>
+                </a:solidFill>
+              </a:rPr>
+              <a:t> /t arm-zephyr-eabi</a:t>
             </a:r>
           </a:p>
           <a:p>
@@ -24855,7 +25170,68 @@
               </a:defRPr>
             </a:pPr>
             <a:r>
-              <a:t>if ($LASTEXITCODE -ne 0) { throw '安装失败，检查下载输出' }</a:t>
+              <a:rPr>
+                <a:solidFill>
+                  <a:srgbClr val="A02B93"/>
+                </a:solidFill>
+              </a:rPr>
+              <a:t>if</a:t>
+            </a:r>
+            <a:r>
+              <a:rPr>
+                <a:solidFill>
+                  <a:srgbClr val="29263B"/>
+                </a:solidFill>
+              </a:rPr>
+              <a:t> (</a:t>
+            </a:r>
+            <a:r>
+              <a:rPr>
+                <a:solidFill>
+                  <a:srgbClr val="B84E00"/>
+                </a:solidFill>
+              </a:rPr>
+              <a:t>$LASTEXITCODE</a:t>
+            </a:r>
+            <a:r>
+              <a:rPr>
+                <a:solidFill>
+                  <a:srgbClr val="29263B"/>
+                </a:solidFill>
+              </a:rPr>
+              <a:t> </a:t>
+            </a:r>
+            <a:r>
+              <a:rPr>
+                <a:solidFill>
+                  <a:srgbClr val="B84E00"/>
+                </a:solidFill>
+              </a:rPr>
+              <a:t>-ne</a:t>
+            </a:r>
+            <a:r>
+              <a:rPr>
+                <a:solidFill>
+                  <a:srgbClr val="29263B"/>
+                </a:solidFill>
+              </a:rPr>
+              <a:t> 0) { </a:t>
+            </a:r>
+            <a:r>
+              <a:rPr>
+                <a:solidFill>
+                  <a:srgbClr val="A02B93"/>
+                </a:solidFill>
+              </a:rPr>
+              <a:t>throw</a:t>
+            </a:r>
+            <a:r>
+              <a:rPr>
+                <a:solidFill>
+                  <a:srgbClr val="29263B"/>
+                </a:solidFill>
+              </a:rPr>
+              <a:t> '安装失败，检查下载输出' }</a:t>
             </a:r>
           </a:p>
         </p:txBody>
@@ -24921,7 +25297,32 @@
               </a:defRPr>
             </a:pPr>
             <a:r>
-              <a:t>/t 根据 sdk_version 下载对应附件，再解压进 SDK/gnu。它不等于 /c 注册。</a:t>
+              <a:rPr/>
+              <a:t>/t 根据 </a:t>
+            </a:r>
+            <a:r>
+              <a:rPr>
+                <a:solidFill>
+                  <a:srgbClr val="0070C0"/>
+                </a:solidFill>
+              </a:rPr>
+              <a:t>sdk_version</a:t>
+            </a:r>
+            <a:r>
+              <a:rPr/>
+              <a:t> 下载对应附件，再解压进 </a:t>
+            </a:r>
+            <a:r>
+              <a:rPr>
+                <a:solidFill>
+                  <a:srgbClr val="0070C0"/>
+                </a:solidFill>
+              </a:rPr>
+              <a:t>SDK/gnu</a:t>
+            </a:r>
+            <a:r>
+              <a:rPr/>
+              <a:t>。它不等于 /c 注册。</a:t>
             </a:r>
           </a:p>
           <a:p>
@@ -24942,7 +25343,32 @@
               </a:defRPr>
             </a:pPr>
             <a:r>
-              <a:t>若提示找不到 7z，先重开 PowerShell 刷新 PATH；仍缺少才返回 P002。</a:t>
+              <a:rPr/>
+              <a:t>若提示找不到 </a:t>
+            </a:r>
+            <a:r>
+              <a:rPr>
+                <a:solidFill>
+                  <a:srgbClr val="A02B93"/>
+                </a:solidFill>
+              </a:rPr>
+              <a:t>7z</a:t>
+            </a:r>
+            <a:r>
+              <a:rPr/>
+              <a:t>，先重开 PowerShell 刷新 </a:t>
+            </a:r>
+            <a:r>
+              <a:rPr>
+                <a:solidFill>
+                  <a:srgbClr val="B84E00"/>
+                </a:solidFill>
+              </a:rPr>
+              <a:t>PATH</a:t>
+            </a:r>
+            <a:r>
+              <a:rPr/>
+              <a:t>；仍缺少才返回 P002。</a:t>
             </a:r>
           </a:p>
         </p:txBody>
@@ -25011,7 +25437,22 @@
               <a:rPr u="sng">
                 <a:hlinkClick r:id="rId3"/>
               </a:rPr>
-              <a:t>依据：SDK/setup.cmd：/t 参数与 process 安装分支</a:t>
+              <a:t>依据：</a:t>
+            </a:r>
+            <a:r>
+              <a:rPr u="sng">
+                <a:solidFill>
+                  <a:srgbClr val="0070C0"/>
+                </a:solidFill>
+                <a:hlinkClick r:id="rId3"/>
+              </a:rPr>
+              <a:t>SDK/setup.cmd</a:t>
+            </a:r>
+            <a:r>
+              <a:rPr u="sng">
+                <a:hlinkClick r:id="rId3"/>
+              </a:rPr>
+              <a:t>：/t 参数与 process 安装分支</a:t>
             </a:r>
           </a:p>
         </p:txBody>
@@ -25464,6 +25905,11 @@
               </a:defRPr>
             </a:pPr>
             <a:r>
+              <a:rPr>
+                <a:solidFill>
+                  <a:srgbClr val="646173"/>
+                </a:solidFill>
+              </a:rPr>
               <a:t># Windows UCRT64；Minimal 已解压；ARM 包来自同版 Release。</a:t>
             </a:r>
           </a:p>
@@ -25493,6 +25939,11 @@
               <a:t>cd</a:t>
             </a:r>
             <a:r>
+              <a:rPr>
+                <a:solidFill>
+                  <a:srgbClr val="29263B"/>
+                </a:solidFill>
+              </a:rPr>
               <a:t> </a:t>
             </a:r>
             <a:r>
@@ -25522,17 +25973,27 @@
               </a:defRPr>
             </a:pPr>
             <a:r>
+              <a:rPr>
+                <a:solidFill>
+                  <a:srgbClr val="646173"/>
+                </a:solidFill>
+              </a:rPr>
               <a:t># 摘要须输出 OK；归档从 </a:t>
             </a:r>
             <a:r>
               <a:rPr>
                 <a:solidFill>
-                  <a:srgbClr val="0070C0"/>
+                  <a:srgbClr val="646173"/>
                 </a:solidFill>
               </a:rPr>
               <a:t>arm-zephyr-eabi/</a:t>
             </a:r>
             <a:r>
+              <a:rPr>
+                <a:solidFill>
+                  <a:srgbClr val="646173"/>
+                </a:solidFill>
+              </a:rPr>
               <a:t> 开始。</a:t>
             </a:r>
           </a:p>
@@ -25562,17 +26023,43 @@
               <a:t>grep</a:t>
             </a:r>
             <a:r>
-              <a:t> -F ' </a:t>
-            </a:r>
-            <a:r>
               <a:rPr>
                 <a:solidFill>
+                  <a:srgbClr val="29263B"/>
+                </a:solidFill>
+              </a:rPr>
+              <a:t> </a:t>
+            </a:r>
+            <a:r>
+              <a:rPr>
+                <a:solidFill>
+                  <a:srgbClr val="B84E00"/>
+                </a:solidFill>
+              </a:rPr>
+              <a:t>-F</a:t>
+            </a:r>
+            <a:r>
+              <a:rPr>
+                <a:solidFill>
+                  <a:srgbClr val="29263B"/>
+                </a:solidFill>
+              </a:rPr>
+              <a:t> ' </a:t>
+            </a:r>
+            <a:r>
+              <a:rPr>
+                <a:solidFill>
                   <a:srgbClr val="0070C0"/>
                 </a:solidFill>
               </a:rPr>
               <a:t>toolchain_gnu_windows-x86_64_arm-zephyr-eabi.7z</a:t>
             </a:r>
             <a:r>
+              <a:rPr>
+                <a:solidFill>
+                  <a:srgbClr val="29263B"/>
+                </a:solidFill>
+              </a:rPr>
               <a:t>' </a:t>
             </a:r>
             <a:r>
@@ -25584,6 +26071,11 @@
               <a:t>sha256.sum</a:t>
             </a:r>
             <a:r>
+              <a:rPr>
+                <a:solidFill>
+                  <a:srgbClr val="29263B"/>
+                </a:solidFill>
+              </a:rPr>
               <a:t> |</a:t>
             </a:r>
           </a:p>
@@ -25605,6 +26097,11 @@
               </a:defRPr>
             </a:pPr>
             <a:r>
+              <a:rPr>
+                <a:solidFill>
+                  <a:srgbClr val="29263B"/>
+                </a:solidFill>
+              </a:rPr>
               <a:t>  </a:t>
             </a:r>
             <a:r>
@@ -25616,7 +26113,28 @@
               <a:t>sha256sum</a:t>
             </a:r>
             <a:r>
-              <a:t> --check &amp;&amp;</a:t>
+              <a:rPr>
+                <a:solidFill>
+                  <a:srgbClr val="29263B"/>
+                </a:solidFill>
+              </a:rPr>
+              <a:t> </a:t>
+            </a:r>
+            <a:r>
+              <a:rPr>
+                <a:solidFill>
+                  <a:srgbClr val="B84E00"/>
+                </a:solidFill>
+              </a:rPr>
+              <a:t>--check</a:t>
+            </a:r>
+            <a:r>
+              <a:rPr>
+                <a:solidFill>
+                  <a:srgbClr val="29263B"/>
+                </a:solidFill>
+              </a:rPr>
+              <a:t> &amp;&amp;</a:t>
             </a:r>
           </a:p>
           <a:p>
@@ -25637,6 +26155,11 @@
               </a:defRPr>
             </a:pPr>
             <a:r>
+              <a:rPr>
+                <a:solidFill>
+                  <a:srgbClr val="29263B"/>
+                </a:solidFill>
+              </a:rPr>
               <a:t>  </a:t>
             </a:r>
             <a:r>
@@ -25648,17 +26171,43 @@
               <a:t>test</a:t>
             </a:r>
             <a:r>
-              <a:t> -f </a:t>
-            </a:r>
-            <a:r>
               <a:rPr>
                 <a:solidFill>
+                  <a:srgbClr val="29263B"/>
+                </a:solidFill>
+              </a:rPr>
+              <a:t> </a:t>
+            </a:r>
+            <a:r>
+              <a:rPr>
+                <a:solidFill>
+                  <a:srgbClr val="B84E00"/>
+                </a:solidFill>
+              </a:rPr>
+              <a:t>-f</a:t>
+            </a:r>
+            <a:r>
+              <a:rPr>
+                <a:solidFill>
+                  <a:srgbClr val="29263B"/>
+                </a:solidFill>
+              </a:rPr>
+              <a:t> </a:t>
+            </a:r>
+            <a:r>
+              <a:rPr>
+                <a:solidFill>
                   <a:srgbClr val="0070C0"/>
                 </a:solidFill>
               </a:rPr>
               <a:t>zephyr-sdk-1.0.1/cmake/Zephyr-sdkConfig.cmake</a:t>
             </a:r>
             <a:r>
+              <a:rPr>
+                <a:solidFill>
+                  <a:srgbClr val="29263B"/>
+                </a:solidFill>
+              </a:rPr>
               <a:t> &amp;&amp;</a:t>
             </a:r>
           </a:p>
@@ -25680,6 +26229,11 @@
               </a:defRPr>
             </a:pPr>
             <a:r>
+              <a:rPr>
+                <a:solidFill>
+                  <a:srgbClr val="29263B"/>
+                </a:solidFill>
+              </a:rPr>
               <a:t>  </a:t>
             </a:r>
             <a:r>
@@ -25691,17 +26245,43 @@
               <a:t>test</a:t>
             </a:r>
             <a:r>
-              <a:t> ! -e </a:t>
-            </a:r>
-            <a:r>
               <a:rPr>
                 <a:solidFill>
+                  <a:srgbClr val="29263B"/>
+                </a:solidFill>
+              </a:rPr>
+              <a:t> ! </a:t>
+            </a:r>
+            <a:r>
+              <a:rPr>
+                <a:solidFill>
+                  <a:srgbClr val="B84E00"/>
+                </a:solidFill>
+              </a:rPr>
+              <a:t>-e</a:t>
+            </a:r>
+            <a:r>
+              <a:rPr>
+                <a:solidFill>
+                  <a:srgbClr val="29263B"/>
+                </a:solidFill>
+              </a:rPr>
+              <a:t> </a:t>
+            </a:r>
+            <a:r>
+              <a:rPr>
+                <a:solidFill>
                   <a:srgbClr val="0070C0"/>
                 </a:solidFill>
               </a:rPr>
               <a:t>zephyr-sdk-1.0.1/gnu/arm-zephyr-eabi</a:t>
             </a:r>
             <a:r>
+              <a:rPr>
+                <a:solidFill>
+                  <a:srgbClr val="29263B"/>
+                </a:solidFill>
+              </a:rPr>
               <a:t> &amp;&amp;</a:t>
             </a:r>
           </a:p>
@@ -25723,6 +26303,11 @@
               </a:defRPr>
             </a:pPr>
             <a:r>
+              <a:rPr>
+                <a:solidFill>
+                  <a:srgbClr val="29263B"/>
+                </a:solidFill>
+              </a:rPr>
               <a:t>  </a:t>
             </a:r>
             <a:r>
@@ -25734,6 +26319,11 @@
               <a:t>7z</a:t>
             </a:r>
             <a:r>
+              <a:rPr>
+                <a:solidFill>
+                  <a:srgbClr val="29263B"/>
+                </a:solidFill>
+              </a:rPr>
               <a:t> x </a:t>
             </a:r>
             <a:r>
@@ -25745,6 +26335,11 @@
               <a:t>toolchain_gnu_windows-x86_64_arm-zephyr-eabi.7z</a:t>
             </a:r>
             <a:r>
+              <a:rPr>
+                <a:solidFill>
+                  <a:srgbClr val="29263B"/>
+                </a:solidFill>
+              </a:rPr>
               <a:t> \</a:t>
             </a:r>
           </a:p>
@@ -25766,17 +26361,91 @@
               </a:defRPr>
             </a:pPr>
             <a:r>
-              <a:t>    "-o$(cygpath -m "$</a:t>
-            </a:r>
-            <a:r>
               <a:rPr>
                 <a:solidFill>
+                  <a:srgbClr val="29263B"/>
+                </a:solidFill>
+              </a:rPr>
+              <a:t>    "</a:t>
+            </a:r>
+            <a:r>
+              <a:rPr>
+                <a:solidFill>
+                  <a:srgbClr val="B84E00"/>
+                </a:solidFill>
+              </a:rPr>
+              <a:t>-o</a:t>
+            </a:r>
+            <a:r>
+              <a:rPr>
+                <a:solidFill>
+                  <a:srgbClr val="29263B"/>
+                </a:solidFill>
+              </a:rPr>
+              <a:t>$(</a:t>
+            </a:r>
+            <a:r>
+              <a:rPr>
+                <a:solidFill>
+                  <a:srgbClr val="A02B93"/>
+                </a:solidFill>
+              </a:rPr>
+              <a:t>cygpath</a:t>
+            </a:r>
+            <a:r>
+              <a:rPr>
+                <a:solidFill>
+                  <a:srgbClr val="29263B"/>
+                </a:solidFill>
+              </a:rPr>
+              <a:t> </a:t>
+            </a:r>
+            <a:r>
+              <a:rPr>
+                <a:solidFill>
+                  <a:srgbClr val="B84E00"/>
+                </a:solidFill>
+              </a:rPr>
+              <a:t>-m</a:t>
+            </a:r>
+            <a:r>
+              <a:rPr>
+                <a:solidFill>
+                  <a:srgbClr val="29263B"/>
+                </a:solidFill>
+              </a:rPr>
+              <a:t> "</a:t>
+            </a:r>
+            <a:r>
+              <a:rPr>
+                <a:solidFill>
+                  <a:srgbClr val="B84E00"/>
+                </a:solidFill>
+              </a:rPr>
+              <a:t>$</a:t>
+            </a:r>
+            <a:r>
+              <a:rPr>
+                <a:solidFill>
+                  <a:srgbClr val="B84E00"/>
+                </a:solidFill>
+              </a:rPr>
+              <a:t>PWD</a:t>
+            </a:r>
+            <a:r>
+              <a:rPr>
+                <a:solidFill>
                   <a:srgbClr val="0070C0"/>
                 </a:solidFill>
               </a:rPr>
-              <a:t>PWD/zephyr-sdk-1.0.1/gnu</a:t>
-            </a:r>
-            <a:r>
+              <a:t>/zephyr-sdk-1.0.1/gnu</a:t>
+            </a:r>
+            <a:r>
+              <a:rPr>
+                <a:solidFill>
+                  <a:srgbClr val="29263B"/>
+                </a:solidFill>
+              </a:rPr>
               <a:t>")"</a:t>
             </a:r>
           </a:p>
@@ -25843,7 +26512,20 @@
               </a:defRPr>
             </a:pPr>
             <a:r>
-              <a:t>完成后：SDK/gnu/arm-zephyr-eabi/bin/arm-zephyr-eabi-gcc.exe。</a:t>
+              <a:rPr/>
+              <a:t>完成后：</a:t>
+            </a:r>
+            <a:r>
+              <a:rPr>
+                <a:solidFill>
+                  <a:srgbClr val="0070C0"/>
+                </a:solidFill>
+              </a:rPr>
+              <a:t>SDK/gnu/arm-zephyr-eabi/bin/arm-zephyr-eabi-gcc.exe</a:t>
+            </a:r>
+            <a:r>
+              <a:rPr/>
+              <a:t>。</a:t>
             </a:r>
           </a:p>
           <a:p>
@@ -25864,6 +26546,7 @@
               </a:defRPr>
             </a:pPr>
             <a:r>
+              <a:rPr/>
               <a:t>任一检查失败就停止；已有 ARM 目录先核验。无需改 CMake，也无需为组装执行 /c。</a:t>
             </a:r>
           </a:p>
@@ -25933,7 +26616,22 @@
               <a:rPr u="sng">
                 <a:hlinkClick r:id="rId3"/>
               </a:rPr>
-              <a:t>依据：SDK/setup.cmd：pushd gnu 后解压 toolchain_gnu 附件</a:t>
+              <a:t>依据：</a:t>
+            </a:r>
+            <a:r>
+              <a:rPr u="sng">
+                <a:solidFill>
+                  <a:srgbClr val="0070C0"/>
+                </a:solidFill>
+                <a:hlinkClick r:id="rId3"/>
+              </a:rPr>
+              <a:t>SDK/setup.cmd</a:t>
+            </a:r>
+            <a:r>
+              <a:rPr u="sng">
+                <a:hlinkClick r:id="rId3"/>
+              </a:rPr>
+              <a:t>：pushd gnu 后解压 toolchain_gnu 附件</a:t>
             </a:r>
           </a:p>
         </p:txBody>
@@ -26386,6 +27084,11 @@
               </a:defRPr>
             </a:pPr>
             <a:r>
+              <a:rPr>
+                <a:solidFill>
+                  <a:srgbClr val="646173"/>
+                </a:solidFill>
+              </a:rPr>
               <a:t># Windows UCRT64；GNU 或 Minimal + ARM 均用相同目录核验。</a:t>
             </a:r>
           </a:p>
@@ -26415,6 +27118,11 @@
               <a:t>cd</a:t>
             </a:r>
             <a:r>
+              <a:rPr>
+                <a:solidFill>
+                  <a:srgbClr val="29263B"/>
+                </a:solidFill>
+              </a:rPr>
               <a:t> </a:t>
             </a:r>
             <a:r>
@@ -26452,7 +27160,20 @@
               <a:t>cat</a:t>
             </a:r>
             <a:r>
-              <a:t> sdk_version</a:t>
+              <a:rPr>
+                <a:solidFill>
+                  <a:srgbClr val="29263B"/>
+                </a:solidFill>
+              </a:rPr>
+              <a:t> </a:t>
+            </a:r>
+            <a:r>
+              <a:rPr>
+                <a:solidFill>
+                  <a:srgbClr val="0070C0"/>
+                </a:solidFill>
+              </a:rPr>
+              <a:t>sdk_version</a:t>
             </a:r>
           </a:p>
           <a:p>
@@ -26481,6 +27202,11 @@
               <a:t>ls</a:t>
             </a:r>
             <a:r>
+              <a:rPr>
+                <a:solidFill>
+                  <a:srgbClr val="29263B"/>
+                </a:solidFill>
+              </a:rPr>
               <a:t> </a:t>
             </a:r>
             <a:r>
@@ -26518,7 +27244,20 @@
               <a:t>./gnu/arm-zephyr-eabi/bin/arm-zephyr-eabi-gcc.exe</a:t>
             </a:r>
             <a:r>
-              <a:t> --version</a:t>
+              <a:rPr>
+                <a:solidFill>
+                  <a:srgbClr val="29263B"/>
+                </a:solidFill>
+              </a:rPr>
+              <a:t> </a:t>
+            </a:r>
+            <a:r>
+              <a:rPr>
+                <a:solidFill>
+                  <a:srgbClr val="B84E00"/>
+                </a:solidFill>
+              </a:rPr>
+              <a:t>--version</a:t>
             </a:r>
           </a:p>
           <a:p>
@@ -26547,7 +27286,20 @@
               <a:t>./gnu/arm-zephyr-eabi/bin/arm-zephyr-eabi-gcc.exe</a:t>
             </a:r>
             <a:r>
-              <a:t> -dumpmachine</a:t>
+              <a:rPr>
+                <a:solidFill>
+                  <a:srgbClr val="29263B"/>
+                </a:solidFill>
+              </a:rPr>
+              <a:t> </a:t>
+            </a:r>
+            <a:r>
+              <a:rPr>
+                <a:solidFill>
+                  <a:srgbClr val="B84E00"/>
+                </a:solidFill>
+              </a:rPr>
+              <a:t>-dumpmachine</a:t>
             </a:r>
           </a:p>
         </p:txBody>
@@ -26613,6 +27365,7 @@
               </a:defRPr>
             </a:pPr>
             <a:r>
+              <a:rPr/>
               <a:t>预期：SDK 1.0.1；CMake 包文件存在；GCC 14.3.0；目标 arm-zephyr-eabi。</a:t>
             </a:r>
           </a:p>
@@ -26634,6 +27387,7 @@
               </a:defRPr>
             </a:pPr>
             <a:r>
+              <a:rPr/>
               <a:t>这证明文件与程序可用，尚不证明某个 Zephyr 构建已选中它。</a:t>
             </a:r>
           </a:p>
@@ -27249,6 +28003,7 @@
               </a:defRPr>
             </a:pPr>
             <a:r>
+              <a:rPr/>
               <a:t>应用的 </a:t>
             </a:r>
             <a:r>
@@ -27257,9 +28012,18 @@
                   <a:srgbClr val="087B3D"/>
                 </a:solidFill>
               </a:rPr>
-              <a:t>find_package(Zephyr)</a:t>
-            </a:r>
-            <a:r>
+              <a:t>find_package</a:t>
+            </a:r>
+            <a:r>
+              <a:rPr>
+                <a:solidFill>
+                  <a:srgbClr val="087B3D"/>
+                </a:solidFill>
+              </a:rPr>
+              <a:t>(Zephyr)</a:t>
+            </a:r>
+            <a:r>
+              <a:rPr/>
               <a:t> 加载 Zephyr 构建逻辑。</a:t>
             </a:r>
           </a:p>
@@ -27281,6 +28045,7 @@
               </a:defRPr>
             </a:pPr>
             <a:r>
+              <a:rPr/>
               <a:t>Zephyr 请求 </a:t>
             </a:r>
             <a:r>
@@ -27289,9 +28054,18 @@
                   <a:srgbClr val="087B3D"/>
                 </a:solidFill>
               </a:rPr>
-              <a:t>find_package(Zephyr-sdk 1.0)</a:t>
-            </a:r>
-            <a:r>
+              <a:t>find_package</a:t>
+            </a:r>
+            <a:r>
+              <a:rPr>
+                <a:solidFill>
+                  <a:srgbClr val="087B3D"/>
+                </a:solidFill>
+              </a:rPr>
+              <a:t>(Zephyr-sdk 1.0)</a:t>
+            </a:r>
+            <a:r>
+              <a:rPr/>
               <a:t>，定位 SDK 包，再加载工具链规则。</a:t>
             </a:r>
           </a:p>
@@ -27362,7 +28136,16 @@
               </a:defRPr>
             </a:pPr>
             <a:r>
-              <a:t>应用 CMakeLists.txt</a:t>
+              <a:rPr/>
+              <a:t>应用 </a:t>
+            </a:r>
+            <a:r>
+              <a:rPr>
+                <a:solidFill>
+                  <a:srgbClr val="0070C0"/>
+                </a:solidFill>
+              </a:rPr>
+              <a:t>CMakeLists.txt</a:t>
             </a:r>
           </a:p>
         </p:txBody>
@@ -27432,6 +28215,7 @@
               </a:defRPr>
             </a:pPr>
             <a:r>
+              <a:rPr/>
               <a:t>Zephyr 的查找脚本</a:t>
             </a:r>
           </a:p>
@@ -27502,6 +28286,7 @@
               </a:defRPr>
             </a:pPr>
             <a:r>
+              <a:rPr/>
               <a:t>SDK 的 CMake 包</a:t>
             </a:r>
           </a:p>
@@ -27572,6 +28357,7 @@
               </a:defRPr>
             </a:pPr>
             <a:r>
+              <a:rPr/>
               <a:t>SDK 内的 ARM 工具</a:t>
             </a:r>
           </a:p>
@@ -27638,7 +28424,20 @@
               </a:defRPr>
             </a:pPr>
             <a:r>
-              <a:t>两种 SDK 包共用此链路。SDK 不复制进 zephyr-main，也无需把所有编译器加入 PATH。</a:t>
+              <a:rPr/>
+              <a:t>两种 SDK 包共用此链路。SDK 不复制进 zephyr-main，也无需把所有编译器加入 </a:t>
+            </a:r>
+            <a:r>
+              <a:rPr>
+                <a:solidFill>
+                  <a:srgbClr val="B84E00"/>
+                </a:solidFill>
+              </a:rPr>
+              <a:t>PATH</a:t>
+            </a:r>
+            <a:r>
+              <a:rPr/>
+              <a:t>。</a:t>
             </a:r>
           </a:p>
         </p:txBody>
@@ -27707,7 +28506,46 @@
               <a:rPr u="sng">
                 <a:hlinkClick r:id="rId3"/>
               </a:rPr>
-              <a:t>依据：FindHostTools.cmake → FindZephyr-sdk.cmake → SDK cmake</a:t>
+              <a:t>依据：</a:t>
+            </a:r>
+            <a:r>
+              <a:rPr u="sng">
+                <a:solidFill>
+                  <a:srgbClr val="0070C0"/>
+                </a:solidFill>
+                <a:hlinkClick r:id="rId3"/>
+              </a:rPr>
+              <a:t>FindHostTools.cmake</a:t>
+            </a:r>
+            <a:r>
+              <a:rPr u="sng">
+                <a:hlinkClick r:id="rId3"/>
+              </a:rPr>
+              <a:t> → </a:t>
+            </a:r>
+            <a:r>
+              <a:rPr u="sng">
+                <a:solidFill>
+                  <a:srgbClr val="0070C0"/>
+                </a:solidFill>
+                <a:hlinkClick r:id="rId3"/>
+              </a:rPr>
+              <a:t>FindZephyr-sdk.cmake</a:t>
+            </a:r>
+            <a:r>
+              <a:rPr u="sng">
+                <a:hlinkClick r:id="rId3"/>
+              </a:rPr>
+              <a:t> → SDK </a:t>
+            </a:r>
+            <a:r>
+              <a:rPr u="sng">
+                <a:solidFill>
+                  <a:srgbClr val="A02B93"/>
+                </a:solidFill>
+                <a:hlinkClick r:id="rId3"/>
+              </a:rPr>
+              <a:t>cmake</a:t>
             </a:r>
           </a:p>
         </p:txBody>
@@ -28467,6 +29305,7 @@
               </a:defRPr>
             </a:pPr>
             <a:r>
+              <a:rPr/>
               <a:t>能加载 Zephyr，不代表已找到 SDK。</a:t>
             </a:r>
           </a:p>
@@ -28488,7 +29327,32 @@
               </a:defRPr>
             </a:pPr>
             <a:r>
-              <a:t>主机 cmake.exe 执行这些 .cmake 脚本；Minimal 自带接入脚本，不必自带 cmake.exe。</a:t>
+              <a:rPr/>
+              <a:t>主机 </a:t>
+            </a:r>
+            <a:r>
+              <a:rPr>
+                <a:solidFill>
+                  <a:srgbClr val="0070C0"/>
+                </a:solidFill>
+              </a:rPr>
+              <a:t>cmake.exe</a:t>
+            </a:r>
+            <a:r>
+              <a:rPr/>
+              <a:t> 执行这些 .cmake 脚本；Minimal 自带接入脚本，不必自带 </a:t>
+            </a:r>
+            <a:r>
+              <a:rPr>
+                <a:solidFill>
+                  <a:srgbClr val="0070C0"/>
+                </a:solidFill>
+              </a:rPr>
+              <a:t>cmake.exe</a:t>
+            </a:r>
+            <a:r>
+              <a:rPr/>
+              <a:t>。</a:t>
             </a:r>
           </a:p>
         </p:txBody>
@@ -28557,7 +29421,31 @@
               <a:rPr u="sng">
                 <a:hlinkClick r:id="rId3"/>
               </a:rPr>
-              <a:t>依据：ZephyrConfig.cmake；FindZephyr-sdk.cmake</a:t>
+              <a:t>依据：</a:t>
+            </a:r>
+            <a:r>
+              <a:rPr u="sng">
+                <a:solidFill>
+                  <a:srgbClr val="0070C0"/>
+                </a:solidFill>
+                <a:hlinkClick r:id="rId3"/>
+              </a:rPr>
+              <a:t>ZephyrConfig.cmake</a:t>
+            </a:r>
+            <a:r>
+              <a:rPr u="sng">
+                <a:hlinkClick r:id="rId3"/>
+              </a:rPr>
+              <a:t>；</a:t>
+            </a:r>
+            <a:r>
+              <a:rPr u="sng">
+                <a:solidFill>
+                  <a:srgbClr val="0070C0"/>
+                </a:solidFill>
+                <a:hlinkClick r:id="rId3"/>
+              </a:rPr>
+              <a:t>FindZephyr-sdk.cmake</a:t>
             </a:r>
           </a:p>
         </p:txBody>
@@ -29246,7 +30134,18 @@
                           <a:ea typeface="Microsoft YaHei"/>
                           <a:cs typeface="Microsoft YaHei"/>
                         </a:rPr>
-                        <a:t>CMake -D</a:t>
+                        <a:t>CMake </a:t>
+                      </a:r>
+                      <a:r>
+                        <a:rPr sz="1875" b="0">
+                          <a:solidFill>
+                            <a:srgbClr val="B84E00"/>
+                          </a:solidFill>
+                          <a:latin typeface="Microsoft YaHei"/>
+                          <a:ea typeface="Microsoft YaHei"/>
+                          <a:cs typeface="Microsoft YaHei"/>
+                        </a:rPr>
+                        <a:t>-D</a:t>
                       </a:r>
                     </a:p>
                   </a:txBody>
@@ -29306,7 +30205,29 @@
                           <a:ea typeface="Microsoft YaHei"/>
                           <a:cs typeface="Microsoft YaHei"/>
                         </a:rPr>
-                        <a:t>该 -B 目录的 </a:t>
+                        <a:t>该 </a:t>
+                      </a:r>
+                      <a:r>
+                        <a:rPr sz="1875" b="0">
+                          <a:solidFill>
+                            <a:srgbClr val="B84E00"/>
+                          </a:solidFill>
+                          <a:latin typeface="Microsoft YaHei"/>
+                          <a:ea typeface="Microsoft YaHei"/>
+                          <a:cs typeface="Microsoft YaHei"/>
+                        </a:rPr>
+                        <a:t>-B</a:t>
+                      </a:r>
+                      <a:r>
+                        <a:rPr sz="1875" b="0">
+                          <a:solidFill>
+                            <a:srgbClr val="29263B"/>
+                          </a:solidFill>
+                          <a:latin typeface="Microsoft YaHei"/>
+                          <a:ea typeface="Microsoft YaHei"/>
+                          <a:cs typeface="Microsoft YaHei"/>
+                        </a:rPr>
+                        <a:t> 目录的 </a:t>
                       </a:r>
                       <a:r>
                         <a:rPr sz="1875" b="0">
@@ -29558,6 +30479,7 @@
               </a:defRPr>
             </a:pPr>
             <a:r>
+              <a:rPr/>
               <a:t>显式 SDK 根由 Zephyr 读取并限定查找位置。默认发现成功时，不再重复指定根或类型。</a:t>
             </a:r>
           </a:p>
@@ -29627,7 +30549,37 @@
               <a:rPr u="sng">
                 <a:hlinkClick r:id="rId3"/>
               </a:rPr>
-              <a:t>依据：zephyr_get；带 NO_DEFAULT_PATH 的 find_package 分支</a:t>
+              <a:t>依据：</a:t>
+            </a:r>
+            <a:r>
+              <a:rPr u="sng">
+                <a:solidFill>
+                  <a:srgbClr val="087B3D"/>
+                </a:solidFill>
+                <a:hlinkClick r:id="rId3"/>
+              </a:rPr>
+              <a:t>zephyr_get</a:t>
+            </a:r>
+            <a:r>
+              <a:rPr u="sng">
+                <a:hlinkClick r:id="rId3"/>
+              </a:rPr>
+              <a:t>；带 NO_DEFAULT_PATH 的 </a:t>
+            </a:r>
+            <a:r>
+              <a:rPr u="sng">
+                <a:solidFill>
+                  <a:srgbClr val="087B3D"/>
+                </a:solidFill>
+                <a:hlinkClick r:id="rId3"/>
+              </a:rPr>
+              <a:t>find_package</a:t>
+            </a:r>
+            <a:r>
+              <a:rPr u="sng">
+                <a:hlinkClick r:id="rId3"/>
+              </a:rPr>
+              <a:t> 分支</a:t>
             </a:r>
           </a:p>
         </p:txBody>
@@ -30011,6 +30963,11 @@
               </a:defRPr>
             </a:pPr>
             <a:r>
+              <a:rPr>
+                <a:solidFill>
+                  <a:srgbClr val="646173"/>
+                </a:solidFill>
+              </a:rPr>
               <a:t># Windows PowerShell；可选：准备当前用户的自动发现入口。</a:t>
             </a:r>
           </a:p>
@@ -30040,7 +30997,44 @@
               <a:t>Set-Location</a:t>
             </a:r>
             <a:r>
-              <a:t> -LiteralPath 'G:\zephyr_practice\zephyr-sdk-1.0.1'</a:t>
+              <a:rPr>
+                <a:solidFill>
+                  <a:srgbClr val="29263B"/>
+                </a:solidFill>
+              </a:rPr>
+              <a:t> </a:t>
+            </a:r>
+            <a:r>
+              <a:rPr>
+                <a:solidFill>
+                  <a:srgbClr val="B84E00"/>
+                </a:solidFill>
+              </a:rPr>
+              <a:t>-LiteralPath</a:t>
+            </a:r>
+            <a:r>
+              <a:rPr>
+                <a:solidFill>
+                  <a:srgbClr val="29263B"/>
+                </a:solidFill>
+              </a:rPr>
+              <a:t> '</a:t>
+            </a:r>
+            <a:r>
+              <a:rPr>
+                <a:solidFill>
+                  <a:srgbClr val="0070C0"/>
+                </a:solidFill>
+              </a:rPr>
+              <a:t>G:\zephyr_practice\zephyr-sdk-1.0.1</a:t>
+            </a:r>
+            <a:r>
+              <a:rPr>
+                <a:solidFill>
+                  <a:srgbClr val="29263B"/>
+                </a:solidFill>
+              </a:rPr>
+              <a:t>'</a:t>
             </a:r>
           </a:p>
           <a:p>
@@ -30069,6 +31063,11 @@
               <a:t>Get-Command</a:t>
             </a:r>
             <a:r>
+              <a:rPr>
+                <a:solidFill>
+                  <a:srgbClr val="29263B"/>
+                </a:solidFill>
+              </a:rPr>
               <a:t> </a:t>
             </a:r>
             <a:r>
@@ -30080,6 +31079,11 @@
               <a:t>cmake</a:t>
             </a:r>
             <a:r>
+              <a:rPr>
+                <a:solidFill>
+                  <a:srgbClr val="29263B"/>
+                </a:solidFill>
+              </a:rPr>
               <a:t>, </a:t>
             </a:r>
             <a:r>
@@ -30091,7 +31095,28 @@
               <a:t>7z</a:t>
             </a:r>
             <a:r>
-              <a:t> -ErrorAction Stop</a:t>
+              <a:rPr>
+                <a:solidFill>
+                  <a:srgbClr val="29263B"/>
+                </a:solidFill>
+              </a:rPr>
+              <a:t> </a:t>
+            </a:r>
+            <a:r>
+              <a:rPr>
+                <a:solidFill>
+                  <a:srgbClr val="B84E00"/>
+                </a:solidFill>
+              </a:rPr>
+              <a:t>-ErrorAction</a:t>
+            </a:r>
+            <a:r>
+              <a:rPr>
+                <a:solidFill>
+                  <a:srgbClr val="29263B"/>
+                </a:solidFill>
+              </a:rPr>
+              <a:t> Stop</a:t>
             </a:r>
           </a:p>
           <a:p>
@@ -30112,7 +31137,28 @@
               </a:defRPr>
             </a:pPr>
             <a:r>
-              <a:t>.\setup.cmd /c</a:t>
+              <a:rPr>
+                <a:solidFill>
+                  <a:srgbClr val="29263B"/>
+                </a:solidFill>
+              </a:rPr>
+              <a:t>.\</a:t>
+            </a:r>
+            <a:r>
+              <a:rPr>
+                <a:solidFill>
+                  <a:srgbClr val="0070C0"/>
+                </a:solidFill>
+              </a:rPr>
+              <a:t>setup.cmd</a:t>
+            </a:r>
+            <a:r>
+              <a:rPr>
+                <a:solidFill>
+                  <a:srgbClr val="29263B"/>
+                </a:solidFill>
+              </a:rPr>
+              <a:t> /c</a:t>
             </a:r>
           </a:p>
           <a:p>
@@ -30133,7 +31179,68 @@
               </a:defRPr>
             </a:pPr>
             <a:r>
-              <a:t>if ($LASTEXITCODE -ne 0) { throw '注册失败，查看前面的错误' }</a:t>
+              <a:rPr>
+                <a:solidFill>
+                  <a:srgbClr val="A02B93"/>
+                </a:solidFill>
+              </a:rPr>
+              <a:t>if</a:t>
+            </a:r>
+            <a:r>
+              <a:rPr>
+                <a:solidFill>
+                  <a:srgbClr val="29263B"/>
+                </a:solidFill>
+              </a:rPr>
+              <a:t> (</a:t>
+            </a:r>
+            <a:r>
+              <a:rPr>
+                <a:solidFill>
+                  <a:srgbClr val="B84E00"/>
+                </a:solidFill>
+              </a:rPr>
+              <a:t>$LASTEXITCODE</a:t>
+            </a:r>
+            <a:r>
+              <a:rPr>
+                <a:solidFill>
+                  <a:srgbClr val="29263B"/>
+                </a:solidFill>
+              </a:rPr>
+              <a:t> </a:t>
+            </a:r>
+            <a:r>
+              <a:rPr>
+                <a:solidFill>
+                  <a:srgbClr val="B84E00"/>
+                </a:solidFill>
+              </a:rPr>
+              <a:t>-ne</a:t>
+            </a:r>
+            <a:r>
+              <a:rPr>
+                <a:solidFill>
+                  <a:srgbClr val="29263B"/>
+                </a:solidFill>
+              </a:rPr>
+              <a:t> 0) { </a:t>
+            </a:r>
+            <a:r>
+              <a:rPr>
+                <a:solidFill>
+                  <a:srgbClr val="A02B93"/>
+                </a:solidFill>
+              </a:rPr>
+              <a:t>throw</a:t>
+            </a:r>
+            <a:r>
+              <a:rPr>
+                <a:solidFill>
+                  <a:srgbClr val="29263B"/>
+                </a:solidFill>
+              </a:rPr>
+              <a:t> '注册失败，查看前面的错误' }</a:t>
             </a:r>
           </a:p>
           <a:p>
@@ -30156,12 +31263,17 @@
             <a:r>
               <a:rPr>
                 <a:solidFill>
-                  <a:srgbClr val="A02B93"/>
+                  <a:srgbClr val="0070C0"/>
                 </a:solidFill>
               </a:rPr>
               <a:t>reg.exe</a:t>
             </a:r>
             <a:r>
+              <a:rPr>
+                <a:solidFill>
+                  <a:srgbClr val="29263B"/>
+                </a:solidFill>
+              </a:rPr>
               <a:t> query 'HKCU\Software\Kitware\CMake\Packages\Zephyr-sdk'</a:t>
             </a:r>
           </a:p>
@@ -30228,7 +31340,20 @@
               </a:defRPr>
             </a:pPr>
             <a:r>
-              <a:t>/c 保存 SDK/cmake 到当前 Windows 用户的 CMake 包记录，跨终端和重启保留。</a:t>
+              <a:rPr/>
+              <a:t>/c 保存 </a:t>
+            </a:r>
+            <a:r>
+              <a:rPr>
+                <a:solidFill>
+                  <a:srgbClr val="0070C0"/>
+                </a:solidFill>
+              </a:rPr>
+              <a:t>SDK/cmake</a:t>
+            </a:r>
+            <a:r>
+              <a:rPr/>
+              <a:t> 到当前 Windows 用户的 CMake 包记录，跨终端和重启保留。</a:t>
             </a:r>
           </a:p>
           <a:p>
@@ -30249,6 +31374,7 @@
               </a:defRPr>
             </a:pPr>
             <a:r>
+              <a:rPr/>
               <a:t>它不下载编译器、不绑定某个工程；选择显式路径时可以完全不运行。</a:t>
             </a:r>
           </a:p>
@@ -30318,7 +31444,22 @@
               <a:rPr u="sng">
                 <a:hlinkClick r:id="rId3"/>
               </a:rPr>
-              <a:t>依据：SDK/cmake/zephyr_sdk_export.cmake → HKCU 的 CMake Packages</a:t>
+              <a:t>依据：</a:t>
+            </a:r>
+            <a:r>
+              <a:rPr u="sng">
+                <a:solidFill>
+                  <a:srgbClr val="0070C0"/>
+                </a:solidFill>
+                <a:hlinkClick r:id="rId3"/>
+              </a:rPr>
+              <a:t>SDK/cmake/zephyr_sdk_export.cmake</a:t>
+            </a:r>
+            <a:r>
+              <a:rPr u="sng">
+                <a:hlinkClick r:id="rId3"/>
+              </a:rPr>
+              <a:t> → HKCU 的 CMake Packages</a:t>
             </a:r>
           </a:p>
         </p:txBody>
@@ -30771,6 +31912,11 @@
               </a:defRPr>
             </a:pPr>
             <a:r>
+              <a:rPr>
+                <a:solidFill>
+                  <a:srgbClr val="646173"/>
+                </a:solidFill>
+              </a:rPr>
               <a:t># Windows UCRT64；源码根；可选：把 SDK 根交给本窗口启动的 CMake。</a:t>
             </a:r>
           </a:p>
@@ -30800,6 +31946,11 @@
               <a:t>cd</a:t>
             </a:r>
             <a:r>
+              <a:rPr>
+                <a:solidFill>
+                  <a:srgbClr val="29263B"/>
+                </a:solidFill>
+              </a:rPr>
               <a:t> </a:t>
             </a:r>
             <a:r>
@@ -30837,6 +31988,11 @@
               <a:t>export</a:t>
             </a:r>
             <a:r>
+              <a:rPr>
+                <a:solidFill>
+                  <a:srgbClr val="29263B"/>
+                </a:solidFill>
+              </a:rPr>
               <a:t> </a:t>
             </a:r>
             <a:r>
@@ -30848,6 +32004,11 @@
               <a:t>ZEPHYR_SDK_INSTALL_DIR</a:t>
             </a:r>
             <a:r>
+              <a:rPr>
+                <a:solidFill>
+                  <a:srgbClr val="29263B"/>
+                </a:solidFill>
+              </a:rPr>
               <a:t>='</a:t>
             </a:r>
             <a:r>
@@ -30859,6 +32020,11 @@
               <a:t>G:/zephyr_practice/zephyr-sdk-1.0.1</a:t>
             </a:r>
             <a:r>
+              <a:rPr>
+                <a:solidFill>
+                  <a:srgbClr val="29263B"/>
+                </a:solidFill>
+              </a:rPr>
               <a:t>'</a:t>
             </a:r>
           </a:p>
@@ -30888,17 +32054,35 @@
               <a:t>printf</a:t>
             </a:r>
             <a:r>
-              <a:t> '%s\n' "$</a:t>
-            </a:r>
-            <a:r>
               <a:rPr>
                 <a:solidFill>
+                  <a:srgbClr val="29263B"/>
+                </a:solidFill>
+              </a:rPr>
+              <a:t> '%s\n' "</a:t>
+            </a:r>
+            <a:r>
+              <a:rPr>
+                <a:solidFill>
                   <a:srgbClr val="B84E00"/>
                 </a:solidFill>
               </a:rPr>
+              <a:t>$</a:t>
+            </a:r>
+            <a:r>
+              <a:rPr>
+                <a:solidFill>
+                  <a:srgbClr val="B84E00"/>
+                </a:solidFill>
+              </a:rPr>
               <a:t>ZEPHYR_SDK_INSTALL_DIR</a:t>
             </a:r>
             <a:r>
+              <a:rPr>
+                <a:solidFill>
+                  <a:srgbClr val="29263B"/>
+                </a:solidFill>
+              </a:rPr>
               <a:t>"</a:t>
             </a:r>
           </a:p>
@@ -30965,7 +32149,20 @@
               </a:defRPr>
             </a:pPr>
             <a:r>
-              <a:t>之后从本窗口启动的 CMake 继承此输入；不是修改 .venv。</a:t>
+              <a:rPr/>
+              <a:t>之后从本窗口启动的 CMake 继承此输入；不是修改 </a:t>
+            </a:r>
+            <a:r>
+              <a:rPr>
+                <a:solidFill>
+                  <a:srgbClr val="0070C0"/>
+                </a:solidFill>
+              </a:rPr>
+              <a:t>.venv</a:t>
+            </a:r>
+            <a:r>
+              <a:rPr/>
+              <a:t>。</a:t>
             </a:r>
           </a:p>
           <a:p>
@@ -30986,6 +32183,7 @@
               </a:defRPr>
             </a:pPr>
             <a:r>
+              <a:rPr/>
               <a:t>取消环境输入用 </a:t>
             </a:r>
             <a:r>
@@ -30997,6 +32195,7 @@
               <a:t>unset</a:t>
             </a:r>
             <a:r>
+              <a:rPr/>
               <a:t> </a:t>
             </a:r>
             <a:r>
@@ -31008,6 +32207,7 @@
               <a:t>ZEPHYR_SDK_INSTALL_DIR</a:t>
             </a:r>
             <a:r>
+              <a:rPr/>
               <a:t>。</a:t>
             </a:r>
           </a:p>
@@ -31029,6 +32229,7 @@
               </a:defRPr>
             </a:pPr>
             <a:r>
+              <a:rPr/>
               <a:t>已有构建缓存会保留上次选择，换 SDK 时使用新构建目录或按 P010 更新缓存。</a:t>
             </a:r>
           </a:p>
@@ -31098,7 +32299,46 @@
               <a:rPr u="sng">
                 <a:hlinkClick r:id="rId3"/>
               </a:rPr>
-              <a:t>依据：zephyr_get(ZEPHYR_SDK_INSTALL_DIR)；CMake CACHE PATH</a:t>
+              <a:t>依据：</a:t>
+            </a:r>
+            <a:r>
+              <a:rPr u="sng">
+                <a:solidFill>
+                  <a:srgbClr val="087B3D"/>
+                </a:solidFill>
+                <a:hlinkClick r:id="rId3"/>
+              </a:rPr>
+              <a:t>zephyr_get</a:t>
+            </a:r>
+            <a:r>
+              <a:rPr u="sng">
+                <a:hlinkClick r:id="rId3"/>
+              </a:rPr>
+              <a:t>(</a:t>
+            </a:r>
+            <a:r>
+              <a:rPr u="sng">
+                <a:solidFill>
+                  <a:srgbClr val="B84E00"/>
+                </a:solidFill>
+                <a:hlinkClick r:id="rId3"/>
+              </a:rPr>
+              <a:t>ZEPHYR_SDK_INSTALL_DIR</a:t>
+            </a:r>
+            <a:r>
+              <a:rPr u="sng">
+                <a:hlinkClick r:id="rId3"/>
+              </a:rPr>
+              <a:t>)；CMake CACHE </a:t>
+            </a:r>
+            <a:r>
+              <a:rPr u="sng">
+                <a:solidFill>
+                  <a:srgbClr val="B84E00"/>
+                </a:solidFill>
+                <a:hlinkClick r:id="rId3"/>
+              </a:rPr>
+              <a:t>PATH</a:t>
             </a:r>
           </a:p>
         </p:txBody>
@@ -31551,15 +32791,27 @@
               </a:defRPr>
             </a:pPr>
             <a:r>
-              <a:rPr dirty="0"/>
+              <a:rPr dirty="0">
+                <a:solidFill>
+                  <a:srgbClr val="646173"/>
+                </a:solidFill>
+              </a:rPr>
               <a:t># Windows UCRT64；完成 P002—P005 </a:t>
             </a:r>
             <a:r>
-              <a:rPr dirty="0" err="1"/>
+              <a:rPr dirty="0" err="1">
+                <a:solidFill>
+                  <a:srgbClr val="646173"/>
+                </a:solidFill>
+              </a:rPr>
               <a:t>后执行；新构建目录</a:t>
             </a:r>
             <a:r>
-              <a:rPr dirty="0"/>
+              <a:rPr dirty="0">
+                <a:solidFill>
+                  <a:srgbClr val="646173"/>
+                </a:solidFill>
+              </a:rPr>
               <a:t>。</a:t>
             </a:r>
           </a:p>
@@ -31589,7 +32841,11 @@
               <a:t>cd</a:t>
             </a:r>
             <a:r>
-              <a:rPr dirty="0"/>
+              <a:rPr dirty="0">
+                <a:solidFill>
+                  <a:srgbClr val="29263B"/>
+                </a:solidFill>
+              </a:rPr>
               <a:t> </a:t>
             </a:r>
             <a:r>
@@ -31643,7 +32899,11 @@
               <a:t>source</a:t>
             </a:r>
             <a:r>
-              <a:rPr dirty="0"/>
+              <a:rPr dirty="0">
+                <a:solidFill>
+                  <a:srgbClr val="29263B"/>
+                </a:solidFill>
+              </a:rPr>
               <a:t> </a:t>
             </a:r>
             <a:r>
@@ -31697,12 +32957,32 @@
               <a:t>cmake</a:t>
             </a:r>
             <a:r>
-              <a:rPr dirty="0"/>
-              <a:t> -S </a:t>
-            </a:r>
-            <a:r>
               <a:rPr dirty="0">
                 <a:solidFill>
+                  <a:srgbClr val="29263B"/>
+                </a:solidFill>
+              </a:rPr>
+              <a:t> </a:t>
+            </a:r>
+            <a:r>
+              <a:rPr dirty="0">
+                <a:solidFill>
+                  <a:srgbClr val="B84E00"/>
+                </a:solidFill>
+              </a:rPr>
+              <a:t>-S</a:t>
+            </a:r>
+            <a:r>
+              <a:rPr dirty="0">
+                <a:solidFill>
+                  <a:srgbClr val="29263B"/>
+                </a:solidFill>
+              </a:rPr>
+              <a:t> </a:t>
+            </a:r>
+            <a:r>
+              <a:rPr dirty="0">
+                <a:solidFill>
                   <a:srgbClr val="0070C0"/>
                 </a:solidFill>
               </a:rPr>
@@ -31717,12 +32997,32 @@
               <a:t>hello_world</a:t>
             </a:r>
             <a:r>
-              <a:rPr dirty="0"/>
-              <a:t> -B </a:t>
-            </a:r>
-            <a:r>
               <a:rPr dirty="0">
                 <a:solidFill>
+                  <a:srgbClr val="29263B"/>
+                </a:solidFill>
+              </a:rPr>
+              <a:t> </a:t>
+            </a:r>
+            <a:r>
+              <a:rPr dirty="0">
+                <a:solidFill>
+                  <a:srgbClr val="B84E00"/>
+                </a:solidFill>
+              </a:rPr>
+              <a:t>-B</a:t>
+            </a:r>
+            <a:r>
+              <a:rPr dirty="0">
+                <a:solidFill>
+                  <a:srgbClr val="29263B"/>
+                </a:solidFill>
+              </a:rPr>
+              <a:t> </a:t>
+            </a:r>
+            <a:r>
+              <a:rPr dirty="0">
+                <a:solidFill>
                   <a:srgbClr val="0070C0"/>
                 </a:solidFill>
               </a:rPr>
@@ -31745,7 +33045,11 @@
               <a:t>-explicit</a:t>
             </a:r>
             <a:r>
-              <a:rPr dirty="0"/>
+              <a:rPr dirty="0">
+                <a:solidFill>
+                  <a:srgbClr val="29263B"/>
+                </a:solidFill>
+              </a:rPr>
               <a:t> \</a:t>
             </a:r>
           </a:p>
@@ -31767,31 +33071,67 @@
               </a:defRPr>
             </a:pPr>
             <a:r>
-              <a:rPr dirty="0"/>
-              <a:t>  -G Ninja -D</a:t>
-            </a:r>
-            <a:r>
               <a:rPr dirty="0">
                 <a:solidFill>
+                  <a:srgbClr val="29263B"/>
+                </a:solidFill>
+              </a:rPr>
+              <a:t>  </a:t>
+            </a:r>
+            <a:r>
+              <a:rPr dirty="0">
+                <a:solidFill>
                   <a:srgbClr val="B84E00"/>
                 </a:solidFill>
               </a:rPr>
+              <a:t>-G</a:t>
+            </a:r>
+            <a:r>
+              <a:rPr dirty="0">
+                <a:solidFill>
+                  <a:srgbClr val="29263B"/>
+                </a:solidFill>
+              </a:rPr>
+              <a:t> Ninja </a:t>
+            </a:r>
+            <a:r>
+              <a:rPr dirty="0">
+                <a:solidFill>
+                  <a:srgbClr val="B84E00"/>
+                </a:solidFill>
+              </a:rPr>
+              <a:t>-D</a:t>
+            </a:r>
+            <a:r>
+              <a:rPr dirty="0">
+                <a:solidFill>
+                  <a:srgbClr val="B84E00"/>
+                </a:solidFill>
+              </a:rPr>
               <a:t>BOARD</a:t>
             </a:r>
             <a:r>
-              <a:rPr dirty="0"/>
+              <a:rPr dirty="0">
+                <a:solidFill>
+                  <a:srgbClr val="29263B"/>
+                </a:solidFill>
+              </a:rPr>
               <a:t>=</a:t>
             </a:r>
             <a:r>
               <a:rPr dirty="0">
                 <a:solidFill>
-                  <a:srgbClr val="0070C0"/>
+                  <a:srgbClr val="29263B"/>
                 </a:solidFill>
               </a:rPr>
               <a:t>mps2/an386</a:t>
             </a:r>
             <a:r>
-              <a:rPr dirty="0"/>
+              <a:rPr dirty="0">
+                <a:solidFill>
+                  <a:srgbClr val="29263B"/>
+                </a:solidFill>
+              </a:rPr>
               <a:t> \</a:t>
             </a:r>
           </a:p>
@@ -31813,11 +33153,27 @@
               </a:defRPr>
             </a:pPr>
             <a:r>
-              <a:rPr dirty="0"/>
-              <a:t>  "-</a:t>
-            </a:r>
-            <a:r>
-              <a:rPr dirty="0" err="1"/>
+              <a:rPr dirty="0">
+                <a:solidFill>
+                  <a:srgbClr val="29263B"/>
+                </a:solidFill>
+              </a:rPr>
+              <a:t>  "</a:t>
+            </a:r>
+            <a:r>
+              <a:rPr dirty="0">
+                <a:solidFill>
+                  <a:srgbClr val="B84E00"/>
+                </a:solidFill>
+              </a:rPr>
+              <a:t>-</a:t>
+            </a:r>
+            <a:r>
+              <a:rPr dirty="0" err="1">
+                <a:solidFill>
+                  <a:srgbClr val="B84E00"/>
+                </a:solidFill>
+              </a:rPr>
               <a:t>D</a:t>
             </a:r>
             <a:r>
@@ -31829,21 +33185,65 @@
               <a:t>Zephyr_DIR</a:t>
             </a:r>
             <a:r>
-              <a:rPr dirty="0"/>
+              <a:rPr dirty="0">
+                <a:solidFill>
+                  <a:srgbClr val="29263B"/>
+                </a:solidFill>
+              </a:rPr>
               <a:t>=$(</a:t>
             </a:r>
             <a:r>
-              <a:rPr dirty="0" err="1"/>
+              <a:rPr dirty="0" err="1">
+                <a:solidFill>
+                  <a:srgbClr val="A02B93"/>
+                </a:solidFill>
+              </a:rPr>
               <a:t>cygpath</a:t>
             </a:r>
             <a:r>
-              <a:rPr dirty="0"/>
-              <a:t> -m "$PWD")</a:t>
-            </a:r>
-            <a:r>
               <a:rPr dirty="0">
                 <a:solidFill>
-                  <a:srgbClr val="0070C0"/>
+                  <a:srgbClr val="29263B"/>
+                </a:solidFill>
+              </a:rPr>
+              <a:t> </a:t>
+            </a:r>
+            <a:r>
+              <a:rPr dirty="0">
+                <a:solidFill>
+                  <a:srgbClr val="B84E00"/>
+                </a:solidFill>
+              </a:rPr>
+              <a:t>-m</a:t>
+            </a:r>
+            <a:r>
+              <a:rPr dirty="0">
+                <a:solidFill>
+                  <a:srgbClr val="29263B"/>
+                </a:solidFill>
+              </a:rPr>
+              <a:t> "</a:t>
+            </a:r>
+            <a:r>
+              <a:rPr dirty="0">
+                <a:solidFill>
+                  <a:srgbClr val="B84E00"/>
+                </a:solidFill>
+              </a:rPr>
+              <a:t>$PWD</a:t>
+            </a:r>
+            <a:r>
+              <a:rPr dirty="0">
+                <a:solidFill>
+                  <a:srgbClr val="29263B"/>
+                </a:solidFill>
+              </a:rPr>
+              <a:t>")</a:t>
+            </a:r>
+            <a:r>
+              <a:rPr dirty="0">
+                <a:solidFill>
+                  <a:srgbClr val="29263B"/>
                 </a:solidFill>
               </a:rPr>
               <a:t>/share/zephyr-package/</a:t>
@@ -31851,13 +33251,17 @@
             <a:r>
               <a:rPr dirty="0" err="1">
                 <a:solidFill>
-                  <a:srgbClr val="0070C0"/>
+                  <a:srgbClr val="29263B"/>
                 </a:solidFill>
               </a:rPr>
               <a:t>cmake</a:t>
             </a:r>
             <a:r>
-              <a:rPr dirty="0"/>
+              <a:rPr dirty="0">
+                <a:solidFill>
+                  <a:srgbClr val="29263B"/>
+                </a:solidFill>
+              </a:rPr>
               <a:t>" \</a:t>
             </a:r>
           </a:p>
@@ -31879,28 +33283,116 @@
               </a:defRPr>
             </a:pPr>
             <a:r>
-              <a:rPr dirty="0"/>
-              <a:t>  "-D</a:t>
-            </a:r>
-            <a:r>
               <a:rPr dirty="0">
                 <a:solidFill>
+                  <a:srgbClr val="29263B"/>
+                </a:solidFill>
+              </a:rPr>
+              <a:t>  "</a:t>
+            </a:r>
+            <a:r>
+              <a:rPr dirty="0">
+                <a:solidFill>
                   <a:srgbClr val="B84E00"/>
                 </a:solidFill>
               </a:rPr>
+              <a:t>-D</a:t>
+            </a:r>
+            <a:r>
+              <a:rPr dirty="0">
+                <a:solidFill>
+                  <a:srgbClr val="B84E00"/>
+                </a:solidFill>
+              </a:rPr>
               <a:t>Python3_EXECUTABLE</a:t>
             </a:r>
             <a:r>
-              <a:rPr dirty="0"/>
+              <a:rPr dirty="0">
+                <a:solidFill>
+                  <a:srgbClr val="29263B"/>
+                </a:solidFill>
+              </a:rPr>
               <a:t>=$(</a:t>
             </a:r>
             <a:r>
-              <a:rPr dirty="0" err="1"/>
+              <a:rPr dirty="0" err="1">
+                <a:solidFill>
+                  <a:srgbClr val="A02B93"/>
+                </a:solidFill>
+              </a:rPr>
               <a:t>cygpath</a:t>
             </a:r>
             <a:r>
-              <a:rPr dirty="0"/>
-              <a:t> -m "$(command -v python)")" \</a:t>
+              <a:rPr dirty="0">
+                <a:solidFill>
+                  <a:srgbClr val="29263B"/>
+                </a:solidFill>
+              </a:rPr>
+              <a:t> </a:t>
+            </a:r>
+            <a:r>
+              <a:rPr dirty="0">
+                <a:solidFill>
+                  <a:srgbClr val="B84E00"/>
+                </a:solidFill>
+              </a:rPr>
+              <a:t>-m</a:t>
+            </a:r>
+            <a:r>
+              <a:rPr dirty="0">
+                <a:solidFill>
+                  <a:srgbClr val="29263B"/>
+                </a:solidFill>
+              </a:rPr>
+              <a:t> "$(</a:t>
+            </a:r>
+            <a:r>
+              <a:rPr dirty="0">
+                <a:solidFill>
+                  <a:srgbClr val="A02B93"/>
+                </a:solidFill>
+              </a:rPr>
+              <a:t>command</a:t>
+            </a:r>
+            <a:r>
+              <a:rPr dirty="0">
+                <a:solidFill>
+                  <a:srgbClr val="29263B"/>
+                </a:solidFill>
+              </a:rPr>
+              <a:t> </a:t>
+            </a:r>
+            <a:r>
+              <a:rPr dirty="0">
+                <a:solidFill>
+                  <a:srgbClr val="B84E00"/>
+                </a:solidFill>
+              </a:rPr>
+              <a:t>-v</a:t>
+            </a:r>
+            <a:r>
+              <a:rPr dirty="0">
+                <a:solidFill>
+                  <a:srgbClr val="29263B"/>
+                </a:solidFill>
+              </a:rPr>
+              <a:t> </a:t>
+            </a:r>
+            <a:r>
+              <a:rPr dirty="0">
+                <a:solidFill>
+                  <a:srgbClr val="A02B93"/>
+                </a:solidFill>
+              </a:rPr>
+              <a:t>python</a:t>
+            </a:r>
+            <a:r>
+              <a:rPr dirty="0">
+                <a:solidFill>
+                  <a:srgbClr val="29263B"/>
+                </a:solidFill>
+              </a:rPr>
+              <a:t>)")" \</a:t>
             </a:r>
           </a:p>
           <a:p>
@@ -31921,19 +33413,35 @@
               </a:defRPr>
             </a:pPr>
             <a:r>
-              <a:rPr dirty="0"/>
-              <a:t>  -D</a:t>
-            </a:r>
-            <a:r>
               <a:rPr dirty="0">
                 <a:solidFill>
+                  <a:srgbClr val="29263B"/>
+                </a:solidFill>
+              </a:rPr>
+              <a:t>  </a:t>
+            </a:r>
+            <a:r>
+              <a:rPr dirty="0">
+                <a:solidFill>
                   <a:srgbClr val="B84E00"/>
                 </a:solidFill>
               </a:rPr>
+              <a:t>-D</a:t>
+            </a:r>
+            <a:r>
+              <a:rPr dirty="0">
+                <a:solidFill>
+                  <a:srgbClr val="B84E00"/>
+                </a:solidFill>
+              </a:rPr>
               <a:t>ZEPHYR_SDK_INSTALL_DIR</a:t>
             </a:r>
             <a:r>
-              <a:rPr dirty="0"/>
+              <a:rPr dirty="0">
+                <a:solidFill>
+                  <a:srgbClr val="29263B"/>
+                </a:solidFill>
+              </a:rPr>
               <a:t>=</a:t>
             </a:r>
             <a:r>
@@ -31945,7 +33453,11 @@
               <a:t>G:/zephyr_practice/zephyr-sdk-1.0.1</a:t>
             </a:r>
             <a:r>
-              <a:rPr dirty="0"/>
+              <a:rPr dirty="0">
+                <a:solidFill>
+                  <a:srgbClr val="29263B"/>
+                </a:solidFill>
+              </a:rPr>
               <a:t> \</a:t>
             </a:r>
           </a:p>
@@ -31967,19 +33479,35 @@
               </a:defRPr>
             </a:pPr>
             <a:r>
-              <a:rPr dirty="0"/>
-              <a:t>  -D</a:t>
-            </a:r>
-            <a:r>
               <a:rPr dirty="0">
                 <a:solidFill>
+                  <a:srgbClr val="29263B"/>
+                </a:solidFill>
+              </a:rPr>
+              <a:t>  </a:t>
+            </a:r>
+            <a:r>
+              <a:rPr dirty="0">
+                <a:solidFill>
                   <a:srgbClr val="B84E00"/>
                 </a:solidFill>
               </a:rPr>
+              <a:t>-D</a:t>
+            </a:r>
+            <a:r>
+              <a:rPr dirty="0">
+                <a:solidFill>
+                  <a:srgbClr val="B84E00"/>
+                </a:solidFill>
+              </a:rPr>
               <a:t>CMAKE_EXPORT_COMPILE_COMMANDS</a:t>
             </a:r>
             <a:r>
-              <a:rPr dirty="0"/>
+              <a:rPr dirty="0">
+                <a:solidFill>
+                  <a:srgbClr val="29263B"/>
+                </a:solidFill>
+              </a:rPr>
               <a:t>=ON</a:t>
             </a:r>
             <a:br>
@@ -31994,20 +33522,32 @@
               <a:t>cmake</a:t>
             </a:r>
             <a:r>
-              <a:rPr lang="en-US" dirty="0"/>
+              <a:rPr lang="en-US" dirty="0">
+                <a:solidFill>
+                  <a:srgbClr val="29263B"/>
+                </a:solidFill>
+              </a:rPr>
               <a:t> </a:t>
             </a:r>
             <a:r>
               <a:rPr lang="en-US" dirty="0">
                 <a:solidFill>
-                  <a:schemeClr val="accent2"/>
-                </a:solidFill>
-              </a:rPr>
-              <a:t>--build </a:t>
+                  <a:srgbClr val="B84E00"/>
+                </a:solidFill>
+              </a:rPr>
+              <a:t>--build</a:t>
             </a:r>
             <a:r>
               <a:rPr lang="en-US" dirty="0">
                 <a:solidFill>
+                  <a:srgbClr val="29263B"/>
+                </a:solidFill>
+              </a:rPr>
+              <a:t> </a:t>
+            </a:r>
+            <a:r>
+              <a:rPr lang="en-US" dirty="0">
+                <a:solidFill>
                   <a:srgbClr val="0070C0"/>
                 </a:solidFill>
               </a:rPr>
@@ -32030,25 +33570,33 @@
               <a:t>-explicit</a:t>
             </a:r>
             <a:r>
-              <a:rPr lang="en-US" dirty="0"/>
+              <a:rPr lang="en-US" dirty="0">
+                <a:solidFill>
+                  <a:srgbClr val="29263B"/>
+                </a:solidFill>
+              </a:rPr>
               <a:t> </a:t>
             </a:r>
             <a:r>
               <a:rPr lang="en-US" dirty="0">
                 <a:solidFill>
-                  <a:schemeClr val="accent2"/>
+                  <a:srgbClr val="B84E00"/>
                 </a:solidFill>
               </a:rPr>
               <a:t>--parallel</a:t>
             </a:r>
             <a:r>
-              <a:rPr lang="en-US" dirty="0"/>
+              <a:rPr lang="en-US" dirty="0">
+                <a:solidFill>
+                  <a:srgbClr val="29263B"/>
+                </a:solidFill>
+              </a:rPr>
               <a:t> </a:t>
             </a:r>
             <a:r>
               <a:rPr lang="en-US" dirty="0">
                 <a:solidFill>
-                  <a:schemeClr val="accent6"/>
+                  <a:srgbClr val="29263B"/>
                 </a:solidFill>
               </a:rPr>
               <a:t>$(</a:t>
@@ -32056,7 +33604,7 @@
             <a:r>
               <a:rPr lang="en-US" dirty="0" err="1">
                 <a:solidFill>
-                  <a:schemeClr val="accent6"/>
+                  <a:srgbClr val="A02B93"/>
                 </a:solidFill>
               </a:rPr>
               <a:t>nproc</a:t>
@@ -32064,7 +33612,7 @@
             <a:r>
               <a:rPr lang="en-US" dirty="0">
                 <a:solidFill>
-                  <a:schemeClr val="accent6"/>
+                  <a:srgbClr val="29263B"/>
                 </a:solidFill>
               </a:rPr>
               <a:t>)</a:t>
@@ -32795,7 +34343,20 @@
               </a:defRPr>
             </a:pPr>
             <a:r>
-              <a:t>前置：P002 的 CMake、7-Zip、Python 与 .venv。</a:t>
+              <a:rPr/>
+              <a:t>前置：P002 的 CMake、7-Zip、Python 与 </a:t>
+            </a:r>
+            <a:r>
+              <a:rPr>
+                <a:solidFill>
+                  <a:srgbClr val="0070C0"/>
+                </a:solidFill>
+              </a:rPr>
+              <a:t>.venv</a:t>
+            </a:r>
+            <a:r>
+              <a:rPr/>
+              <a:t>。</a:t>
             </a:r>
           </a:p>
           <a:p>
@@ -32816,6 +34377,7 @@
               </a:defRPr>
             </a:pPr>
             <a:r>
+              <a:rPr/>
               <a:t>本期交付：磁盘上的 SDK / ARM 工具链，以及工程查找它们的入口。</a:t>
             </a:r>
           </a:p>
@@ -32886,6 +34448,7 @@
               </a:defRPr>
             </a:pPr>
             <a:r>
+              <a:rPr/>
               <a:t>① 认识三种包</a:t>
             </a:r>
           </a:p>
@@ -32956,6 +34519,7 @@
               </a:defRPr>
             </a:pPr>
             <a:r>
+              <a:rPr/>
               <a:t>② 下载并安装</a:t>
             </a:r>
           </a:p>
@@ -33026,6 +34590,7 @@
               </a:defRPr>
             </a:pPr>
             <a:r>
+              <a:rPr/>
               <a:t>③ 把 SDK 交给工程</a:t>
             </a:r>
           </a:p>
@@ -33096,6 +34661,7 @@
               </a:defRPr>
             </a:pPr>
             <a:r>
+              <a:rPr/>
               <a:t>④ 按目标找到编译器</a:t>
             </a:r>
           </a:p>
@@ -33251,6 +34817,7 @@
               <a:t>变量 / 参数</a:t>
             </a:r>
             <a:r>
+              <a:rPr/>
               <a:t>    </a:t>
             </a:r>
             <a:r>
@@ -33262,6 +34829,7 @@
               <a:t>文件 / 路径</a:t>
             </a:r>
             <a:r>
+              <a:rPr/>
               <a:t>    </a:t>
             </a:r>
             <a:r>
@@ -33273,6 +34841,7 @@
               <a:t>接口函数</a:t>
             </a:r>
             <a:r>
+              <a:rPr/>
               <a:t>    </a:t>
             </a:r>
             <a:r>
@@ -33665,6 +35234,7 @@
               </a:defRPr>
             </a:pPr>
             <a:r>
+              <a:rPr/>
               <a:t>只读 </a:t>
             </a:r>
             <a:r>
@@ -33676,6 +35246,7 @@
               <a:t>zephyr-main/cmake/modules/FindZephyr-sdk.cmake</a:t>
             </a:r>
             <a:r>
+              <a:rPr/>
               <a:t>；不新建或替换。</a:t>
             </a:r>
           </a:p>
@@ -33750,6 +35321,7 @@
               <a:t>zephyr_get</a:t>
             </a:r>
             <a:r>
+              <a:rPr/>
               <a:t>(</a:t>
             </a:r>
             <a:r>
@@ -33761,6 +35333,7 @@
               <a:t>ZEPHYR_SDK_INSTALL_DIR</a:t>
             </a:r>
             <a:r>
+              <a:rPr/>
               <a:t>)</a:t>
             </a:r>
           </a:p>
@@ -33801,6 +35374,7 @@
               </a:defRPr>
             </a:pPr>
             <a:r>
+              <a:rPr/>
               <a:t># 在显式 SDK 根分支内，官方调用的关键参数：</a:t>
             </a:r>
           </a:p>
@@ -33830,7 +35404,16 @@
               <a:t>find_package</a:t>
             </a:r>
             <a:r>
-              <a:t>(Zephyr-sdk ${Zephyr-sdk_FIND_VERSION_COMPLETE}</a:t>
+              <a:rPr/>
+              <a:t>(Zephyr-sdk </a:t>
+            </a:r>
+            <a:r>
+              <a:rPr>
+                <a:solidFill>
+                  <a:srgbClr val="B84E00"/>
+                </a:solidFill>
+              </a:rPr>
+              <a:t>${Zephyr-sdk_FIND_VERSION_COMPLETE}</a:t>
             </a:r>
           </a:p>
           <a:p>
@@ -33851,6 +35434,7 @@
               </a:defRPr>
             </a:pPr>
             <a:r>
+              <a:rPr/>
               <a:t>  REQUIRED QUIET CONFIG</a:t>
             </a:r>
           </a:p>
@@ -33872,7 +35456,8 @@
               </a:defRPr>
             </a:pPr>
             <a:r>
-              <a:t>  HINTS ${</a:t>
+              <a:rPr/>
+              <a:t>  HINTS </a:t>
             </a:r>
             <a:r>
               <a:rPr>
@@ -33880,20 +35465,38 @@
                   <a:srgbClr val="B84E00"/>
                 </a:solidFill>
               </a:rPr>
+              <a:t>${</a:t>
+            </a:r>
+            <a:r>
+              <a:rPr>
+                <a:solidFill>
+                  <a:srgbClr val="B84E00"/>
+                </a:solidFill>
+              </a:rPr>
               <a:t>ZEPHYR_SDK_INSTALL_DIR</a:t>
             </a:r>
             <a:r>
-              <a:t>} </a:t>
-            </a:r>
-            <a:r>
               <a:rPr>
                 <a:solidFill>
                   <a:srgbClr val="B84E00"/>
                 </a:solidFill>
               </a:rPr>
+              <a:t>}</a:t>
+            </a:r>
+            <a:r>
+              <a:rPr/>
+              <a:t> </a:t>
+            </a:r>
+            <a:r>
+              <a:rPr>
+                <a:solidFill>
+                  <a:srgbClr val="B84E00"/>
+                </a:solidFill>
+              </a:rPr>
               <a:t>NO_DEFAULT_PATH</a:t>
             </a:r>
             <a:r>
+              <a:rPr/>
               <a:t>)</a:t>
             </a:r>
           </a:p>
@@ -33960,6 +35563,7 @@
               </a:defRPr>
             </a:pPr>
             <a:r>
+              <a:rPr/>
               <a:t>没有显式根：按包记录 / 搜索路径选择兼容 SDK。</a:t>
             </a:r>
           </a:p>
@@ -33981,6 +35585,7 @@
               </a:defRPr>
             </a:pPr>
             <a:r>
+              <a:rPr/>
               <a:t>已有显式根：只在指定位置找；位置或版本错误就报错，不偷偷换另一套。</a:t>
             </a:r>
           </a:p>
@@ -34527,6 +36132,7 @@
               </a:defRPr>
             </a:pPr>
             <a:r>
+              <a:rPr/>
               <a:t>SDK 路径回答“用哪一套 SDK”；板与 SoC 配置回答“为哪种 CPU 生成程序”。</a:t>
             </a:r>
           </a:p>
@@ -34597,7 +36203,16 @@
               </a:defRPr>
             </a:pPr>
             <a:r>
-              <a:t>BOARD / SoC</a:t>
+              <a:rPr>
+                <a:solidFill>
+                  <a:srgbClr val="B84E00"/>
+                </a:solidFill>
+              </a:rPr>
+              <a:t>BOARD</a:t>
+            </a:r>
+            <a:r>
+              <a:rPr/>
+              <a:t> / SoC</a:t>
             </a:r>
           </a:p>
           <a:p>
@@ -34618,6 +36233,7 @@
               </a:defRPr>
             </a:pPr>
             <a:r>
+              <a:rPr/>
               <a:t>AN386 或后续 HC32</a:t>
             </a:r>
           </a:p>
@@ -34693,7 +36309,15 @@
                   <a:srgbClr val="B84E00"/>
                 </a:solidFill>
               </a:rPr>
-              <a:t>ARCH=arm</a:t>
+              <a:t>ARCH</a:t>
+            </a:r>
+            <a:r>
+              <a:rPr>
+                <a:solidFill>
+                  <a:srgbClr val="B84E00"/>
+                </a:solidFill>
+              </a:rPr>
+              <a:t>=arm</a:t>
             </a:r>
           </a:p>
           <a:p>
@@ -34714,6 +36338,7 @@
               </a:defRPr>
             </a:pPr>
             <a:r>
+              <a:rPr/>
               <a:t>32 位 Cortex-M4</a:t>
             </a:r>
           </a:p>
@@ -34784,6 +36409,7 @@
               </a:defRPr>
             </a:pPr>
             <a:r>
+              <a:rPr/>
               <a:t>SDK 的 GNU 规则</a:t>
             </a:r>
           </a:p>
@@ -34805,6 +36431,7 @@
               </a:defRPr>
             </a:pPr>
             <a:r>
+              <a:rPr/>
               <a:t>arm-zephyr-eabi</a:t>
             </a:r>
           </a:p>
@@ -34972,6 +36599,7 @@
               </a:defRPr>
             </a:pPr>
             <a:r>
+              <a:rPr/>
               <a:t>SDK：</a:t>
             </a:r>
             <a:r>
@@ -34983,6 +36611,7 @@
               <a:t>cmake/zephyr/gnu/target.cmake</a:t>
             </a:r>
             <a:r>
+              <a:rPr/>
               <a:t> 按 </a:t>
             </a:r>
             <a:r>
@@ -34994,6 +36623,7 @@
               <a:t>ARCH</a:t>
             </a:r>
             <a:r>
+              <a:rPr/>
               <a:t> 选择工具前缀。</a:t>
             </a:r>
           </a:p>
@@ -35015,6 +36645,7 @@
               </a:defRPr>
             </a:pPr>
             <a:r>
+              <a:rPr/>
               <a:t>Zephyr：</a:t>
             </a:r>
             <a:r>
@@ -35026,6 +36657,7 @@
               <a:t>cmake/compiler/gcc/target_arm.cmake</a:t>
             </a:r>
             <a:r>
+              <a:rPr/>
               <a:t> 生成 CPU / FPU / ABI 参数。</a:t>
             </a:r>
           </a:p>
@@ -35047,6 +36679,7 @@
               </a:defRPr>
             </a:pPr>
             <a:r>
+              <a:rPr/>
               <a:t>HC32F4A0 为 Cortex-M4F，复用 ARM 工具链；板 / SoC 支持仍需 P011 新增。</a:t>
             </a:r>
           </a:p>
@@ -35116,7 +36749,31 @@
               <a:rPr u="sng">
                 <a:hlinkClick r:id="rId3"/>
               </a:rPr>
-              <a:t>依据：SDK target.cmake：CROSS_COMPILE_TARGET_arm；Zephyr target_arm.cmake</a:t>
+              <a:t>依据：SDK </a:t>
+            </a:r>
+            <a:r>
+              <a:rPr u="sng">
+                <a:solidFill>
+                  <a:srgbClr val="0070C0"/>
+                </a:solidFill>
+                <a:hlinkClick r:id="rId3"/>
+              </a:rPr>
+              <a:t>target.cmake</a:t>
+            </a:r>
+            <a:r>
+              <a:rPr u="sng">
+                <a:hlinkClick r:id="rId3"/>
+              </a:rPr>
+              <a:t>：CROSS_COMPILE_TARGET_arm；Zephyr </a:t>
+            </a:r>
+            <a:r>
+              <a:rPr u="sng">
+                <a:solidFill>
+                  <a:srgbClr val="0070C0"/>
+                </a:solidFill>
+                <a:hlinkClick r:id="rId3"/>
+              </a:rPr>
+              <a:t>target_arm.cmake</a:t>
             </a:r>
           </a:p>
         </p:txBody>
@@ -35500,6 +37157,7 @@
               </a:defRPr>
             </a:pPr>
             <a:r>
+              <a:rPr/>
               <a:t>保留 </a:t>
             </a:r>
             <a:r>
@@ -35511,6 +37169,7 @@
               <a:t>G:/zephyr_practice/arm-zephyr-eabi</a:t>
             </a:r>
             <a:r>
+              <a:rPr/>
               <a:t>，不放入 SDK。</a:t>
             </a:r>
           </a:p>
@@ -35532,6 +37191,7 @@
               </a:defRPr>
             </a:pPr>
             <a:r>
+              <a:rPr/>
               <a:t>此目录缺 SDK 包配置，改用 Zephyr 自带的 </a:t>
             </a:r>
             <a:r>
@@ -35543,6 +37203,7 @@
               <a:t>cross-compile</a:t>
             </a:r>
             <a:r>
+              <a:rPr/>
               <a:t> 接入规则。</a:t>
             </a:r>
           </a:p>
@@ -35939,7 +37600,20 @@
               </a:defRPr>
             </a:pPr>
             <a:r>
-              <a:t>读取者：zephyr-main/cmake/toolchain/cross-compile/generic.cmake。</a:t>
+              <a:rPr/>
+              <a:t>读取者：</a:t>
+            </a:r>
+            <a:r>
+              <a:rPr>
+                <a:solidFill>
+                  <a:srgbClr val="0070C0"/>
+                </a:solidFill>
+              </a:rPr>
+              <a:t>zephyr-main/cmake/toolchain/cross-compile/generic.cmake</a:t>
+            </a:r>
+            <a:r>
+              <a:rPr/>
+              <a:t>。</a:t>
             </a:r>
           </a:p>
           <a:p>
@@ -35960,7 +37634,20 @@
               </a:defRPr>
             </a:pPr>
             <a:r>
-              <a:t>前缀末尾保留横线；它不是 bin 目录，也不是完整 gcc.exe 路径。</a:t>
+              <a:rPr/>
+              <a:t>前缀末尾保留横线；它不是 bin 目录，也不是完整 </a:t>
+            </a:r>
+            <a:r>
+              <a:rPr>
+                <a:solidFill>
+                  <a:srgbClr val="0070C0"/>
+                </a:solidFill>
+              </a:rPr>
+              <a:t>gcc.exe</a:t>
+            </a:r>
+            <a:r>
+              <a:rPr/>
+              <a:t> 路径。</a:t>
             </a:r>
           </a:p>
         </p:txBody>
@@ -36029,7 +37716,52 @@
               <a:rPr u="sng">
                 <a:hlinkClick r:id="rId3"/>
               </a:rPr>
-              <a:t>依据：zephyr_get(CROSS_COMPILE)；set(COMPILER gcc)</a:t>
+              <a:t>依据：</a:t>
+            </a:r>
+            <a:r>
+              <a:rPr u="sng">
+                <a:solidFill>
+                  <a:srgbClr val="087B3D"/>
+                </a:solidFill>
+                <a:hlinkClick r:id="rId3"/>
+              </a:rPr>
+              <a:t>zephyr_get</a:t>
+            </a:r>
+            <a:r>
+              <a:rPr u="sng">
+                <a:hlinkClick r:id="rId3"/>
+              </a:rPr>
+              <a:t>(</a:t>
+            </a:r>
+            <a:r>
+              <a:rPr u="sng">
+                <a:solidFill>
+                  <a:srgbClr val="B84E00"/>
+                </a:solidFill>
+                <a:hlinkClick r:id="rId3"/>
+              </a:rPr>
+              <a:t>CROSS_COMPILE</a:t>
+            </a:r>
+            <a:r>
+              <a:rPr u="sng">
+                <a:hlinkClick r:id="rId3"/>
+              </a:rPr>
+              <a:t>)；</a:t>
+            </a:r>
+            <a:r>
+              <a:rPr u="sng">
+                <a:solidFill>
+                  <a:srgbClr val="087B3D"/>
+                </a:solidFill>
+                <a:hlinkClick r:id="rId3"/>
+              </a:rPr>
+              <a:t>set</a:t>
+            </a:r>
+            <a:r>
+              <a:rPr u="sng">
+                <a:hlinkClick r:id="rId3"/>
+              </a:rPr>
+              <a:t>(COMPILER gcc)</a:t>
             </a:r>
           </a:p>
         </p:txBody>
@@ -36413,7 +38145,11 @@
               </a:defRPr>
             </a:pPr>
             <a:r>
-              <a:rPr dirty="0"/>
+              <a:rPr dirty="0">
+                <a:solidFill>
+                  <a:srgbClr val="646173"/>
+                </a:solidFill>
+              </a:rPr>
               <a:t># Windows UCRT64；完成 P002—P005；已解压同版独立 ARM 包。</a:t>
             </a:r>
           </a:p>
@@ -36443,7 +38179,11 @@
               <a:t>cd</a:t>
             </a:r>
             <a:r>
-              <a:rPr dirty="0"/>
+              <a:rPr dirty="0">
+                <a:solidFill>
+                  <a:srgbClr val="29263B"/>
+                </a:solidFill>
+              </a:rPr>
               <a:t> </a:t>
             </a:r>
             <a:r>
@@ -36497,7 +38237,11 @@
               <a:t>source</a:t>
             </a:r>
             <a:r>
-              <a:rPr dirty="0"/>
+              <a:rPr dirty="0">
+                <a:solidFill>
+                  <a:srgbClr val="29263B"/>
+                </a:solidFill>
+              </a:rPr>
               <a:t> </a:t>
             </a:r>
             <a:r>
@@ -36551,7 +38295,11 @@
               <a:t>unset</a:t>
             </a:r>
             <a:r>
-              <a:rPr dirty="0"/>
+              <a:rPr dirty="0">
+                <a:solidFill>
+                  <a:srgbClr val="29263B"/>
+                </a:solidFill>
+              </a:rPr>
               <a:t> </a:t>
             </a:r>
             <a:r>
@@ -36589,12 +38337,32 @@
               <a:t>cmake</a:t>
             </a:r>
             <a:r>
-              <a:rPr dirty="0"/>
-              <a:t> -S </a:t>
-            </a:r>
-            <a:r>
               <a:rPr dirty="0">
                 <a:solidFill>
+                  <a:srgbClr val="29263B"/>
+                </a:solidFill>
+              </a:rPr>
+              <a:t> </a:t>
+            </a:r>
+            <a:r>
+              <a:rPr dirty="0">
+                <a:solidFill>
+                  <a:srgbClr val="B84E00"/>
+                </a:solidFill>
+              </a:rPr>
+              <a:t>-S</a:t>
+            </a:r>
+            <a:r>
+              <a:rPr dirty="0">
+                <a:solidFill>
+                  <a:srgbClr val="29263B"/>
+                </a:solidFill>
+              </a:rPr>
+              <a:t> </a:t>
+            </a:r>
+            <a:r>
+              <a:rPr dirty="0">
+                <a:solidFill>
                   <a:srgbClr val="0070C0"/>
                 </a:solidFill>
               </a:rPr>
@@ -36609,19 +38377,43 @@
               <a:t>hello_world</a:t>
             </a:r>
             <a:r>
-              <a:rPr dirty="0"/>
-              <a:t> -B </a:t>
-            </a:r>
-            <a:r>
               <a:rPr dirty="0">
                 <a:solidFill>
+                  <a:srgbClr val="29263B"/>
+                </a:solidFill>
+              </a:rPr>
+              <a:t> </a:t>
+            </a:r>
+            <a:r>
+              <a:rPr dirty="0">
+                <a:solidFill>
+                  <a:srgbClr val="B84E00"/>
+                </a:solidFill>
+              </a:rPr>
+              <a:t>-B</a:t>
+            </a:r>
+            <a:r>
+              <a:rPr dirty="0">
+                <a:solidFill>
+                  <a:srgbClr val="29263B"/>
+                </a:solidFill>
+              </a:rPr>
+              <a:t> </a:t>
+            </a:r>
+            <a:r>
+              <a:rPr dirty="0">
+                <a:solidFill>
                   <a:srgbClr val="0070C0"/>
                 </a:solidFill>
               </a:rPr>
               <a:t>build/learning-tools/p003/arm-standalone</a:t>
             </a:r>
             <a:r>
-              <a:rPr dirty="0"/>
+              <a:rPr dirty="0">
+                <a:solidFill>
+                  <a:srgbClr val="29263B"/>
+                </a:solidFill>
+              </a:rPr>
               <a:t> \</a:t>
             </a:r>
           </a:p>
@@ -36643,31 +38435,67 @@
               </a:defRPr>
             </a:pPr>
             <a:r>
-              <a:rPr dirty="0"/>
-              <a:t>  -G Ninja -D</a:t>
-            </a:r>
-            <a:r>
               <a:rPr dirty="0">
                 <a:solidFill>
+                  <a:srgbClr val="29263B"/>
+                </a:solidFill>
+              </a:rPr>
+              <a:t>  </a:t>
+            </a:r>
+            <a:r>
+              <a:rPr dirty="0">
+                <a:solidFill>
                   <a:srgbClr val="B84E00"/>
                 </a:solidFill>
               </a:rPr>
+              <a:t>-G</a:t>
+            </a:r>
+            <a:r>
+              <a:rPr dirty="0">
+                <a:solidFill>
+                  <a:srgbClr val="29263B"/>
+                </a:solidFill>
+              </a:rPr>
+              <a:t> Ninja </a:t>
+            </a:r>
+            <a:r>
+              <a:rPr dirty="0">
+                <a:solidFill>
+                  <a:srgbClr val="B84E00"/>
+                </a:solidFill>
+              </a:rPr>
+              <a:t>-D</a:t>
+            </a:r>
+            <a:r>
+              <a:rPr dirty="0">
+                <a:solidFill>
+                  <a:srgbClr val="B84E00"/>
+                </a:solidFill>
+              </a:rPr>
               <a:t>BOARD</a:t>
             </a:r>
             <a:r>
-              <a:rPr dirty="0"/>
+              <a:rPr dirty="0">
+                <a:solidFill>
+                  <a:srgbClr val="29263B"/>
+                </a:solidFill>
+              </a:rPr>
               <a:t>=</a:t>
             </a:r>
             <a:r>
               <a:rPr dirty="0">
                 <a:solidFill>
-                  <a:srgbClr val="0070C0"/>
+                  <a:srgbClr val="29263B"/>
                 </a:solidFill>
               </a:rPr>
               <a:t>mps2/an386</a:t>
             </a:r>
             <a:r>
-              <a:rPr dirty="0"/>
+              <a:rPr dirty="0">
+                <a:solidFill>
+                  <a:srgbClr val="29263B"/>
+                </a:solidFill>
+              </a:rPr>
               <a:t> \</a:t>
             </a:r>
           </a:p>
@@ -36689,11 +38517,27 @@
               </a:defRPr>
             </a:pPr>
             <a:r>
-              <a:rPr dirty="0"/>
-              <a:t>  "-</a:t>
-            </a:r>
-            <a:r>
-              <a:rPr dirty="0" err="1"/>
+              <a:rPr dirty="0">
+                <a:solidFill>
+                  <a:srgbClr val="29263B"/>
+                </a:solidFill>
+              </a:rPr>
+              <a:t>  "</a:t>
+            </a:r>
+            <a:r>
+              <a:rPr dirty="0">
+                <a:solidFill>
+                  <a:srgbClr val="B84E00"/>
+                </a:solidFill>
+              </a:rPr>
+              <a:t>-</a:t>
+            </a:r>
+            <a:r>
+              <a:rPr dirty="0" err="1">
+                <a:solidFill>
+                  <a:srgbClr val="B84E00"/>
+                </a:solidFill>
+              </a:rPr>
               <a:t>D</a:t>
             </a:r>
             <a:r>
@@ -36705,21 +38549,65 @@
               <a:t>Zephyr_DIR</a:t>
             </a:r>
             <a:r>
-              <a:rPr dirty="0"/>
+              <a:rPr dirty="0">
+                <a:solidFill>
+                  <a:srgbClr val="29263B"/>
+                </a:solidFill>
+              </a:rPr>
               <a:t>=$(</a:t>
             </a:r>
             <a:r>
-              <a:rPr dirty="0" err="1"/>
+              <a:rPr dirty="0" err="1">
+                <a:solidFill>
+                  <a:srgbClr val="A02B93"/>
+                </a:solidFill>
+              </a:rPr>
               <a:t>cygpath</a:t>
             </a:r>
             <a:r>
-              <a:rPr dirty="0"/>
-              <a:t> -m "$PWD")</a:t>
-            </a:r>
-            <a:r>
               <a:rPr dirty="0">
                 <a:solidFill>
-                  <a:srgbClr val="0070C0"/>
+                  <a:srgbClr val="29263B"/>
+                </a:solidFill>
+              </a:rPr>
+              <a:t> </a:t>
+            </a:r>
+            <a:r>
+              <a:rPr dirty="0">
+                <a:solidFill>
+                  <a:srgbClr val="B84E00"/>
+                </a:solidFill>
+              </a:rPr>
+              <a:t>-m</a:t>
+            </a:r>
+            <a:r>
+              <a:rPr dirty="0">
+                <a:solidFill>
+                  <a:srgbClr val="29263B"/>
+                </a:solidFill>
+              </a:rPr>
+              <a:t> "</a:t>
+            </a:r>
+            <a:r>
+              <a:rPr dirty="0">
+                <a:solidFill>
+                  <a:srgbClr val="B84E00"/>
+                </a:solidFill>
+              </a:rPr>
+              <a:t>$PWD</a:t>
+            </a:r>
+            <a:r>
+              <a:rPr dirty="0">
+                <a:solidFill>
+                  <a:srgbClr val="29263B"/>
+                </a:solidFill>
+              </a:rPr>
+              <a:t>")</a:t>
+            </a:r>
+            <a:r>
+              <a:rPr dirty="0">
+                <a:solidFill>
+                  <a:srgbClr val="29263B"/>
                 </a:solidFill>
               </a:rPr>
               <a:t>/share/zephyr-package/</a:t>
@@ -36727,13 +38615,17 @@
             <a:r>
               <a:rPr dirty="0" err="1">
                 <a:solidFill>
-                  <a:srgbClr val="0070C0"/>
+                  <a:srgbClr val="29263B"/>
                 </a:solidFill>
               </a:rPr>
               <a:t>cmake</a:t>
             </a:r>
             <a:r>
-              <a:rPr dirty="0"/>
+              <a:rPr dirty="0">
+                <a:solidFill>
+                  <a:srgbClr val="29263B"/>
+                </a:solidFill>
+              </a:rPr>
               <a:t>" \</a:t>
             </a:r>
           </a:p>
@@ -36755,28 +38647,116 @@
               </a:defRPr>
             </a:pPr>
             <a:r>
-              <a:rPr dirty="0"/>
-              <a:t>  "-D</a:t>
-            </a:r>
-            <a:r>
               <a:rPr dirty="0">
                 <a:solidFill>
+                  <a:srgbClr val="29263B"/>
+                </a:solidFill>
+              </a:rPr>
+              <a:t>  "</a:t>
+            </a:r>
+            <a:r>
+              <a:rPr dirty="0">
+                <a:solidFill>
                   <a:srgbClr val="B84E00"/>
                 </a:solidFill>
               </a:rPr>
+              <a:t>-D</a:t>
+            </a:r>
+            <a:r>
+              <a:rPr dirty="0">
+                <a:solidFill>
+                  <a:srgbClr val="B84E00"/>
+                </a:solidFill>
+              </a:rPr>
               <a:t>Python3_EXECUTABLE</a:t>
             </a:r>
             <a:r>
-              <a:rPr dirty="0"/>
+              <a:rPr dirty="0">
+                <a:solidFill>
+                  <a:srgbClr val="29263B"/>
+                </a:solidFill>
+              </a:rPr>
               <a:t>=$(</a:t>
             </a:r>
             <a:r>
-              <a:rPr dirty="0" err="1"/>
+              <a:rPr dirty="0" err="1">
+                <a:solidFill>
+                  <a:srgbClr val="A02B93"/>
+                </a:solidFill>
+              </a:rPr>
               <a:t>cygpath</a:t>
             </a:r>
             <a:r>
-              <a:rPr dirty="0"/>
-              <a:t> -m "$(command -v python)")" \</a:t>
+              <a:rPr dirty="0">
+                <a:solidFill>
+                  <a:srgbClr val="29263B"/>
+                </a:solidFill>
+              </a:rPr>
+              <a:t> </a:t>
+            </a:r>
+            <a:r>
+              <a:rPr dirty="0">
+                <a:solidFill>
+                  <a:srgbClr val="B84E00"/>
+                </a:solidFill>
+              </a:rPr>
+              <a:t>-m</a:t>
+            </a:r>
+            <a:r>
+              <a:rPr dirty="0">
+                <a:solidFill>
+                  <a:srgbClr val="29263B"/>
+                </a:solidFill>
+              </a:rPr>
+              <a:t> "$(</a:t>
+            </a:r>
+            <a:r>
+              <a:rPr dirty="0">
+                <a:solidFill>
+                  <a:srgbClr val="A02B93"/>
+                </a:solidFill>
+              </a:rPr>
+              <a:t>command</a:t>
+            </a:r>
+            <a:r>
+              <a:rPr dirty="0">
+                <a:solidFill>
+                  <a:srgbClr val="29263B"/>
+                </a:solidFill>
+              </a:rPr>
+              <a:t> </a:t>
+            </a:r>
+            <a:r>
+              <a:rPr dirty="0">
+                <a:solidFill>
+                  <a:srgbClr val="B84E00"/>
+                </a:solidFill>
+              </a:rPr>
+              <a:t>-v</a:t>
+            </a:r>
+            <a:r>
+              <a:rPr dirty="0">
+                <a:solidFill>
+                  <a:srgbClr val="29263B"/>
+                </a:solidFill>
+              </a:rPr>
+              <a:t> </a:t>
+            </a:r>
+            <a:r>
+              <a:rPr dirty="0">
+                <a:solidFill>
+                  <a:srgbClr val="A02B93"/>
+                </a:solidFill>
+              </a:rPr>
+              <a:t>python</a:t>
+            </a:r>
+            <a:r>
+              <a:rPr dirty="0">
+                <a:solidFill>
+                  <a:srgbClr val="29263B"/>
+                </a:solidFill>
+              </a:rPr>
+              <a:t>)")" \</a:t>
             </a:r>
           </a:p>
           <a:p>
@@ -36797,19 +38777,35 @@
               </a:defRPr>
             </a:pPr>
             <a:r>
-              <a:rPr dirty="0"/>
-              <a:t>  -D</a:t>
-            </a:r>
-            <a:r>
               <a:rPr dirty="0">
                 <a:solidFill>
+                  <a:srgbClr val="29263B"/>
+                </a:solidFill>
+              </a:rPr>
+              <a:t>  </a:t>
+            </a:r>
+            <a:r>
+              <a:rPr dirty="0">
+                <a:solidFill>
                   <a:srgbClr val="B84E00"/>
                 </a:solidFill>
               </a:rPr>
+              <a:t>-D</a:t>
+            </a:r>
+            <a:r>
+              <a:rPr dirty="0">
+                <a:solidFill>
+                  <a:srgbClr val="B84E00"/>
+                </a:solidFill>
+              </a:rPr>
               <a:t>ZEPHYR_TOOLCHAIN_VARIANT</a:t>
             </a:r>
             <a:r>
-              <a:rPr dirty="0"/>
+              <a:rPr dirty="0">
+                <a:solidFill>
+                  <a:srgbClr val="29263B"/>
+                </a:solidFill>
+              </a:rPr>
               <a:t>=cross-compile \</a:t>
             </a:r>
           </a:p>
@@ -36831,19 +38827,35 @@
               </a:defRPr>
             </a:pPr>
             <a:r>
-              <a:rPr dirty="0"/>
-              <a:t>  -D</a:t>
-            </a:r>
-            <a:r>
               <a:rPr dirty="0">
                 <a:solidFill>
+                  <a:srgbClr val="29263B"/>
+                </a:solidFill>
+              </a:rPr>
+              <a:t>  </a:t>
+            </a:r>
+            <a:r>
+              <a:rPr dirty="0">
+                <a:solidFill>
                   <a:srgbClr val="B84E00"/>
                 </a:solidFill>
               </a:rPr>
+              <a:t>-D</a:t>
+            </a:r>
+            <a:r>
+              <a:rPr dirty="0">
+                <a:solidFill>
+                  <a:srgbClr val="B84E00"/>
+                </a:solidFill>
+              </a:rPr>
               <a:t>CROSS_COMPILE</a:t>
             </a:r>
             <a:r>
-              <a:rPr dirty="0"/>
+              <a:rPr dirty="0">
+                <a:solidFill>
+                  <a:srgbClr val="29263B"/>
+                </a:solidFill>
+              </a:rPr>
               <a:t>=</a:t>
             </a:r>
             <a:r>
@@ -36855,7 +38867,11 @@
               <a:t>G:/zephyr_practice/arm-zephyr-eabi/bin/arm-zephyr-eabi-</a:t>
             </a:r>
             <a:r>
-              <a:rPr dirty="0"/>
+              <a:rPr dirty="0">
+                <a:solidFill>
+                  <a:srgbClr val="29263B"/>
+                </a:solidFill>
+              </a:rPr>
               <a:t> \</a:t>
             </a:r>
           </a:p>
@@ -36877,19 +38893,35 @@
               </a:defRPr>
             </a:pPr>
             <a:r>
-              <a:rPr dirty="0"/>
-              <a:t>  -D</a:t>
-            </a:r>
-            <a:r>
               <a:rPr dirty="0">
                 <a:solidFill>
+                  <a:srgbClr val="29263B"/>
+                </a:solidFill>
+              </a:rPr>
+              <a:t>  </a:t>
+            </a:r>
+            <a:r>
+              <a:rPr dirty="0">
+                <a:solidFill>
                   <a:srgbClr val="B84E00"/>
                 </a:solidFill>
               </a:rPr>
+              <a:t>-D</a:t>
+            </a:r>
+            <a:r>
+              <a:rPr dirty="0">
+                <a:solidFill>
+                  <a:srgbClr val="B84E00"/>
+                </a:solidFill>
+              </a:rPr>
               <a:t>CROSS_COMPILE_TOOLCHAIN_PATH</a:t>
             </a:r>
             <a:r>
-              <a:rPr dirty="0"/>
+              <a:rPr dirty="0">
+                <a:solidFill>
+                  <a:srgbClr val="29263B"/>
+                </a:solidFill>
+              </a:rPr>
               <a:t>=</a:t>
             </a:r>
             <a:r>
@@ -36901,7 +38933,11 @@
               <a:t>G:/zephyr_practice/arm-zephyr-eabi</a:t>
             </a:r>
             <a:r>
-              <a:rPr dirty="0"/>
+              <a:rPr dirty="0">
+                <a:solidFill>
+                  <a:srgbClr val="29263B"/>
+                </a:solidFill>
+              </a:rPr>
               <a:t> \</a:t>
             </a:r>
           </a:p>
@@ -36923,19 +38959,35 @@
               </a:defRPr>
             </a:pPr>
             <a:r>
-              <a:rPr dirty="0"/>
-              <a:t>  -D</a:t>
-            </a:r>
-            <a:r>
               <a:rPr dirty="0">
                 <a:solidFill>
+                  <a:srgbClr val="29263B"/>
+                </a:solidFill>
+              </a:rPr>
+              <a:t>  </a:t>
+            </a:r>
+            <a:r>
+              <a:rPr dirty="0">
+                <a:solidFill>
                   <a:srgbClr val="B84E00"/>
                 </a:solidFill>
               </a:rPr>
+              <a:t>-D</a:t>
+            </a:r>
+            <a:r>
+              <a:rPr dirty="0">
+                <a:solidFill>
+                  <a:srgbClr val="B84E00"/>
+                </a:solidFill>
+              </a:rPr>
               <a:t>CMAKE_EXPORT_COMPILE_COMMANDS</a:t>
             </a:r>
             <a:r>
-              <a:rPr dirty="0"/>
+              <a:rPr dirty="0">
+                <a:solidFill>
+                  <a:srgbClr val="29263B"/>
+                </a:solidFill>
+              </a:rPr>
               <a:t>=ON</a:t>
             </a:r>
           </a:p>
@@ -37002,6 +39054,7 @@
               </a:defRPr>
             </a:pPr>
             <a:r>
+              <a:rPr/>
               <a:t>替代 SDK 路线；工具链由你选定。换架构时也要换工具链前缀。</a:t>
             </a:r>
           </a:p>
@@ -37524,6 +39577,11 @@
               </a:defRPr>
             </a:pPr>
             <a:r>
+              <a:rPr>
+                <a:solidFill>
+                  <a:srgbClr val="646173"/>
+                </a:solidFill>
+              </a:rPr>
               <a:t># Windows UCRT64；先完成第 19 页的 CMake 配置，才有这些产物。</a:t>
             </a:r>
           </a:p>
@@ -37553,6 +39611,11 @@
               <a:t>cd</a:t>
             </a:r>
             <a:r>
+              <a:rPr>
+                <a:solidFill>
+                  <a:srgbClr val="29263B"/>
+                </a:solidFill>
+              </a:rPr>
               <a:t> </a:t>
             </a:r>
             <a:r>
@@ -37590,18 +39653,60 @@
               <a:t>grep</a:t>
             </a:r>
             <a:r>
-              <a:t> -E '</a:t>
-            </a:r>
-            <a:r>
               <a:rPr>
                 <a:solidFill>
+                  <a:srgbClr val="29263B"/>
+                </a:solidFill>
+              </a:rPr>
+              <a:t> </a:t>
+            </a:r>
+            <a:r>
+              <a:rPr>
+                <a:solidFill>
                   <a:srgbClr val="B84E00"/>
                 </a:solidFill>
               </a:rPr>
+              <a:t>-E</a:t>
+            </a:r>
+            <a:r>
+              <a:rPr>
+                <a:solidFill>
+                  <a:srgbClr val="29263B"/>
+                </a:solidFill>
+              </a:rPr>
+              <a:t> '</a:t>
+            </a:r>
+            <a:r>
+              <a:rPr>
+                <a:solidFill>
+                  <a:srgbClr val="B84E00"/>
+                </a:solidFill>
+              </a:rPr>
               <a:t>ZEPHYR_SDK_INSTALL_DIR</a:t>
             </a:r>
             <a:r>
-              <a:t>|CMAKE_C_COMPILER' </a:t>
+              <a:rPr>
+                <a:solidFill>
+                  <a:srgbClr val="29263B"/>
+                </a:solidFill>
+              </a:rPr>
+              <a:t>|</a:t>
+            </a:r>
+            <a:r>
+              <a:rPr>
+                <a:solidFill>
+                  <a:srgbClr val="B84E00"/>
+                </a:solidFill>
+              </a:rPr>
+              <a:t>CMAKE_C_COMPILER</a:t>
+            </a:r>
+            <a:r>
+              <a:rPr>
+                <a:solidFill>
+                  <a:srgbClr val="29263B"/>
+                </a:solidFill>
+              </a:rPr>
+              <a:t>' </a:t>
             </a:r>
             <a:r>
               <a:rPr>
@@ -37638,7 +39743,36 @@
               <a:t>grep</a:t>
             </a:r>
             <a:r>
-              <a:t> -m1 'arm-zephyr-eabi-gcc' compile_commands.json</a:t>
+              <a:rPr>
+                <a:solidFill>
+                  <a:srgbClr val="29263B"/>
+                </a:solidFill>
+              </a:rPr>
+              <a:t> </a:t>
+            </a:r>
+            <a:r>
+              <a:rPr>
+                <a:solidFill>
+                  <a:srgbClr val="B84E00"/>
+                </a:solidFill>
+              </a:rPr>
+              <a:t>-m1</a:t>
+            </a:r>
+            <a:r>
+              <a:rPr>
+                <a:solidFill>
+                  <a:srgbClr val="29263B"/>
+                </a:solidFill>
+              </a:rPr>
+              <a:t> 'arm-zephyr-eabi-gcc' </a:t>
+            </a:r>
+            <a:r>
+              <a:rPr>
+                <a:solidFill>
+                  <a:srgbClr val="0070C0"/>
+                </a:solidFill>
+              </a:rPr>
+              <a:t>compile_commands.json</a:t>
             </a:r>
           </a:p>
           <a:p>
@@ -37667,17 +39801,43 @@
               <a:t>grep</a:t>
             </a:r>
             <a:r>
-              <a:t> -E '^CONFIG_(</a:t>
-            </a:r>
-            <a:r>
               <a:rPr>
                 <a:solidFill>
+                  <a:srgbClr val="29263B"/>
+                </a:solidFill>
+              </a:rPr>
+              <a:t> </a:t>
+            </a:r>
+            <a:r>
+              <a:rPr>
+                <a:solidFill>
                   <a:srgbClr val="B84E00"/>
                 </a:solidFill>
               </a:rPr>
+              <a:t>-E</a:t>
+            </a:r>
+            <a:r>
+              <a:rPr>
+                <a:solidFill>
+                  <a:srgbClr val="29263B"/>
+                </a:solidFill>
+              </a:rPr>
+              <a:t> '^CONFIG_(</a:t>
+            </a:r>
+            <a:r>
+              <a:rPr>
+                <a:solidFill>
+                  <a:srgbClr val="B84E00"/>
+                </a:solidFill>
+              </a:rPr>
               <a:t>ARCH</a:t>
             </a:r>
             <a:r>
+              <a:rPr>
+                <a:solidFill>
+                  <a:srgbClr val="29263B"/>
+                </a:solidFill>
+              </a:rPr>
               <a:t>|CPU_CORTEX_M4|FPU|ARM)' </a:t>
             </a:r>
             <a:r>
@@ -37752,6 +39912,7 @@
               </a:defRPr>
             </a:pPr>
             <a:r>
+              <a:rPr/>
               <a:t>缓存：选中的 SDK / GCC。compile_commands：计划使用的编译命令与 CPU 参数。</a:t>
             </a:r>
           </a:p>
@@ -37773,6 +39934,7 @@
               </a:defRPr>
             </a:pPr>
             <a:r>
+              <a:rPr/>
               <a:t>.config：板与 SoC 的配置。生成这些文件不等于固件已编译或在板上运行。</a:t>
             </a:r>
           </a:p>
@@ -37842,7 +40004,22 @@
               <a:rPr u="sng">
                 <a:hlinkClick r:id="rId3"/>
               </a:rPr>
-              <a:t>依据：配置输出与 -B 目录产物；编译日志和产物在 P007 继续核验</a:t>
+              <a:t>依据：配置输出与 </a:t>
+            </a:r>
+            <a:r>
+              <a:rPr u="sng">
+                <a:solidFill>
+                  <a:srgbClr val="B84E00"/>
+                </a:solidFill>
+                <a:hlinkClick r:id="rId3"/>
+              </a:rPr>
+              <a:t>-B</a:t>
+            </a:r>
+            <a:r>
+              <a:rPr u="sng">
+                <a:hlinkClick r:id="rId3"/>
+              </a:rPr>
+              <a:t> 目录产物；编译日志和产物在 P007 继续核验</a:t>
             </a:r>
           </a:p>
         </p:txBody>
@@ -38395,7 +40572,29 @@
                           <a:ea typeface="Microsoft YaHei"/>
                           <a:cs typeface="Microsoft YaHei"/>
                         </a:rPr>
-                        <a:t>找不到 7z / setup 执行不了</a:t>
+                        <a:t>找不到 </a:t>
+                      </a:r>
+                      <a:r>
+                        <a:rPr sz="1875" b="0">
+                          <a:solidFill>
+                            <a:srgbClr val="A02B93"/>
+                          </a:solidFill>
+                          <a:latin typeface="Microsoft YaHei"/>
+                          <a:ea typeface="Microsoft YaHei"/>
+                          <a:cs typeface="Microsoft YaHei"/>
+                        </a:rPr>
+                        <a:t>7z</a:t>
+                      </a:r>
+                      <a:r>
+                        <a:rPr sz="1875" b="0">
+                          <a:solidFill>
+                            <a:srgbClr val="29263B"/>
+                          </a:solidFill>
+                          <a:latin typeface="Microsoft YaHei"/>
+                          <a:ea typeface="Microsoft YaHei"/>
+                          <a:cs typeface="Microsoft YaHei"/>
+                        </a:rPr>
+                        <a:t> / setup 执行不了</a:t>
                       </a:r>
                     </a:p>
                   </a:txBody>
@@ -38425,7 +40624,62 @@
                           <a:ea typeface="Microsoft YaHei"/>
                           <a:cs typeface="Microsoft YaHei"/>
                         </a:rPr>
-                        <a:t>重开 PowerShell；确认 cmake / 7z；不要在 Bash 写 .\setup.cmd</a:t>
+                        <a:t>重开 PowerShell；确认 </a:t>
+                      </a:r>
+                      <a:r>
+                        <a:rPr sz="1875" b="0">
+                          <a:solidFill>
+                            <a:srgbClr val="0070C0"/>
+                          </a:solidFill>
+                          <a:latin typeface="Microsoft YaHei"/>
+                          <a:ea typeface="Microsoft YaHei"/>
+                          <a:cs typeface="Microsoft YaHei"/>
+                        </a:rPr>
+                        <a:t>cmake</a:t>
+                      </a:r>
+                      <a:r>
+                        <a:rPr sz="1875" b="0">
+                          <a:solidFill>
+                            <a:srgbClr val="29263B"/>
+                          </a:solidFill>
+                          <a:latin typeface="Microsoft YaHei"/>
+                          <a:ea typeface="Microsoft YaHei"/>
+                          <a:cs typeface="Microsoft YaHei"/>
+                        </a:rPr>
+                        <a:t> / </a:t>
+                      </a:r>
+                      <a:r>
+                        <a:rPr sz="1875" b="0">
+                          <a:solidFill>
+                            <a:srgbClr val="A02B93"/>
+                          </a:solidFill>
+                          <a:latin typeface="Microsoft YaHei"/>
+                          <a:ea typeface="Microsoft YaHei"/>
+                          <a:cs typeface="Microsoft YaHei"/>
+                        </a:rPr>
+                        <a:t>7z</a:t>
+                      </a:r>
+                      <a:r>
+                        <a:rPr sz="1875" b="0">
+                          <a:solidFill>
+                            <a:srgbClr val="29263B"/>
+                          </a:solidFill>
+                          <a:latin typeface="Microsoft YaHei"/>
+                          <a:ea typeface="Microsoft YaHei"/>
+                          <a:cs typeface="Microsoft YaHei"/>
+                        </a:rPr>
+                        <a:t>；不要在 Bash 写 .\</a:t>
+                      </a:r>
+                      <a:r>
+                        <a:rPr sz="1875" b="0">
+                          <a:solidFill>
+                            <a:srgbClr val="0070C0"/>
+                          </a:solidFill>
+                          <a:latin typeface="Microsoft YaHei"/>
+                          <a:ea typeface="Microsoft YaHei"/>
+                          <a:cs typeface="Microsoft YaHei"/>
+                        </a:rPr>
+                        <a:t>setup.cmd</a:t>
                       </a:r>
                     </a:p>
                   </a:txBody>
@@ -38538,7 +40792,7 @@
                       <a:r>
                         <a:rPr sz="1875" b="0">
                           <a:solidFill>
-                            <a:srgbClr val="29263B"/>
+                            <a:srgbClr val="0070C0"/>
                           </a:solidFill>
                           <a:latin typeface="Microsoft YaHei"/>
                           <a:ea typeface="Microsoft YaHei"/>
@@ -38768,7 +41022,29 @@
                           <a:ea typeface="Microsoft YaHei"/>
                           <a:cs typeface="Microsoft YaHei"/>
                         </a:rPr>
-                        <a:t>当前环境与 CMakeCache；切换路线用新 -B 目录</a:t>
+                        <a:t>当前环境与 CMakeCache；切换路线用新 </a:t>
+                      </a:r>
+                      <a:r>
+                        <a:rPr sz="1875" b="0">
+                          <a:solidFill>
+                            <a:srgbClr val="B84E00"/>
+                          </a:solidFill>
+                          <a:latin typeface="Microsoft YaHei"/>
+                          <a:ea typeface="Microsoft YaHei"/>
+                          <a:cs typeface="Microsoft YaHei"/>
+                        </a:rPr>
+                        <a:t>-B</a:t>
+                      </a:r>
+                      <a:r>
+                        <a:rPr sz="1875" b="0">
+                          <a:solidFill>
+                            <a:srgbClr val="29263B"/>
+                          </a:solidFill>
+                          <a:latin typeface="Microsoft YaHei"/>
+                          <a:ea typeface="Microsoft YaHei"/>
+                          <a:cs typeface="Microsoft YaHei"/>
+                        </a:rPr>
+                        <a:t> 目录</a:t>
                       </a:r>
                     </a:p>
                   </a:txBody>
@@ -38879,7 +41155,32 @@
               </a:defRPr>
             </a:pPr>
             <a:r>
-              <a:t>不为排错删除 .west、替换 west.yml，或把独立 ARM 目录冒充 SDK 根。</a:t>
+              <a:rPr/>
+              <a:t>不为排错删除 </a:t>
+            </a:r>
+            <a:r>
+              <a:rPr>
+                <a:solidFill>
+                  <a:srgbClr val="0070C0"/>
+                </a:solidFill>
+              </a:rPr>
+              <a:t>.west</a:t>
+            </a:r>
+            <a:r>
+              <a:rPr/>
+              <a:t>、替换 </a:t>
+            </a:r>
+            <a:r>
+              <a:rPr>
+                <a:solidFill>
+                  <a:srgbClr val="0070C0"/>
+                </a:solidFill>
+              </a:rPr>
+              <a:t>west.yml</a:t>
+            </a:r>
+            <a:r>
+              <a:rPr/>
+              <a:t>，或把独立 ARM 目录冒充 SDK 根。</a:t>
             </a:r>
           </a:p>
         </p:txBody>
@@ -39356,7 +41657,20 @@
               </a:defRPr>
             </a:pPr>
             <a:r>
-              <a:t>GNU SDK 或 Minimal + ARM：交付含 cmake 与 gnu 的 SDK 根。</a:t>
+              <a:rPr/>
+              <a:t>GNU SDK 或 Minimal + ARM：交付含 </a:t>
+            </a:r>
+            <a:r>
+              <a:rPr>
+                <a:solidFill>
+                  <a:srgbClr val="0070C0"/>
+                </a:solidFill>
+              </a:rPr>
+              <a:t>cmake</a:t>
+            </a:r>
+            <a:r>
+              <a:rPr/>
+              <a:t> 与 gnu 的 SDK 根。</a:t>
             </a:r>
           </a:p>
           <a:p>
@@ -39377,7 +41691,20 @@
               </a:defRPr>
             </a:pPr>
             <a:r>
-              <a:t>可自动发现，也可通过环境变量 / -D 指定；注册并非必需。</a:t>
+              <a:rPr/>
+              <a:t>可自动发现，也可通过环境变量 / </a:t>
+            </a:r>
+            <a:r>
+              <a:rPr>
+                <a:solidFill>
+                  <a:srgbClr val="B84E00"/>
+                </a:solidFill>
+              </a:rPr>
+              <a:t>-D</a:t>
+            </a:r>
+            <a:r>
+              <a:rPr/>
+              <a:t> 指定；注册并非必需。</a:t>
             </a:r>
           </a:p>
           <a:p>
@@ -39398,6 +41725,7 @@
               </a:defRPr>
             </a:pPr>
             <a:r>
+              <a:rPr/>
               <a:t>独立 ARM：交付程序前缀，由 cross-compile 规则接入。</a:t>
             </a:r>
           </a:p>
@@ -39468,6 +41796,7 @@
               </a:defRPr>
             </a:pPr>
             <a:r>
+              <a:rPr/>
               <a:t>SDK / ARM 已安装</a:t>
             </a:r>
           </a:p>
@@ -39538,6 +41867,7 @@
               </a:defRPr>
             </a:pPr>
             <a:r>
+              <a:rPr/>
               <a:t>P004 下载 CMSIS / HAL</a:t>
             </a:r>
           </a:p>
@@ -39608,6 +41938,7 @@
               </a:defRPr>
             </a:pPr>
             <a:r>
+              <a:rPr/>
               <a:t>P005 源码模块接入</a:t>
             </a:r>
           </a:p>
@@ -39678,6 +42009,7 @@
               </a:defRPr>
             </a:pPr>
             <a:r>
+              <a:rPr/>
               <a:t>P007 配置与编译</a:t>
             </a:r>
           </a:p>
@@ -39744,6 +42076,7 @@
               </a:defRPr>
             </a:pPr>
             <a:r>
+              <a:rPr/>
               <a:t>P006 讲 CMake 基础；P009 / P010 展开接口与缓存。</a:t>
             </a:r>
           </a:p>
@@ -39765,7 +42098,20 @@
               </a:defRPr>
             </a:pPr>
             <a:r>
-              <a:t>本期不用学习 SDK 自行发行、west 清单编写或新增芯片适配。</a:t>
+              <a:rPr/>
+              <a:t>本期不用学习 SDK 自行发行、</a:t>
+            </a:r>
+            <a:r>
+              <a:rPr>
+                <a:solidFill>
+                  <a:srgbClr val="A02B93"/>
+                </a:solidFill>
+              </a:rPr>
+              <a:t>west</a:t>
+            </a:r>
+            <a:r>
+              <a:rPr/>
+              <a:t> 清单编写或新增芯片适配。</a:t>
             </a:r>
           </a:p>
         </p:txBody>
@@ -40149,6 +42495,7 @@
               </a:defRPr>
             </a:pPr>
             <a:r>
+              <a:rPr/>
               <a:t>Minimal 是 SDK 的精简打包方式，仍带工程接入文件；单独的 ARM 包才是组件。</a:t>
             </a:r>
           </a:p>
@@ -40650,6 +42997,7 @@
               </a:defRPr>
             </a:pPr>
             <a:r>
+              <a:rPr/>
               <a:t>多种目标 ≠ 同一 GCC 的多个版本。GNU / Minimal 补齐后使用同一 SDK 入口。</a:t>
             </a:r>
           </a:p>
@@ -41129,7 +43477,20 @@
               </a:defRPr>
             </a:pPr>
             <a:r>
-              <a:t>├─ sdk_version                     SDK 发行版本</a:t>
+              <a:rPr/>
+              <a:t>├─ </a:t>
+            </a:r>
+            <a:r>
+              <a:rPr>
+                <a:solidFill>
+                  <a:srgbClr val="0070C0"/>
+                </a:solidFill>
+              </a:rPr>
+              <a:t>sdk_version</a:t>
+            </a:r>
+            <a:r>
+              <a:rPr/>
+              <a:t>                     SDK 发行版本</a:t>
             </a:r>
           </a:p>
           <a:p>
@@ -41150,7 +43511,20 @@
               </a:defRPr>
             </a:pPr>
             <a:r>
-              <a:t>├─ setup.cmd                       安装 / 可选注册</a:t>
+              <a:rPr/>
+              <a:t>├─ </a:t>
+            </a:r>
+            <a:r>
+              <a:rPr>
+                <a:solidFill>
+                  <a:srgbClr val="0070C0"/>
+                </a:solidFill>
+              </a:rPr>
+              <a:t>setup.cmd</a:t>
+            </a:r>
+            <a:r>
+              <a:rPr/>
+              <a:t>                       安装 / 可选注册</a:t>
             </a:r>
           </a:p>
           <a:p>
@@ -41171,6 +43545,7 @@
               </a:defRPr>
             </a:pPr>
             <a:r>
+              <a:rPr/>
               <a:t>├─ </a:t>
             </a:r>
             <a:r>
@@ -41182,6 +43557,7 @@
               <a:t>cmake/Zephyr-sdkConfig.cmake</a:t>
             </a:r>
             <a:r>
+              <a:rPr/>
               <a:t>     工程查找入口</a:t>
             </a:r>
           </a:p>
@@ -41203,6 +43579,7 @@
               </a:defRPr>
             </a:pPr>
             <a:r>
+              <a:rPr/>
               <a:t>├─ </a:t>
             </a:r>
             <a:r>
@@ -41214,6 +43591,7 @@
               <a:t>cmake/zephyr/gnu/target.cmake</a:t>
             </a:r>
             <a:r>
+              <a:rPr/>
               <a:t>    架构 → 工具链规则</a:t>
             </a:r>
           </a:p>
@@ -41235,6 +43613,7 @@
               </a:defRPr>
             </a:pPr>
             <a:r>
+              <a:rPr/>
               <a:t>├─ </a:t>
             </a:r>
             <a:r>
@@ -41246,6 +43625,7 @@
               <a:t>hosttools/</a:t>
             </a:r>
             <a:r>
+              <a:rPr/>
               <a:t>                      平台配套工具</a:t>
             </a:r>
           </a:p>
@@ -41267,6 +43647,7 @@
               </a:defRPr>
             </a:pPr>
             <a:r>
+              <a:rPr/>
               <a:t>└─ </a:t>
             </a:r>
             <a:r>
@@ -41278,6 +43659,7 @@
               <a:t>gnu/arm-zephyr-eabi/</a:t>
             </a:r>
             <a:r>
+              <a:rPr/>
               <a:t>             GNU 已带；Minimal 补入</a:t>
             </a:r>
           </a:p>
@@ -41299,6 +43681,7 @@
               </a:defRPr>
             </a:pPr>
             <a:r>
+              <a:rPr/>
               <a:t>   ├─ </a:t>
             </a:r>
             <a:r>
@@ -41310,6 +43693,7 @@
               <a:t>bin/arm-zephyr-eabi-gcc.exe</a:t>
             </a:r>
             <a:r>
+              <a:rPr/>
               <a:t>   目标编译器</a:t>
             </a:r>
           </a:p>
@@ -41331,6 +43715,7 @@
               </a:defRPr>
             </a:pPr>
             <a:r>
+              <a:rPr/>
               <a:t>   └─ </a:t>
             </a:r>
             <a:r>
@@ -41342,6 +43727,7 @@
               <a:t>arm-zephyr-eabi/</a:t>
             </a:r>
             <a:r>
+              <a:rPr/>
               <a:t>             目标头文件与库</a:t>
             </a:r>
           </a:p>
@@ -41408,6 +43794,7 @@
               </a:defRPr>
             </a:pPr>
             <a:r>
+              <a:rPr/>
               <a:t>这些 CMake 文件不需要自己创建。</a:t>
             </a:r>
           </a:p>
@@ -41429,6 +43816,7 @@
               </a:defRPr>
             </a:pPr>
             <a:r>
+              <a:rPr/>
               <a:t>找到 SDK 包 ≠ ARM 编译器已安装；Minimal 必须补齐目标工具链。</a:t>
             </a:r>
           </a:p>
@@ -41498,7 +43886,31 @@
               <a:rPr u="sng">
                 <a:hlinkClick r:id="rId3"/>
               </a:rPr>
-              <a:t>依据：SDK 根：cmake/Zephyr-sdkConfig.cmake；gnu/arm-zephyr-eabi</a:t>
+              <a:t>依据：SDK 根：</a:t>
+            </a:r>
+            <a:r>
+              <a:rPr u="sng">
+                <a:solidFill>
+                  <a:srgbClr val="0070C0"/>
+                </a:solidFill>
+                <a:hlinkClick r:id="rId3"/>
+              </a:rPr>
+              <a:t>cmake/Zephyr-sdkConfig.cmake</a:t>
+            </a:r>
+            <a:r>
+              <a:rPr u="sng">
+                <a:hlinkClick r:id="rId3"/>
+              </a:rPr>
+              <a:t>；</a:t>
+            </a:r>
+            <a:r>
+              <a:rPr u="sng">
+                <a:solidFill>
+                  <a:srgbClr val="0070C0"/>
+                </a:solidFill>
+                <a:hlinkClick r:id="rId3"/>
+              </a:rPr>
+              <a:t>gnu/arm-zephyr-eabi</a:t>
             </a:r>
           </a:p>
         </p:txBody>
@@ -41978,7 +44390,7 @@
                       <a:r>
                         <a:rPr sz="1200" b="0" dirty="0">
                           <a:solidFill>
-                            <a:srgbClr val="262236"/>
+                            <a:srgbClr val="0070C0"/>
                           </a:solidFill>
                           <a:latin typeface="Noto Sans SC"/>
                           <a:ea typeface="Noto Sans SC"/>
@@ -42043,7 +44455,7 @@
                       <a:r>
                         <a:rPr sz="1200" b="0" dirty="0">
                           <a:solidFill>
-                            <a:srgbClr val="262236"/>
+                            <a:srgbClr val="0070C0"/>
                           </a:solidFill>
                           <a:latin typeface="Noto Sans SC"/>
                           <a:ea typeface="Noto Sans SC"/>
@@ -42108,7 +44520,7 @@
                       <a:r>
                         <a:rPr sz="1200" b="0" dirty="0">
                           <a:solidFill>
-                            <a:srgbClr val="262236"/>
+                            <a:srgbClr val="0070C0"/>
                           </a:solidFill>
                           <a:latin typeface="Noto Sans SC"/>
                           <a:ea typeface="Noto Sans SC"/>
@@ -42206,7 +44618,7 @@
                       <a:r>
                         <a:rPr sz="1200" b="0">
                           <a:solidFill>
-                            <a:srgbClr val="262236"/>
+                            <a:srgbClr val="0070C0"/>
                           </a:solidFill>
                           <a:latin typeface="Noto Sans SC"/>
                           <a:ea typeface="Noto Sans SC"/>
@@ -42235,13 +44647,24 @@
                       <a:r>
                         <a:rPr sz="1200" b="0" dirty="0">
                           <a:solidFill>
+                            <a:srgbClr val="A02B93"/>
+                          </a:solidFill>
+                          <a:latin typeface="Noto Sans SC"/>
+                          <a:ea typeface="Noto Sans SC"/>
+                          <a:cs typeface="Noto Sans SC"/>
+                        </a:rPr>
+                        <a:t>west</a:t>
+                      </a:r>
+                      <a:r>
+                        <a:rPr sz="1200" b="0" dirty="0">
+                          <a:solidFill>
                             <a:srgbClr val="262236"/>
                           </a:solidFill>
                           <a:latin typeface="Noto Sans SC"/>
                           <a:ea typeface="Noto Sans SC"/>
                           <a:cs typeface="Noto Sans SC"/>
                         </a:rPr>
-                        <a:t>west </a:t>
+                        <a:t> </a:t>
                       </a:r>
                       <a:r>
                         <a:rPr sz="1200" b="0" dirty="0" err="1">
@@ -42418,13 +44841,24 @@
             <a:r>
               <a:rPr sz="1950" b="0" dirty="0">
                 <a:solidFill>
-                  <a:srgbClr val="6544B0"/>
+                  <a:srgbClr val="0070C0"/>
                 </a:solidFill>
                 <a:latin typeface="Noto Sans SC"/>
                 <a:ea typeface="Noto Sans SC"/>
                 <a:cs typeface="Noto Sans SC"/>
               </a:rPr>
-              <a:t>SDK_VERSION → </a:t>
+              <a:t>SDK_VERSION</a:t>
+            </a:r>
+            <a:r>
+              <a:rPr sz="1950" b="0" dirty="0">
+                <a:solidFill>
+                  <a:srgbClr val="6544B0"/>
+                </a:solidFill>
+                <a:latin typeface="Noto Sans SC"/>
+                <a:ea typeface="Noto Sans SC"/>
+                <a:cs typeface="Noto Sans SC"/>
+              </a:rPr>
+              <a:t> → </a:t>
             </a:r>
             <a:r>
               <a:rPr sz="1950" b="0" dirty="0" err="1">
@@ -42579,7 +45013,7 @@
             <a:r>
               <a:rPr sz="1725">
                 <a:solidFill>
-                  <a:srgbClr val="29263B"/>
+                  <a:srgbClr val="646173"/>
                 </a:solidFill>
                 <a:latin typeface="Consolas"/>
                 <a:ea typeface="Microsoft YaHei"/>
@@ -42601,61 +45035,91 @@
                 <a:latin typeface="Consolas"/>
                 <a:ea typeface="Microsoft YaHei"/>
               </a:rPr>
-              <a:t>cd </a:t>
+              <a:t>cd</a:t>
             </a:r>
             <a:r>
               <a:rPr sz="1725">
                 <a:solidFill>
-                  <a:srgbClr val="0070C0"/>
+                  <a:srgbClr val="29263B"/>
                 </a:solidFill>
                 <a:latin typeface="Consolas"/>
                 <a:ea typeface="Microsoft YaHei"/>
               </a:rPr>
-              <a:t>/g/zephyr_practice/zephyr-main</a:t>
-            </a:r>
-          </a:p>
-          <a:p>
-            <a:pPr>
-              <a:lnSpc>
-                <a:spcPct val="120000"/>
-              </a:lnSpc>
-            </a:pPr>
+              <a:t> </a:t>
+            </a:r>
             <a:r>
               <a:rPr sz="1725">
                 <a:solidFill>
-                  <a:srgbClr val="A02B93"/>
+                  <a:srgbClr val="0070C0"/>
                 </a:solidFill>
                 <a:latin typeface="Consolas"/>
                 <a:ea typeface="Microsoft YaHei"/>
               </a:rPr>
-              <a:t>cat </a:t>
-            </a:r>
+              <a:t>/g/zephyr_practice/zephyr-main</a:t>
+            </a:r>
+          </a:p>
+          <a:p>
+            <a:pPr>
+              <a:lnSpc>
+                <a:spcPct val="120000"/>
+              </a:lnSpc>
+            </a:pPr>
             <a:r>
               <a:rPr sz="1725">
                 <a:solidFill>
-                  <a:srgbClr val="0070C0"/>
+                  <a:srgbClr val="A02B93"/>
                 </a:solidFill>
                 <a:latin typeface="Consolas"/>
                 <a:ea typeface="Microsoft YaHei"/>
               </a:rPr>
-              <a:t>VERSION</a:t>
-            </a:r>
-          </a:p>
-          <a:p>
-            <a:pPr>
-              <a:lnSpc>
-                <a:spcPct val="120000"/>
-              </a:lnSpc>
-            </a:pPr>
+              <a:t>cat</a:t>
+            </a:r>
             <a:r>
               <a:rPr sz="1725">
                 <a:solidFill>
-                  <a:srgbClr val="A02B93"/>
+                  <a:srgbClr val="29263B"/>
                 </a:solidFill>
                 <a:latin typeface="Consolas"/>
                 <a:ea typeface="Microsoft YaHei"/>
               </a:rPr>
-              <a:t>cat </a:t>
+              <a:t> </a:t>
+            </a:r>
+            <a:r>
+              <a:rPr sz="1725">
+                <a:solidFill>
+                  <a:srgbClr val="0070C0"/>
+                </a:solidFill>
+                <a:latin typeface="Consolas"/>
+                <a:ea typeface="Microsoft YaHei"/>
+              </a:rPr>
+              <a:t>VERSION</a:t>
+            </a:r>
+          </a:p>
+          <a:p>
+            <a:pPr>
+              <a:lnSpc>
+                <a:spcPct val="120000"/>
+              </a:lnSpc>
+            </a:pPr>
+            <a:r>
+              <a:rPr sz="1725">
+                <a:solidFill>
+                  <a:srgbClr val="A02B93"/>
+                </a:solidFill>
+                <a:latin typeface="Consolas"/>
+                <a:ea typeface="Microsoft YaHei"/>
+              </a:rPr>
+              <a:t>cat</a:t>
+            </a:r>
+            <a:r>
+              <a:rPr sz="1725">
+                <a:solidFill>
+                  <a:srgbClr val="29263B"/>
+                </a:solidFill>
+                <a:latin typeface="Consolas"/>
+                <a:ea typeface="Microsoft YaHei"/>
+              </a:rPr>
+              <a:t> </a:t>
             </a:r>
             <a:r>
               <a:rPr sz="1725">
@@ -44583,7 +47047,19 @@
             </a:r>
             <a:r>
               <a:rPr dirty="0"/>
-              <a:t> sha256.sum；Source code </a:t>
+              <a:t> </a:t>
+            </a:r>
+            <a:r>
+              <a:rPr dirty="0">
+                <a:solidFill>
+                  <a:srgbClr val="0070C0"/>
+                </a:solidFill>
+              </a:rPr>
+              <a:t>sha256.sum</a:t>
+            </a:r>
+            <a:r>
+              <a:rPr dirty="0"/>
+              <a:t>；Source code </a:t>
             </a:r>
             <a:r>
               <a:rPr dirty="0" err="1"/>
@@ -44660,7 +47136,16 @@
               <a:rPr u="sng">
                 <a:hlinkClick r:id="rId3"/>
               </a:rPr>
-              <a:t>依据：Release 下载表与 Assets → sha256.sum</a:t>
+              <a:t>依据：Release 下载表与 Assets → </a:t>
+            </a:r>
+            <a:r>
+              <a:rPr u="sng">
+                <a:solidFill>
+                  <a:srgbClr val="0070C0"/>
+                </a:solidFill>
+                <a:hlinkClick r:id="rId3"/>
+              </a:rPr>
+              <a:t>sha256.sum</a:t>
             </a:r>
           </a:p>
         </p:txBody>
@@ -45070,6 +47555,7 @@
               </a:defRPr>
             </a:pPr>
             <a:r>
+              <a:rPr/>
               <a:t>├─ </a:t>
             </a:r>
             <a:r>
@@ -45081,6 +47567,7 @@
               <a:t>zephyr-main/</a:t>
             </a:r>
             <a:r>
+              <a:rPr/>
               <a:t>                     P001 下载的 Zephyr 源码</a:t>
             </a:r>
           </a:p>
@@ -45102,6 +47589,7 @@
               </a:defRPr>
             </a:pPr>
             <a:r>
+              <a:rPr/>
               <a:t>├─ </a:t>
             </a:r>
             <a:r>
@@ -45113,6 +47601,7 @@
               <a:t>zephyr-sdk-1.0.1/</a:t>
             </a:r>
             <a:r>
+              <a:rPr/>
               <a:t>                SDK 归档解压后产生</a:t>
             </a:r>
           </a:p>
@@ -45134,7 +47623,16 @@
               </a:defRPr>
             </a:pPr>
             <a:r>
-              <a:t>│  ├─ sdk_version</a:t>
+              <a:rPr/>
+              <a:t>│  ├─ </a:t>
+            </a:r>
+            <a:r>
+              <a:rPr>
+                <a:solidFill>
+                  <a:srgbClr val="0070C0"/>
+                </a:solidFill>
+              </a:rPr>
+              <a:t>sdk_version</a:t>
             </a:r>
           </a:p>
           <a:p>
@@ -45155,6 +47653,7 @@
               </a:defRPr>
             </a:pPr>
             <a:r>
+              <a:rPr/>
               <a:t>│  ├─ </a:t>
             </a:r>
             <a:r>
@@ -45184,6 +47683,7 @@
               </a:defRPr>
             </a:pPr>
             <a:r>
+              <a:rPr/>
               <a:t>│  └─ </a:t>
             </a:r>
             <a:r>
@@ -45195,6 +47695,7 @@
               <a:t>gnu/arm-zephyr-eabi/</a:t>
             </a:r>
             <a:r>
+              <a:rPr/>
               <a:t>          ARM 工具链</a:t>
             </a:r>
           </a:p>
@@ -45216,6 +47717,7 @@
               </a:defRPr>
             </a:pPr>
             <a:r>
+              <a:rPr/>
               <a:t>├─ </a:t>
             </a:r>
             <a:r>
@@ -45227,6 +47729,7 @@
               <a:t>arm-zephyr-eabi/</a:t>
             </a:r>
             <a:r>
+              <a:rPr/>
               <a:t>                 仅独立工具链路线需要</a:t>
             </a:r>
           </a:p>
@@ -45248,6 +47751,7 @@
               </a:defRPr>
             </a:pPr>
             <a:r>
+              <a:rPr/>
               <a:t>├─ </a:t>
             </a:r>
             <a:r>
@@ -45277,6 +47781,7 @@
               </a:defRPr>
             </a:pPr>
             <a:r>
+              <a:rPr/>
               <a:t>└─ </a:t>
             </a:r>
             <a:r>
@@ -45288,6 +47793,7 @@
               <a:t>sha256.sum</a:t>
             </a:r>
             <a:r>
+              <a:rPr/>
               <a:t>                      同版官方摘要清单</a:t>
             </a:r>
           </a:p>
@@ -45354,7 +47860,32 @@
               </a:defRPr>
             </a:pPr>
             <a:r>
-              <a:t>UCRT64 用 /g/zephyr_practice；PowerShell / 资源管理器用 G:\zephyr_practice。</a:t>
+              <a:rPr/>
+              <a:t>UCRT64 用 </a:t>
+            </a:r>
+            <a:r>
+              <a:rPr>
+                <a:solidFill>
+                  <a:srgbClr val="0070C0"/>
+                </a:solidFill>
+              </a:rPr>
+              <a:t>/g/zephyr_practice</a:t>
+            </a:r>
+            <a:r>
+              <a:rPr/>
+              <a:t>；PowerShell / 资源管理器用 </a:t>
+            </a:r>
+            <a:r>
+              <a:rPr>
+                <a:solidFill>
+                  <a:srgbClr val="0070C0"/>
+                </a:solidFill>
+              </a:rPr>
+              <a:t>G:\zephyr_practice</a:t>
+            </a:r>
+            <a:r>
+              <a:rPr/>
+              <a:t>。</a:t>
             </a:r>
           </a:p>
           <a:p>
@@ -45375,7 +47906,32 @@
               </a:defRPr>
             </a:pPr>
             <a:r>
-              <a:t>传给 Windows CMake 的路径用 G:/…；SDK 根是直接含 sdk_version 的那层。</a:t>
+              <a:rPr/>
+              <a:t>传给 Windows CMake 的路径用 </a:t>
+            </a:r>
+            <a:r>
+              <a:rPr>
+                <a:solidFill>
+                  <a:srgbClr val="0070C0"/>
+                </a:solidFill>
+              </a:rPr>
+              <a:t>G:/…</a:t>
+            </a:r>
+            <a:r>
+              <a:rPr/>
+              <a:t>；SDK 根是直接含 </a:t>
+            </a:r>
+            <a:r>
+              <a:rPr>
+                <a:solidFill>
+                  <a:srgbClr val="0070C0"/>
+                </a:solidFill>
+              </a:rPr>
+              <a:t>sdk_version</a:t>
+            </a:r>
+            <a:r>
+              <a:rPr/>
+              <a:t> 的那层。</a:t>
             </a:r>
           </a:p>
         </p:txBody>
@@ -45759,17 +48315,27 @@
               </a:defRPr>
             </a:pPr>
             <a:r>
+              <a:rPr>
+                <a:solidFill>
+                  <a:srgbClr val="646173"/>
+                </a:solidFill>
+              </a:rPr>
               <a:t># Windows UCRT64；下载目录；已取得 GNU 包与同版 </a:t>
             </a:r>
             <a:r>
               <a:rPr>
                 <a:solidFill>
-                  <a:srgbClr val="0070C0"/>
+                  <a:srgbClr val="646173"/>
                 </a:solidFill>
               </a:rPr>
               <a:t>sha256.sum</a:t>
             </a:r>
             <a:r>
+              <a:rPr>
+                <a:solidFill>
+                  <a:srgbClr val="646173"/>
+                </a:solidFill>
+              </a:rPr>
               <a:t>。</a:t>
             </a:r>
           </a:p>
@@ -45799,6 +48365,11 @@
               <a:t>cd</a:t>
             </a:r>
             <a:r>
+              <a:rPr>
+                <a:solidFill>
+                  <a:srgbClr val="29263B"/>
+                </a:solidFill>
+              </a:rPr>
               <a:t> </a:t>
             </a:r>
             <a:r>
@@ -45828,6 +48399,11 @@
               </a:defRPr>
             </a:pPr>
             <a:r>
+              <a:rPr>
+                <a:solidFill>
+                  <a:srgbClr val="646173"/>
+                </a:solidFill>
+              </a:rPr>
               <a:t># 必须输出 OK；失败就停止，不解压。</a:t>
             </a:r>
           </a:p>
@@ -45857,17 +48433,43 @@
               <a:t>grep</a:t>
             </a:r>
             <a:r>
-              <a:t> -F ' </a:t>
-            </a:r>
-            <a:r>
               <a:rPr>
                 <a:solidFill>
+                  <a:srgbClr val="29263B"/>
+                </a:solidFill>
+              </a:rPr>
+              <a:t> </a:t>
+            </a:r>
+            <a:r>
+              <a:rPr>
+                <a:solidFill>
+                  <a:srgbClr val="B84E00"/>
+                </a:solidFill>
+              </a:rPr>
+              <a:t>-F</a:t>
+            </a:r>
+            <a:r>
+              <a:rPr>
+                <a:solidFill>
+                  <a:srgbClr val="29263B"/>
+                </a:solidFill>
+              </a:rPr>
+              <a:t> ' </a:t>
+            </a:r>
+            <a:r>
+              <a:rPr>
+                <a:solidFill>
                   <a:srgbClr val="0070C0"/>
                 </a:solidFill>
               </a:rPr>
               <a:t>zephyr-sdk-1.0.1_windows-x86_64_gnu.7z</a:t>
             </a:r>
             <a:r>
+              <a:rPr>
+                <a:solidFill>
+                  <a:srgbClr val="29263B"/>
+                </a:solidFill>
+              </a:rPr>
               <a:t>' </a:t>
             </a:r>
             <a:r>
@@ -45879,6 +48481,11 @@
               <a:t>sha256.sum</a:t>
             </a:r>
             <a:r>
+              <a:rPr>
+                <a:solidFill>
+                  <a:srgbClr val="29263B"/>
+                </a:solidFill>
+              </a:rPr>
               <a:t> |</a:t>
             </a:r>
           </a:p>
@@ -45900,6 +48507,11 @@
               </a:defRPr>
             </a:pPr>
             <a:r>
+              <a:rPr>
+                <a:solidFill>
+                  <a:srgbClr val="29263B"/>
+                </a:solidFill>
+              </a:rPr>
               <a:t>  </a:t>
             </a:r>
             <a:r>
@@ -45911,7 +48523,28 @@
               <a:t>sha256sum</a:t>
             </a:r>
             <a:r>
-              <a:t> --check &amp;&amp;</a:t>
+              <a:rPr>
+                <a:solidFill>
+                  <a:srgbClr val="29263B"/>
+                </a:solidFill>
+              </a:rPr>
+              <a:t> </a:t>
+            </a:r>
+            <a:r>
+              <a:rPr>
+                <a:solidFill>
+                  <a:srgbClr val="B84E00"/>
+                </a:solidFill>
+              </a:rPr>
+              <a:t>--check</a:t>
+            </a:r>
+            <a:r>
+              <a:rPr>
+                <a:solidFill>
+                  <a:srgbClr val="29263B"/>
+                </a:solidFill>
+              </a:rPr>
+              <a:t> &amp;&amp;</a:t>
             </a:r>
           </a:p>
           <a:p>
@@ -45932,6 +48565,11 @@
               </a:defRPr>
             </a:pPr>
             <a:r>
+              <a:rPr>
+                <a:solidFill>
+                  <a:srgbClr val="29263B"/>
+                </a:solidFill>
+              </a:rPr>
               <a:t>  </a:t>
             </a:r>
             <a:r>
@@ -45943,6 +48581,11 @@
               <a:t>7z</a:t>
             </a:r>
             <a:r>
+              <a:rPr>
+                <a:solidFill>
+                  <a:srgbClr val="29263B"/>
+                </a:solidFill>
+              </a:rPr>
               <a:t> x </a:t>
             </a:r>
             <a:r>
@@ -45954,7 +48597,76 @@
               <a:t>zephyr-sdk-1.0.1_windows-x86_64_gnu.7z</a:t>
             </a:r>
             <a:r>
-              <a:t> "-o$(cygpath -m "$PWD")"</a:t>
+              <a:rPr>
+                <a:solidFill>
+                  <a:srgbClr val="29263B"/>
+                </a:solidFill>
+              </a:rPr>
+              <a:t> "</a:t>
+            </a:r>
+            <a:r>
+              <a:rPr>
+                <a:solidFill>
+                  <a:srgbClr val="B84E00"/>
+                </a:solidFill>
+              </a:rPr>
+              <a:t>-o</a:t>
+            </a:r>
+            <a:r>
+              <a:rPr>
+                <a:solidFill>
+                  <a:srgbClr val="29263B"/>
+                </a:solidFill>
+              </a:rPr>
+              <a:t>$(</a:t>
+            </a:r>
+            <a:r>
+              <a:rPr>
+                <a:solidFill>
+                  <a:srgbClr val="A02B93"/>
+                </a:solidFill>
+              </a:rPr>
+              <a:t>cygpath</a:t>
+            </a:r>
+            <a:r>
+              <a:rPr>
+                <a:solidFill>
+                  <a:srgbClr val="29263B"/>
+                </a:solidFill>
+              </a:rPr>
+              <a:t> </a:t>
+            </a:r>
+            <a:r>
+              <a:rPr>
+                <a:solidFill>
+                  <a:srgbClr val="B84E00"/>
+                </a:solidFill>
+              </a:rPr>
+              <a:t>-m</a:t>
+            </a:r>
+            <a:r>
+              <a:rPr>
+                <a:solidFill>
+                  <a:srgbClr val="29263B"/>
+                </a:solidFill>
+              </a:rPr>
+              <a:t> "</a:t>
+            </a:r>
+            <a:r>
+              <a:rPr>
+                <a:solidFill>
+                  <a:srgbClr val="B84E00"/>
+                </a:solidFill>
+              </a:rPr>
+              <a:t>$PWD</a:t>
+            </a:r>
+            <a:r>
+              <a:rPr>
+                <a:solidFill>
+                  <a:srgbClr val="29263B"/>
+                </a:solidFill>
+              </a:rPr>
+              <a:t>")"</a:t>
             </a:r>
           </a:p>
         </p:txBody>
@@ -46020,6 +48732,7 @@
               </a:defRPr>
             </a:pPr>
             <a:r>
+              <a:rPr/>
               <a:t>目标目录已存在时先核对已有安装，不合并覆盖。输出摘要 OK 后才会解压。</a:t>
             </a:r>
           </a:p>
@@ -46041,6 +48754,7 @@
               </a:defRPr>
             </a:pPr>
             <a:r>
+              <a:rPr/>
               <a:t>GNU 包已带 ARM，解压后直接到第 13 页核验；无需再执行 /t。</a:t>
             </a:r>
           </a:p>
@@ -46110,7 +48824,22 @@
               <a:rPr u="sng">
                 <a:hlinkClick r:id="rId3"/>
               </a:rPr>
-              <a:t>依据：同版 sha256.sum 与 GNU SDK 归档</a:t>
+              <a:t>依据：同版 </a:t>
+            </a:r>
+            <a:r>
+              <a:rPr u="sng">
+                <a:solidFill>
+                  <a:srgbClr val="0070C0"/>
+                </a:solidFill>
+                <a:hlinkClick r:id="rId3"/>
+              </a:rPr>
+              <a:t>sha256.sum</a:t>
+            </a:r>
+            <a:r>
+              <a:rPr u="sng">
+                <a:hlinkClick r:id="rId3"/>
+              </a:rPr>
+              <a:t> 与 GNU SDK 归档</a:t>
             </a:r>
           </a:p>
         </p:txBody>

--- a/learning/P01_zephyr_make_project/slides/P003_SDK准备与编译器选型_Windows.pptx
+++ b/learning/P01_zephyr_make_project/slides/P003_SDK准备与编译器选型_Windows.pptx
@@ -17,32 +17,35 @@
     <p:notesMasterId r:id="rId37"/>
   </p:notesMasterIdLst>
   <p:sldIdLst>
-    <p:sldId id="256" r:id="rId11"/>
-    <p:sldId id="257" r:id="rId12"/>
-    <p:sldId id="258" r:id="rId13"/>
-    <p:sldId id="259" r:id="rId14"/>
-    <p:sldId id="260" r:id="rId15"/>
-    <p:sldId id="261" r:id="rId16"/>
-    <p:sldId id="262" r:id="rId17"/>
-    <p:sldId id="263" r:id="rId18"/>
-    <p:sldId id="264" r:id="rId19"/>
-    <p:sldId id="265" r:id="rId20"/>
-    <p:sldId id="266" r:id="rId21"/>
-    <p:sldId id="267" r:id="rId22"/>
-    <p:sldId id="268" r:id="rId23"/>
-    <p:sldId id="269" r:id="rId24"/>
-    <p:sldId id="270" r:id="rId25"/>
-    <p:sldId id="271" r:id="rId26"/>
-    <p:sldId id="272" r:id="rId27"/>
-    <p:sldId id="273" r:id="rId28"/>
-    <p:sldId id="274" r:id="rId29"/>
-    <p:sldId id="275" r:id="rId30"/>
-    <p:sldId id="276" r:id="rId31"/>
-    <p:sldId id="277" r:id="rId32"/>
-    <p:sldId id="278" r:id="rId33"/>
-    <p:sldId id="279" r:id="rId34"/>
-    <p:sldId id="280" r:id="rId35"/>
-    <p:sldId id="281" r:id="rId36"/>
+    <p:sldId id="801" r:id="rIdGuideOrder1"/>
+    <p:sldId id="802" r:id="rIdGuideOrder2"/>
+    <p:sldId id="803" r:id="rIdGuideOrder3"/>
+    <p:sldId id="804" r:id="rIdGuideOrder4"/>
+    <p:sldId id="805" r:id="rIdGuideOrder5"/>
+    <p:sldId id="806" r:id="rIdGuideOrder6"/>
+    <p:sldId id="807" r:id="rIdGuideOrder7"/>
+    <p:sldId id="808" r:id="rIdGuideOrder8"/>
+    <p:sldId id="809" r:id="rIdGuideOrder9"/>
+    <p:sldId id="810" r:id="rIdGuideOrder10"/>
+    <p:sldId id="811" r:id="rIdGuideOrder11"/>
+    <p:sldId id="812" r:id="rIdGuideOrder12"/>
+    <p:sldId id="813" r:id="rIdGuideOrder13"/>
+    <p:sldId id="814" r:id="rIdGuideOrder14"/>
+    <p:sldId id="815" r:id="rIdGuideOrder15"/>
+    <p:sldId id="816" r:id="rIdGuideOrder16"/>
+    <p:sldId id="817" r:id="rIdGuideOrder17"/>
+    <p:sldId id="818" r:id="rIdGuideOrder18"/>
+    <p:sldId id="819" r:id="rIdGuideOrder19"/>
+    <p:sldId id="820" r:id="rIdGuideOrder20"/>
+    <p:sldId id="821" r:id="rIdGuideOrder21"/>
+    <p:sldId id="822" r:id="rIdGuideOrder22"/>
+    <p:sldId id="823" r:id="rIdGuideOrder23"/>
+    <p:sldId id="824" r:id="rIdGuideOrder24"/>
+    <p:sldId id="825" r:id="rIdGuideOrder25"/>
+    <p:sldId id="826" r:id="rIdGuideOrder26"/>
+    <p:sldId id="827" r:id="rIdGuideOrder27"/>
+    <p:sldId id="828" r:id="rIdGuideOrder28"/>
+    <p:sldId id="829" r:id="rIdGuideOrder29"/>
   </p:sldIdLst>
   <p:sldSz cx="12192000" cy="6858000"/>
   <p:notesSz cx="6858000" cy="9144000"/>
@@ -323,6 +326,200 @@
 </p:notesMaster>
 </file>
 
+<file path=ppt/notesSlides/guide7.xml><?xml version="1.0" encoding="utf-8"?>
+<p:notes xmlns:a="http://schemas.openxmlformats.org/drawingml/2006/main" xmlns:r="http://schemas.openxmlformats.org/officeDocument/2006/relationships" xmlns:p="http://schemas.openxmlformats.org/presentationml/2006/main">
+  <p:cSld>
+    <p:spTree>
+      <p:nvGrpSpPr>
+        <p:cNvPr id="1" name=""/>
+        <p:cNvGrpSpPr/>
+        <p:nvPr/>
+      </p:nvGrpSpPr>
+      <p:grpSpPr>
+        <a:xfrm>
+          <a:off x="0" y="0"/>
+          <a:ext cx="0" cy="0"/>
+          <a:chOff x="0" y="0"/>
+          <a:chExt cx="0" cy="0"/>
+        </a:xfrm>
+      </p:grpSpPr>
+      <p:sp>
+        <p:nvSpPr>
+          <p:cNvPr id="2" name="Slide Image Placeholder 1"/>
+          <p:cNvSpPr>
+            <a:spLocks noGrp="1" noRot="1" noChangeAspect="1"/>
+          </p:cNvSpPr>
+          <p:nvPr>
+            <p:ph type="sldImg"/>
+          </p:nvPr>
+        </p:nvSpPr>
+        <p:spPr/>
+      </p:sp>
+      <p:sp>
+        <p:nvSpPr>
+          <p:cNvPr id="3" name="Notes Placeholder 2"/>
+          <p:cNvSpPr>
+            <a:spLocks noGrp="1"/>
+          </p:cNvSpPr>
+          <p:nvPr>
+            <p:ph type="body" idx="1"/>
+          </p:nvPr>
+        </p:nvSpPr>
+        <p:spPr/>
+        <p:txBody>
+          <a:bodyPr/>
+          <a:lstStyle/>
+          <a:p>
+            <a:r>
+              <a:t>对应配套正文 P003 开篇与 3.1。</a:t>
+            </a:r>
+          </a:p>
+          <a:p>
+            <a:r>
+              <a:t>主机程序已经可用，现在要为 hello_world + mps2/an386 生成 ARM 指令。电脑是 Windows x64，目标是 Cortex-M4，两种架构分别决定主机包与目标工具链。</a:t>
+            </a:r>
+          </a:p>
+          <a:p>
+            <a:r>
+              <a:t>MPS2 的板/SoC/架构/驱动已经在 Zephyr 主仓；CMSIS Core 在清单的外部项目中。它们是被编译的源码，不由安装 SDK 产生。</a:t>
+            </a:r>
+          </a:p>
+          <a:p>
+            <a:r>
+              <a:t>后续 HC32F4A0 可复用 ARM 工具链，但需要自己的硬件支持。先选一条 SDK 安装路线，等源码依赖齐全再用完整应用核验实际选择。</a:t>
+            </a:r>
+          </a:p>
+          <a:p>
+            <a:r>
+              <a:t>P003 开篇与 3.1；27+2=29 页，仍不超过30</a:t>
+            </a:r>
+          </a:p>
+        </p:txBody>
+      </p:sp>
+      <p:sp>
+        <p:nvSpPr>
+          <p:cNvPr id="4" name="Slide Number Placeholder 3"/>
+          <p:cNvSpPr>
+            <a:spLocks noGrp="1"/>
+          </p:cNvSpPr>
+          <p:nvPr>
+            <p:ph type="sldNum" idx="5"/>
+          </p:nvPr>
+        </p:nvSpPr>
+        <p:spPr/>
+        <p:txBody>
+          <a:bodyPr/>
+          <a:lstStyle/>
+          <a:p>
+            <a:endParaRPr/>
+          </a:p>
+        </p:txBody>
+      </p:sp>
+    </p:spTree>
+  </p:cSld>
+  <p:clrMapOvr>
+    <a:masterClrMapping/>
+  </p:clrMapOvr>
+</p:notes>
+</file>
+
+<file path=ppt/notesSlides/guide8.xml><?xml version="1.0" encoding="utf-8"?>
+<p:notes xmlns:a="http://schemas.openxmlformats.org/drawingml/2006/main" xmlns:r="http://schemas.openxmlformats.org/officeDocument/2006/relationships" xmlns:p="http://schemas.openxmlformats.org/presentationml/2006/main">
+  <p:cSld>
+    <p:spTree>
+      <p:nvGrpSpPr>
+        <p:cNvPr id="1" name=""/>
+        <p:cNvGrpSpPr/>
+        <p:nvPr/>
+      </p:nvGrpSpPr>
+      <p:grpSpPr>
+        <a:xfrm>
+          <a:off x="0" y="0"/>
+          <a:ext cx="0" cy="0"/>
+          <a:chOff x="0" y="0"/>
+          <a:chExt cx="0" cy="0"/>
+        </a:xfrm>
+      </p:grpSpPr>
+      <p:sp>
+        <p:nvSpPr>
+          <p:cNvPr id="2" name="Slide Image Placeholder 1"/>
+          <p:cNvSpPr>
+            <a:spLocks noGrp="1" noRot="1" noChangeAspect="1"/>
+          </p:cNvSpPr>
+          <p:nvPr>
+            <p:ph type="sldImg"/>
+          </p:nvPr>
+        </p:nvSpPr>
+        <p:spPr/>
+      </p:sp>
+      <p:sp>
+        <p:nvSpPr>
+          <p:cNvPr id="3" name="Notes Placeholder 2"/>
+          <p:cNvSpPr>
+            <a:spLocks noGrp="1"/>
+          </p:cNvSpPr>
+          <p:nvPr>
+            <p:ph type="body" idx="1"/>
+          </p:nvPr>
+        </p:nvSpPr>
+        <p:spPr/>
+        <p:txBody>
+          <a:bodyPr/>
+          <a:lstStyle/>
+          <a:p>
+            <a:r>
+              <a:t>对应配套正文 P003 3.5。</a:t>
+            </a:r>
+          </a:p>
+          <a:p>
+            <a:r>
+              <a:t>本册应留下含 sdk_version 的 SDK 根、可运行的 ARM GCC，以及自己选定的发现入口；GNU 与补齐 ARM 的 Minimal 共享这个接口。</a:t>
+            </a:r>
+          </a:p>
+          <a:p>
+            <a:r>
+              <a:t>配置成功才会产生 CMakeCache 和编译数据库。首次顺序阅读时它们尚不存在，不要为了看到文件而跳过 P004 的 CMSIS。</a:t>
+            </a:r>
+          </a:p>
+          <a:p>
+            <a:r>
+              <a:t>P004 从芯片和 CPU 配置确定 CMSIS；P005 讲官方工程与驱动模型；P006 再取得 HC32 DDL 并接入模块。</a:t>
+            </a:r>
+          </a:p>
+          <a:p>
+            <a:r>
+              <a:t>P003 3.5</a:t>
+            </a:r>
+          </a:p>
+        </p:txBody>
+      </p:sp>
+      <p:sp>
+        <p:nvSpPr>
+          <p:cNvPr id="4" name="Slide Number Placeholder 3"/>
+          <p:cNvSpPr>
+            <a:spLocks noGrp="1"/>
+          </p:cNvSpPr>
+          <p:nvPr>
+            <p:ph type="sldNum" idx="5"/>
+          </p:nvPr>
+        </p:nvSpPr>
+        <p:spPr/>
+        <p:txBody>
+          <a:bodyPr/>
+          <a:lstStyle/>
+          <a:p>
+            <a:endParaRPr/>
+          </a:p>
+        </p:txBody>
+      </p:sp>
+    </p:spTree>
+  </p:cSld>
+  <p:clrMapOvr>
+    <a:masterClrMapping/>
+  </p:clrMapOvr>
+</p:notes>
+</file>
+
 <file path=ppt/notesSlides/notesSlide1.xml><?xml version="1.0" encoding="utf-8"?>
 <p:notes xmlns:a="http://schemas.openxmlformats.org/drawingml/2006/main" xmlns:r="http://schemas.openxmlformats.org/officeDocument/2006/relationships" xmlns:p="http://schemas.openxmlformats.org/presentationml/2006/main">
   <p:cSld>
@@ -368,7 +565,7 @@
           <a:lstStyle/>
           <a:p>
             <a:r>
-              <a:t>承接第一期的 UCRT64 与源码下载。本期从原生文件查版本，准备 SDK、主机工具、Windows Python 3.12.10、west 1.5.0 与源码根 .venv。完成标志是工具和包环境可以核验、下次可以恢复。CMake 配置、实际编译与新增板实验已独立放入 P011。</a:t>
+              <a:t>承接第一期的 UCRT64 与源码下载。本期从原生文件查版本，准备 SDK、主机工具、Windows Python 3.12.10、west 1.5.0 与源码根 .venv。完成标志是工具和包环境可以核验、下次可以恢复。CMake 配置、实际编译与新增板实验已独立放入 P012。</a:t>
             </a:r>
           </a:p>
           <a:p>
@@ -1564,7 +1761,7 @@
           </a:p>
           <a:p>
             <a:r>
-              <a:t>已有构建缓存会保留上次选择，换 SDK 时使用新构建目录或按 P010 更新缓存。</a:t>
+              <a:t>已有构建缓存会保留上次选择，换 SDK 时使用新构建目录或按 P011 更新缓存。</a:t>
             </a:r>
           </a:p>
           <a:p>
@@ -1719,7 +1916,7 @@
           </a:p>
           <a:p>
             <a:r>
-              <a:t>本页展示接入口；P004—P005 依赖未齐时先不执行。配置成功应显示所选 SDK 路径。</a:t>
+              <a:t>本页先认识 SDK 接入口；P004 取得 CMSIS，P005 核对 MPS2 工程输入后再配置。</a:t>
             </a:r>
           </a:p>
           <a:p>
@@ -1729,7 +1926,7 @@
           </a:p>
           <a:p>
             <a:r>
-              <a:t>原文件定位：官方 hello_world + mps2/an386；编译与运行见 P007</a:t>
+              <a:t>原文件定位：官方 hello_world + mps2/an386；编译与运行见 P008</a:t>
             </a:r>
           </a:p>
         </p:txBody>
@@ -1821,7 +2018,7 @@
           </a:p>
           <a:p>
             <a:r>
-              <a:t>前置：P002 的 CMake、7-Zip、Python 与 .venv。</a:t>
+              <a:t>主机工具已可用；接着为 hello_world + MPS2 准备 ARM 编译器。</a:t>
             </a:r>
           </a:p>
           <a:p>
@@ -1834,7 +2031,7 @@
           </a:p>
           <a:p>
             <a:r>
-              <a:t>本册使用 Windows x64 与 SDK 1.0.1。编译、运行在 P007；独立工具链是可选分支。</a:t>
+              <a:t>本册使用 Windows x64 与 SDK 1.0.1。编译、运行在 P008；独立工具链是可选分支。</a:t>
             </a:r>
           </a:p>
           <a:p>
@@ -2094,7 +2291,7 @@
           </a:p>
           <a:p>
             <a:r>
-              <a:t>HC32F4A0 为 Cortex-M4F，复用 ARM 工具链；板 / SoC 支持仍需 P011 新增。</a:t>
+              <a:t>HC32F4A0 为 Cortex-M4F，复用 ARM 工具链；板 / SoC 支持仍需 P012 新增。</a:t>
             </a:r>
           </a:p>
           <a:p>
@@ -2389,7 +2586,7 @@
           </a:p>
           <a:p>
             <a:r>
-              <a:t>原文件定位：主机工具仍需 P002；依赖仍需 P004—P005；运行见 P011</a:t>
+              <a:t>原文件定位：主机工具见 P002；CMSIS 见 P004；MPS2 工程见 P005；运行见 P012</a:t>
             </a:r>
           </a:p>
         </p:txBody>
@@ -2484,7 +2681,7 @@
           </a:p>
           <a:p>
             <a:r>
-              <a:t># Windows UCRT64；先完成第 19 页的 CMake 配置，才有这些产物。</a:t>
+              <a:t># Windows UCRT64；依赖齐全且 3.3.4 配置成功后，才有这些产物。</a:t>
             </a:r>
           </a:p>
           <a:p>
@@ -2524,7 +2721,7 @@
           </a:p>
           <a:p>
             <a:r>
-              <a:t>原文件定位：配置输出与 -B 目录产物；编译日志和产物在 P007 继续核验</a:t>
+              <a:t>原文件定位：配置输出与 -B 目录产物；编译日志和产物在 P008 继续核验</a:t>
             </a:r>
           </a:p>
         </p:txBody>
@@ -2742,7 +2939,7 @@
           </a:p>
           <a:p>
             <a:r>
-              <a:t>P006 讲 CMake 基础；P009 / P010 展开接口与缓存。</a:t>
+              <a:t>MPS2 的板/SoC/驱动随主仓取得；HC32 迁移时再追加厂商库与适配。</a:t>
             </a:r>
           </a:p>
           <a:p>
@@ -3831,6 +4028,83 @@
           <a:p>
             <a:r>
               <a:t>原文件定位：同版 sha256.sum 与 GNU SDK 归档</a:t>
+            </a:r>
+          </a:p>
+        </p:txBody>
+      </p:sp>
+      <p:sp>
+        <p:nvSpPr>
+          <p:cNvPr id="4" name="Slide Number Placeholder 3"/>
+          <p:cNvSpPr>
+            <a:spLocks noGrp="1"/>
+          </p:cNvSpPr>
+          <p:nvPr>
+            <p:ph type="sldNum" idx="5"/>
+          </p:nvPr>
+        </p:nvSpPr>
+        <p:spPr/>
+        <p:txBody>
+          <a:bodyPr/>
+          <a:lstStyle/>
+          <a:p>
+            <a:endParaRPr/>
+          </a:p>
+        </p:txBody>
+      </p:sp>
+    </p:spTree>
+  </p:cSld>
+  <p:clrMapOvr>
+    <a:masterClrMapping/>
+  </p:clrMapOvr>
+</p:notes>
+</file>
+
+<file path=ppt/notesSlides/westGit27.xml><?xml version="1.0" encoding="utf-8"?>
+<p:notes xmlns:a="http://schemas.openxmlformats.org/drawingml/2006/main" xmlns:r="http://schemas.openxmlformats.org/officeDocument/2006/relationships" xmlns:p="http://schemas.openxmlformats.org/presentationml/2006/main">
+  <p:cSld>
+    <p:spTree>
+      <p:nvGrpSpPr>
+        <p:cNvPr id="1" name=""/>
+        <p:cNvGrpSpPr/>
+        <p:nvPr/>
+      </p:nvGrpSpPr>
+      <p:grpSpPr>
+        <a:xfrm>
+          <a:off x="0" y="0"/>
+          <a:ext cx="0" cy="0"/>
+          <a:chOff x="0" y="0"/>
+          <a:chExt cx="0" cy="0"/>
+        </a:xfrm>
+      </p:grpSpPr>
+      <p:sp>
+        <p:nvSpPr>
+          <p:cNvPr id="2" name="Slide Image Placeholder 1"/>
+          <p:cNvSpPr>
+            <a:spLocks noGrp="1" noRot="1" noChangeAspect="1"/>
+          </p:cNvSpPr>
+          <p:nvPr>
+            <p:ph type="sldImg"/>
+          </p:nvPr>
+        </p:nvSpPr>
+        <p:spPr/>
+      </p:sp>
+      <p:sp>
+        <p:nvSpPr>
+          <p:cNvPr id="3" name="Notes Placeholder 2"/>
+          <p:cNvSpPr>
+            <a:spLocks noGrp="1"/>
+          </p:cNvSpPr>
+          <p:nvPr>
+            <p:ph type="body" idx="1"/>
+          </p:nvPr>
+        </p:nvSpPr>
+        <p:spPr/>
+        <p:txBody>
+          <a:bodyPr/>
+          <a:lstStyle/>
+          <a:p>
+            <a:r>
+              <a:t>转入 CMSIS 获取前先区分 SDK 安装成功和 Git 子进程调用成功。命令输出用来检查当前 Python 和 Git，完整恢复见配套 MD 3.5.2 与 P004 4.2/4.4。用户本次提供的记录显示更换 /ucrt64/bin/git 后成功，未进行本机进程跟踪。来源：https://www.msys2.org/docs/git/；https://github.com/zephyrproject-rtos/zephyr/discussions/48837。</a:t>
             </a:r>
           </a:p>
         </p:txBody>
@@ -23323,6 +23597,964 @@
 </p:sldMaster>
 </file>
 
+<file path=ppt/slides/guide7.xml><?xml version="1.0" encoding="utf-8"?>
+<p:sld xmlns:a="http://schemas.openxmlformats.org/drawingml/2006/main" xmlns:r="http://schemas.openxmlformats.org/officeDocument/2006/relationships" xmlns:p="http://schemas.openxmlformats.org/presentationml/2006/main">
+  <p:cSld>
+    <p:bg>
+      <p:bgPr>
+        <a:solidFill>
+          <a:srgbClr val="FFFFFF"/>
+        </a:solidFill>
+        <a:effectLst/>
+      </p:bgPr>
+    </p:bg>
+    <p:spTree>
+      <p:nvGrpSpPr>
+        <p:cNvPr id="1" name=""/>
+        <p:cNvGrpSpPr/>
+        <p:nvPr/>
+      </p:nvGrpSpPr>
+      <p:grpSpPr>
+        <a:xfrm>
+          <a:off x="0" y="0"/>
+          <a:ext cx="0" cy="0"/>
+          <a:chOff x="0" y="0"/>
+          <a:chExt cx="0" cy="0"/>
+        </a:xfrm>
+      </p:grpSpPr>
+      <p:sp>
+        <p:nvSpPr>
+          <p:cNvPr id="2" name="Title"/>
+          <p:cNvSpPr>
+            <a:spLocks noGrp="1"/>
+          </p:cNvSpPr>
+          <p:nvPr/>
+        </p:nvSpPr>
+        <p:spPr>
+          <a:xfrm>
+            <a:off x="609600" y="400050"/>
+            <a:ext cx="10972800" cy="723900"/>
+          </a:xfrm>
+          <a:prstGeom prst="rect">
+            <a:avLst/>
+          </a:prstGeom>
+          <a:noFill/>
+          <a:ln w="0">
+            <a:noFill/>
+          </a:ln>
+        </p:spPr>
+        <p:txBody>
+          <a:bodyPr lIns="0" tIns="0" rIns="0" bIns="0" anchor="t">
+            <a:noAutofit/>
+          </a:bodyPr>
+          <a:lstStyle>
+            <a:defPPr>
+              <a:defRPr sz="3000" b="1">
+                <a:solidFill>
+                  <a:srgbClr val="29263B"/>
+                </a:solidFill>
+                <a:latin typeface="Microsoft YaHei"/>
+                <a:ea typeface="Microsoft YaHei"/>
+                <a:cs typeface="Microsoft YaHei"/>
+              </a:defRPr>
+            </a:defPPr>
+          </a:lstStyle>
+          <a:p>
+            <a:pPr>
+              <a:lnSpc>
+                <a:spcPct val="120000"/>
+              </a:lnSpc>
+              <a:spcAft>
+                <a:spcPts val="0"/>
+              </a:spcAft>
+              <a:defRPr sz="3000" b="1">
+                <a:solidFill>
+                  <a:srgbClr val="29263B"/>
+                </a:solidFill>
+                <a:latin typeface="Microsoft YaHei"/>
+                <a:ea typeface="Microsoft YaHei"/>
+                <a:cs typeface="Microsoft YaHei"/>
+              </a:defRPr>
+            </a:pPr>
+            <a:r>
+              <a:t>同一任务中，SDK 负责哪一部分</a:t>
+            </a:r>
+          </a:p>
+        </p:txBody>
+      </p:sp>
+      <p:sp>
+        <p:nvSpPr>
+          <p:cNvPr id="3" name="Stage"/>
+          <p:cNvSpPr>
+            <a:spLocks noGrp="1"/>
+          </p:cNvSpPr>
+          <p:nvPr/>
+        </p:nvSpPr>
+        <p:spPr>
+          <a:xfrm>
+            <a:off x="609600" y="1209675"/>
+            <a:ext cx="10972800" cy="333375"/>
+          </a:xfrm>
+          <a:prstGeom prst="rect">
+            <a:avLst/>
+          </a:prstGeom>
+          <a:noFill/>
+          <a:ln w="0">
+            <a:noFill/>
+          </a:ln>
+        </p:spPr>
+        <p:txBody>
+          <a:bodyPr lIns="0" tIns="0" rIns="0" bIns="0" anchor="t">
+            <a:noAutofit/>
+          </a:bodyPr>
+          <a:lstStyle>
+            <a:defPPr>
+              <a:defRPr sz="1650" b="0">
+                <a:solidFill>
+                  <a:srgbClr val="7350BC"/>
+                </a:solidFill>
+                <a:latin typeface="Microsoft YaHei"/>
+                <a:ea typeface="Microsoft YaHei"/>
+                <a:cs typeface="Microsoft YaHei"/>
+              </a:defRPr>
+            </a:defPPr>
+          </a:lstStyle>
+          <a:p>
+            <a:pPr>
+              <a:lnSpc>
+                <a:spcPct val="120000"/>
+              </a:lnSpc>
+              <a:spcAft>
+                <a:spcPts val="0"/>
+              </a:spcAft>
+              <a:defRPr sz="1650" b="0">
+                <a:solidFill>
+                  <a:srgbClr val="7350BC"/>
+                </a:solidFill>
+                <a:latin typeface="Microsoft YaHei"/>
+                <a:ea typeface="Microsoft YaHei"/>
+                <a:cs typeface="Microsoft YaHei"/>
+              </a:defRPr>
+            </a:pPr>
+            <a:r>
+              <a:rPr>
+                <a:solidFill>
+                  <a:srgbClr val="7350BC"/>
+                </a:solidFill>
+                <a:ea typeface="Microsoft YaHei"/>
+              </a:rPr>
+              <a:t>P003 开篇与 3.1 · 从当前任务理解工程组织</a:t>
+            </a:r>
+          </a:p>
+        </p:txBody>
+      </p:sp>
+      <p:sp>
+        <p:nvSpPr>
+          <p:cNvPr id="4" name="Body 0"/>
+          <p:cNvSpPr>
+            <a:spLocks noGrp="1"/>
+          </p:cNvSpPr>
+          <p:nvPr/>
+        </p:nvSpPr>
+        <p:spPr>
+          <a:xfrm>
+            <a:off x="609600" y="1771650"/>
+            <a:ext cx="10972800" cy="792480"/>
+          </a:xfrm>
+          <a:prstGeom prst="rect">
+            <a:avLst/>
+          </a:prstGeom>
+          <a:noFill/>
+          <a:ln w="0">
+            <a:noFill/>
+          </a:ln>
+        </p:spPr>
+        <p:txBody>
+          <a:bodyPr lIns="0" tIns="0" rIns="0" bIns="0" anchor="t">
+            <a:noAutofit/>
+          </a:bodyPr>
+          <a:lstStyle>
+            <a:defPPr>
+              <a:defRPr sz="2250" b="0">
+                <a:solidFill>
+                  <a:srgbClr val="29263B"/>
+                </a:solidFill>
+                <a:latin typeface="Microsoft YaHei"/>
+                <a:ea typeface="Microsoft YaHei"/>
+                <a:cs typeface="Microsoft YaHei"/>
+              </a:defRPr>
+            </a:defPPr>
+          </a:lstStyle>
+          <a:p>
+            <a:pPr>
+              <a:lnSpc>
+                <a:spcPct val="120000"/>
+              </a:lnSpc>
+              <a:spcAft>
+                <a:spcPts val="0"/>
+              </a:spcAft>
+              <a:defRPr sz="2250" b="0">
+                <a:solidFill>
+                  <a:srgbClr val="29263B"/>
+                </a:solidFill>
+                <a:latin typeface="Microsoft YaHei"/>
+                <a:ea typeface="Microsoft YaHei"/>
+                <a:cs typeface="Microsoft YaHei"/>
+              </a:defRPr>
+            </a:pPr>
+            <a:r>
+              <a:t>主机程序已经可用，现在要为 hello_world + mps2/an386 生成 ARM 指令。电脑是 Windows x64，目标是 Cortex-M4，两种架构分别决定主机包与目标工具链。</a:t>
+            </a:r>
+          </a:p>
+        </p:txBody>
+      </p:sp>
+      <p:sp>
+        <p:nvSpPr>
+          <p:cNvPr id="5" name="Body 1"/>
+          <p:cNvSpPr>
+            <a:spLocks noGrp="1"/>
+          </p:cNvSpPr>
+          <p:nvPr/>
+        </p:nvSpPr>
+        <p:spPr>
+          <a:xfrm>
+            <a:off x="609600" y="2735580"/>
+            <a:ext cx="10972800" cy="792480"/>
+          </a:xfrm>
+          <a:prstGeom prst="rect">
+            <a:avLst/>
+          </a:prstGeom>
+          <a:noFill/>
+          <a:ln w="0">
+            <a:noFill/>
+          </a:ln>
+        </p:spPr>
+        <p:txBody>
+          <a:bodyPr lIns="0" tIns="0" rIns="0" bIns="0" anchor="t">
+            <a:noAutofit/>
+          </a:bodyPr>
+          <a:lstStyle>
+            <a:defPPr>
+              <a:defRPr sz="2250" b="0">
+                <a:solidFill>
+                  <a:srgbClr val="29263B"/>
+                </a:solidFill>
+                <a:latin typeface="Microsoft YaHei"/>
+                <a:ea typeface="Microsoft YaHei"/>
+                <a:cs typeface="Microsoft YaHei"/>
+              </a:defRPr>
+            </a:defPPr>
+          </a:lstStyle>
+          <a:p>
+            <a:pPr>
+              <a:lnSpc>
+                <a:spcPct val="120000"/>
+              </a:lnSpc>
+              <a:spcAft>
+                <a:spcPts val="0"/>
+              </a:spcAft>
+              <a:defRPr sz="2250" b="0">
+                <a:solidFill>
+                  <a:srgbClr val="29263B"/>
+                </a:solidFill>
+                <a:latin typeface="Microsoft YaHei"/>
+                <a:ea typeface="Microsoft YaHei"/>
+                <a:cs typeface="Microsoft YaHei"/>
+              </a:defRPr>
+            </a:pPr>
+            <a:r>
+              <a:t>MPS2 的板/SoC/架构/驱动已经在 Zephyr 主仓；CMSIS Core 在清单的外部项目中。它们是被编译的源码，不由安装 SDK 产生。</a:t>
+            </a:r>
+          </a:p>
+        </p:txBody>
+      </p:sp>
+      <p:sp>
+        <p:nvSpPr>
+          <p:cNvPr id="6" name="Body 2"/>
+          <p:cNvSpPr>
+            <a:spLocks noGrp="1"/>
+          </p:cNvSpPr>
+          <p:nvPr/>
+        </p:nvSpPr>
+        <p:spPr>
+          <a:xfrm>
+            <a:off x="609600" y="3699510"/>
+            <a:ext cx="10972800" cy="792480"/>
+          </a:xfrm>
+          <a:prstGeom prst="rect">
+            <a:avLst/>
+          </a:prstGeom>
+          <a:noFill/>
+          <a:ln w="0">
+            <a:noFill/>
+          </a:ln>
+        </p:spPr>
+        <p:txBody>
+          <a:bodyPr lIns="0" tIns="0" rIns="0" bIns="0" anchor="t">
+            <a:noAutofit/>
+          </a:bodyPr>
+          <a:lstStyle>
+            <a:defPPr>
+              <a:defRPr sz="2250" b="0">
+                <a:solidFill>
+                  <a:srgbClr val="29263B"/>
+                </a:solidFill>
+                <a:latin typeface="Microsoft YaHei"/>
+                <a:ea typeface="Microsoft YaHei"/>
+                <a:cs typeface="Microsoft YaHei"/>
+              </a:defRPr>
+            </a:defPPr>
+          </a:lstStyle>
+          <a:p>
+            <a:pPr>
+              <a:lnSpc>
+                <a:spcPct val="120000"/>
+              </a:lnSpc>
+              <a:spcAft>
+                <a:spcPts val="0"/>
+              </a:spcAft>
+              <a:defRPr sz="2250" b="0">
+                <a:solidFill>
+                  <a:srgbClr val="29263B"/>
+                </a:solidFill>
+                <a:latin typeface="Microsoft YaHei"/>
+                <a:ea typeface="Microsoft YaHei"/>
+                <a:cs typeface="Microsoft YaHei"/>
+              </a:defRPr>
+            </a:pPr>
+            <a:r>
+              <a:t>后续 HC32F4A0 可复用 ARM 工具链，但需要自己的硬件支持。先选一条 SDK 安装路线，等源码依赖齐全再用完整应用核验实际选择。</a:t>
+            </a:r>
+          </a:p>
+        </p:txBody>
+      </p:sp>
+      <p:sp>
+        <p:nvSpPr>
+          <p:cNvPr id="7" name="Reading link"/>
+          <p:cNvSpPr>
+            <a:spLocks noGrp="1"/>
+          </p:cNvSpPr>
+          <p:nvPr/>
+        </p:nvSpPr>
+        <p:spPr>
+          <a:xfrm>
+            <a:off x="609600" y="6105525"/>
+            <a:ext cx="10972800" cy="257175"/>
+          </a:xfrm>
+          <a:prstGeom prst="rect">
+            <a:avLst/>
+          </a:prstGeom>
+          <a:noFill/>
+          <a:ln w="0">
+            <a:noFill/>
+          </a:ln>
+        </p:spPr>
+        <p:txBody>
+          <a:bodyPr lIns="0" tIns="0" rIns="0" bIns="0" anchor="t">
+            <a:noAutofit/>
+          </a:bodyPr>
+          <a:lstStyle>
+            <a:defPPr>
+              <a:defRPr sz="1275" b="0">
+                <a:solidFill>
+                  <a:srgbClr val="347D95"/>
+                </a:solidFill>
+                <a:latin typeface="Microsoft YaHei"/>
+                <a:ea typeface="Microsoft YaHei"/>
+                <a:cs typeface="Microsoft YaHei"/>
+              </a:defRPr>
+            </a:defPPr>
+          </a:lstStyle>
+          <a:p>
+            <a:pPr>
+              <a:lnSpc>
+                <a:spcPct val="120000"/>
+              </a:lnSpc>
+              <a:spcAft>
+                <a:spcPts val="0"/>
+              </a:spcAft>
+              <a:defRPr sz="1275" b="0">
+                <a:solidFill>
+                  <a:srgbClr val="347D95"/>
+                </a:solidFill>
+                <a:latin typeface="Microsoft YaHei"/>
+                <a:ea typeface="Microsoft YaHei"/>
+                <a:cs typeface="Microsoft YaHei"/>
+              </a:defRPr>
+            </a:pPr>
+            <a:r>
+              <a:rPr>
+                <a:solidFill>
+                  <a:srgbClr val="347D95"/>
+                </a:solidFill>
+                <a:ea typeface="Microsoft YaHei"/>
+                <a:hlinkClick r:id="rIdReading"/>
+              </a:rPr>
+              <a:t>完整解释与操作：配套 Markdown P003 开篇与 3.1</a:t>
+            </a:r>
+          </a:p>
+        </p:txBody>
+      </p:sp>
+      <p:sp>
+        <p:nvSpPr>
+          <p:cNvPr id="8" name="PageNumber"/>
+          <p:cNvSpPr>
+            <a:spLocks noGrp="1"/>
+          </p:cNvSpPr>
+          <p:nvPr/>
+        </p:nvSpPr>
+        <p:spPr>
+          <a:xfrm>
+            <a:off x="10858500" y="6438900"/>
+            <a:ext cx="723900" cy="266700"/>
+          </a:xfrm>
+          <a:prstGeom prst="rect">
+            <a:avLst/>
+          </a:prstGeom>
+          <a:noFill/>
+          <a:ln w="0">
+            <a:noFill/>
+          </a:ln>
+        </p:spPr>
+        <p:txBody>
+          <a:bodyPr lIns="0" tIns="0" rIns="0" bIns="0" anchor="ctr">
+            <a:noAutofit/>
+          </a:bodyPr>
+          <a:lstStyle>
+            <a:defPPr algn="r">
+              <a:defRPr sz="1350">
+                <a:solidFill>
+                  <a:srgbClr val="646173"/>
+                </a:solidFill>
+                <a:latin typeface="Microsoft YaHei"/>
+                <a:ea typeface="Microsoft YaHei"/>
+                <a:cs typeface="Microsoft YaHei"/>
+              </a:defRPr>
+            </a:defPPr>
+          </a:lstStyle>
+          <a:p>
+            <a:pPr algn="r">
+              <a:lnSpc>
+                <a:spcPct val="120000"/>
+              </a:lnSpc>
+              <a:defRPr sz="1350">
+                <a:solidFill>
+                  <a:srgbClr val="646173"/>
+                </a:solidFill>
+                <a:latin typeface="Microsoft YaHei"/>
+                <a:ea typeface="Microsoft YaHei"/>
+                <a:cs typeface="Microsoft YaHei"/>
+              </a:defRPr>
+            </a:pPr>
+            <a:fld id="{0AC596C6-C4AC-4625-82BF-865AD22BAFCF}" type="slidenum">
+              <a:rPr sz="1350">
+                <a:solidFill>
+                  <a:srgbClr val="646173"/>
+                </a:solidFill>
+                <a:latin typeface="Microsoft YaHei"/>
+                <a:ea typeface="Microsoft YaHei"/>
+                <a:cs typeface="Microsoft YaHei"/>
+              </a:rPr>
+              <a:t>3</a:t>
+            </a:fld>
+            <a:endParaRPr sz="1350">
+              <a:solidFill>
+                <a:srgbClr val="646173"/>
+              </a:solidFill>
+              <a:latin typeface="Microsoft YaHei"/>
+              <a:ea typeface="Microsoft YaHei"/>
+              <a:cs typeface="Microsoft YaHei"/>
+            </a:endParaRPr>
+          </a:p>
+        </p:txBody>
+      </p:sp>
+    </p:spTree>
+  </p:cSld>
+  <p:clrMapOvr>
+    <a:masterClrMapping/>
+  </p:clrMapOvr>
+</p:sld>
+</file>
+
+<file path=ppt/slides/guide8.xml><?xml version="1.0" encoding="utf-8"?>
+<p:sld xmlns:a="http://schemas.openxmlformats.org/drawingml/2006/main" xmlns:r="http://schemas.openxmlformats.org/officeDocument/2006/relationships" xmlns:p="http://schemas.openxmlformats.org/presentationml/2006/main">
+  <p:cSld>
+    <p:bg>
+      <p:bgPr>
+        <a:solidFill>
+          <a:srgbClr val="FFFFFF"/>
+        </a:solidFill>
+        <a:effectLst/>
+      </p:bgPr>
+    </p:bg>
+    <p:spTree>
+      <p:nvGrpSpPr>
+        <p:cNvPr id="1" name=""/>
+        <p:cNvGrpSpPr/>
+        <p:nvPr/>
+      </p:nvGrpSpPr>
+      <p:grpSpPr>
+        <a:xfrm>
+          <a:off x="0" y="0"/>
+          <a:ext cx="0" cy="0"/>
+          <a:chOff x="0" y="0"/>
+          <a:chExt cx="0" cy="0"/>
+        </a:xfrm>
+      </p:grpSpPr>
+      <p:sp>
+        <p:nvSpPr>
+          <p:cNvPr id="2" name="Title"/>
+          <p:cNvSpPr>
+            <a:spLocks noGrp="1"/>
+          </p:cNvSpPr>
+          <p:nvPr/>
+        </p:nvSpPr>
+        <p:spPr>
+          <a:xfrm>
+            <a:off x="609600" y="400050"/>
+            <a:ext cx="10972800" cy="723900"/>
+          </a:xfrm>
+          <a:prstGeom prst="rect">
+            <a:avLst/>
+          </a:prstGeom>
+          <a:noFill/>
+          <a:ln w="0">
+            <a:noFill/>
+          </a:ln>
+        </p:spPr>
+        <p:txBody>
+          <a:bodyPr lIns="0" tIns="0" rIns="0" bIns="0" anchor="t">
+            <a:noAutofit/>
+          </a:bodyPr>
+          <a:lstStyle>
+            <a:defPPr>
+              <a:defRPr sz="3000" b="1">
+                <a:solidFill>
+                  <a:srgbClr val="29263B"/>
+                </a:solidFill>
+                <a:latin typeface="Microsoft YaHei"/>
+                <a:ea typeface="Microsoft YaHei"/>
+                <a:cs typeface="Microsoft YaHei"/>
+              </a:defRPr>
+            </a:defPPr>
+          </a:lstStyle>
+          <a:p>
+            <a:pPr>
+              <a:lnSpc>
+                <a:spcPct val="120000"/>
+              </a:lnSpc>
+              <a:spcAft>
+                <a:spcPts val="0"/>
+              </a:spcAft>
+              <a:defRPr sz="3000" b="1">
+                <a:solidFill>
+                  <a:srgbClr val="29263B"/>
+                </a:solidFill>
+                <a:latin typeface="Microsoft YaHei"/>
+                <a:ea typeface="Microsoft YaHei"/>
+                <a:cs typeface="Microsoft YaHei"/>
+              </a:defRPr>
+            </a:pPr>
+            <a:r>
+              <a:t>工具可运行之后，下一步找源码的缺口</a:t>
+            </a:r>
+          </a:p>
+        </p:txBody>
+      </p:sp>
+      <p:sp>
+        <p:nvSpPr>
+          <p:cNvPr id="3" name="Stage"/>
+          <p:cNvSpPr>
+            <a:spLocks noGrp="1"/>
+          </p:cNvSpPr>
+          <p:nvPr/>
+        </p:nvSpPr>
+        <p:spPr>
+          <a:xfrm>
+            <a:off x="609600" y="1209675"/>
+            <a:ext cx="10972800" cy="333375"/>
+          </a:xfrm>
+          <a:prstGeom prst="rect">
+            <a:avLst/>
+          </a:prstGeom>
+          <a:noFill/>
+          <a:ln w="0">
+            <a:noFill/>
+          </a:ln>
+        </p:spPr>
+        <p:txBody>
+          <a:bodyPr lIns="0" tIns="0" rIns="0" bIns="0" anchor="t">
+            <a:noAutofit/>
+          </a:bodyPr>
+          <a:lstStyle>
+            <a:defPPr>
+              <a:defRPr sz="1650" b="0">
+                <a:solidFill>
+                  <a:srgbClr val="7350BC"/>
+                </a:solidFill>
+                <a:latin typeface="Microsoft YaHei"/>
+                <a:ea typeface="Microsoft YaHei"/>
+                <a:cs typeface="Microsoft YaHei"/>
+              </a:defRPr>
+            </a:defPPr>
+          </a:lstStyle>
+          <a:p>
+            <a:pPr>
+              <a:lnSpc>
+                <a:spcPct val="120000"/>
+              </a:lnSpc>
+              <a:spcAft>
+                <a:spcPts val="0"/>
+              </a:spcAft>
+              <a:defRPr sz="1650" b="0">
+                <a:solidFill>
+                  <a:srgbClr val="7350BC"/>
+                </a:solidFill>
+                <a:latin typeface="Microsoft YaHei"/>
+                <a:ea typeface="Microsoft YaHei"/>
+                <a:cs typeface="Microsoft YaHei"/>
+              </a:defRPr>
+            </a:pPr>
+            <a:r>
+              <a:rPr>
+                <a:solidFill>
+                  <a:srgbClr val="7350BC"/>
+                </a:solidFill>
+                <a:ea typeface="Microsoft YaHei"/>
+              </a:rPr>
+              <a:t>P003 3.5 · 从当前任务理解工程组织</a:t>
+            </a:r>
+          </a:p>
+        </p:txBody>
+      </p:sp>
+      <p:sp>
+        <p:nvSpPr>
+          <p:cNvPr id="4" name="Body 0"/>
+          <p:cNvSpPr>
+            <a:spLocks noGrp="1"/>
+          </p:cNvSpPr>
+          <p:nvPr/>
+        </p:nvSpPr>
+        <p:spPr>
+          <a:xfrm>
+            <a:off x="609600" y="1771650"/>
+            <a:ext cx="10972800" cy="792480"/>
+          </a:xfrm>
+          <a:prstGeom prst="rect">
+            <a:avLst/>
+          </a:prstGeom>
+          <a:noFill/>
+          <a:ln w="0">
+            <a:noFill/>
+          </a:ln>
+        </p:spPr>
+        <p:txBody>
+          <a:bodyPr lIns="0" tIns="0" rIns="0" bIns="0" anchor="t">
+            <a:noAutofit/>
+          </a:bodyPr>
+          <a:lstStyle>
+            <a:defPPr>
+              <a:defRPr sz="2250" b="0">
+                <a:solidFill>
+                  <a:srgbClr val="29263B"/>
+                </a:solidFill>
+                <a:latin typeface="Microsoft YaHei"/>
+                <a:ea typeface="Microsoft YaHei"/>
+                <a:cs typeface="Microsoft YaHei"/>
+              </a:defRPr>
+            </a:defPPr>
+          </a:lstStyle>
+          <a:p>
+            <a:pPr>
+              <a:lnSpc>
+                <a:spcPct val="120000"/>
+              </a:lnSpc>
+              <a:spcAft>
+                <a:spcPts val="0"/>
+              </a:spcAft>
+              <a:defRPr sz="2250" b="0">
+                <a:solidFill>
+                  <a:srgbClr val="29263B"/>
+                </a:solidFill>
+                <a:latin typeface="Microsoft YaHei"/>
+                <a:ea typeface="Microsoft YaHei"/>
+                <a:cs typeface="Microsoft YaHei"/>
+              </a:defRPr>
+            </a:pPr>
+            <a:r>
+              <a:t>本册应留下含 sdk_version 的 SDK 根、可运行的 ARM GCC，以及自己选定的发现入口；GNU 与补齐 ARM 的 Minimal 共享这个接口。</a:t>
+            </a:r>
+          </a:p>
+        </p:txBody>
+      </p:sp>
+      <p:sp>
+        <p:nvSpPr>
+          <p:cNvPr id="5" name="Body 1"/>
+          <p:cNvSpPr>
+            <a:spLocks noGrp="1"/>
+          </p:cNvSpPr>
+          <p:nvPr/>
+        </p:nvSpPr>
+        <p:spPr>
+          <a:xfrm>
+            <a:off x="609600" y="2735580"/>
+            <a:ext cx="10972800" cy="792480"/>
+          </a:xfrm>
+          <a:prstGeom prst="rect">
+            <a:avLst/>
+          </a:prstGeom>
+          <a:noFill/>
+          <a:ln w="0">
+            <a:noFill/>
+          </a:ln>
+        </p:spPr>
+        <p:txBody>
+          <a:bodyPr lIns="0" tIns="0" rIns="0" bIns="0" anchor="t">
+            <a:noAutofit/>
+          </a:bodyPr>
+          <a:lstStyle>
+            <a:defPPr>
+              <a:defRPr sz="2250" b="0">
+                <a:solidFill>
+                  <a:srgbClr val="29263B"/>
+                </a:solidFill>
+                <a:latin typeface="Microsoft YaHei"/>
+                <a:ea typeface="Microsoft YaHei"/>
+                <a:cs typeface="Microsoft YaHei"/>
+              </a:defRPr>
+            </a:defPPr>
+          </a:lstStyle>
+          <a:p>
+            <a:pPr>
+              <a:lnSpc>
+                <a:spcPct val="120000"/>
+              </a:lnSpc>
+              <a:spcAft>
+                <a:spcPts val="0"/>
+              </a:spcAft>
+              <a:defRPr sz="2250" b="0">
+                <a:solidFill>
+                  <a:srgbClr val="29263B"/>
+                </a:solidFill>
+                <a:latin typeface="Microsoft YaHei"/>
+                <a:ea typeface="Microsoft YaHei"/>
+                <a:cs typeface="Microsoft YaHei"/>
+              </a:defRPr>
+            </a:pPr>
+            <a:r>
+              <a:t>配置成功才会产生 CMakeCache 和编译数据库。首次顺序阅读时它们尚不存在，不要为了看到文件而跳过 P004 的 CMSIS。</a:t>
+            </a:r>
+          </a:p>
+        </p:txBody>
+      </p:sp>
+      <p:sp>
+        <p:nvSpPr>
+          <p:cNvPr id="6" name="Body 2"/>
+          <p:cNvSpPr>
+            <a:spLocks noGrp="1"/>
+          </p:cNvSpPr>
+          <p:nvPr/>
+        </p:nvSpPr>
+        <p:spPr>
+          <a:xfrm>
+            <a:off x="609600" y="3699510"/>
+            <a:ext cx="10972800" cy="792480"/>
+          </a:xfrm>
+          <a:prstGeom prst="rect">
+            <a:avLst/>
+          </a:prstGeom>
+          <a:noFill/>
+          <a:ln w="0">
+            <a:noFill/>
+          </a:ln>
+        </p:spPr>
+        <p:txBody>
+          <a:bodyPr lIns="0" tIns="0" rIns="0" bIns="0" anchor="t">
+            <a:noAutofit/>
+          </a:bodyPr>
+          <a:lstStyle>
+            <a:defPPr>
+              <a:defRPr sz="2250" b="0">
+                <a:solidFill>
+                  <a:srgbClr val="29263B"/>
+                </a:solidFill>
+                <a:latin typeface="Microsoft YaHei"/>
+                <a:ea typeface="Microsoft YaHei"/>
+                <a:cs typeface="Microsoft YaHei"/>
+              </a:defRPr>
+            </a:defPPr>
+          </a:lstStyle>
+          <a:p>
+            <a:pPr>
+              <a:lnSpc>
+                <a:spcPct val="120000"/>
+              </a:lnSpc>
+              <a:spcAft>
+                <a:spcPts val="0"/>
+              </a:spcAft>
+              <a:defRPr sz="2250" b="0">
+                <a:solidFill>
+                  <a:srgbClr val="29263B"/>
+                </a:solidFill>
+                <a:latin typeface="Microsoft YaHei"/>
+                <a:ea typeface="Microsoft YaHei"/>
+                <a:cs typeface="Microsoft YaHei"/>
+              </a:defRPr>
+            </a:pPr>
+            <a:r>
+              <a:t>P004 从芯片和 CPU 配置确定 CMSIS；P005 讲官方工程与驱动模型；P006 再取得 HC32 DDL 并接入模块。</a:t>
+            </a:r>
+          </a:p>
+        </p:txBody>
+      </p:sp>
+      <p:sp>
+        <p:nvSpPr>
+          <p:cNvPr id="7" name="Reading link"/>
+          <p:cNvSpPr>
+            <a:spLocks noGrp="1"/>
+          </p:cNvSpPr>
+          <p:nvPr/>
+        </p:nvSpPr>
+        <p:spPr>
+          <a:xfrm>
+            <a:off x="609600" y="6105525"/>
+            <a:ext cx="10972800" cy="257175"/>
+          </a:xfrm>
+          <a:prstGeom prst="rect">
+            <a:avLst/>
+          </a:prstGeom>
+          <a:noFill/>
+          <a:ln w="0">
+            <a:noFill/>
+          </a:ln>
+        </p:spPr>
+        <p:txBody>
+          <a:bodyPr lIns="0" tIns="0" rIns="0" bIns="0" anchor="t">
+            <a:noAutofit/>
+          </a:bodyPr>
+          <a:lstStyle>
+            <a:defPPr>
+              <a:defRPr sz="1275" b="0">
+                <a:solidFill>
+                  <a:srgbClr val="347D95"/>
+                </a:solidFill>
+                <a:latin typeface="Microsoft YaHei"/>
+                <a:ea typeface="Microsoft YaHei"/>
+                <a:cs typeface="Microsoft YaHei"/>
+              </a:defRPr>
+            </a:defPPr>
+          </a:lstStyle>
+          <a:p>
+            <a:pPr>
+              <a:lnSpc>
+                <a:spcPct val="120000"/>
+              </a:lnSpc>
+              <a:spcAft>
+                <a:spcPts val="0"/>
+              </a:spcAft>
+              <a:defRPr sz="1275" b="0">
+                <a:solidFill>
+                  <a:srgbClr val="347D95"/>
+                </a:solidFill>
+                <a:latin typeface="Microsoft YaHei"/>
+                <a:ea typeface="Microsoft YaHei"/>
+                <a:cs typeface="Microsoft YaHei"/>
+              </a:defRPr>
+            </a:pPr>
+            <a:r>
+              <a:rPr>
+                <a:solidFill>
+                  <a:srgbClr val="347D95"/>
+                </a:solidFill>
+                <a:ea typeface="Microsoft YaHei"/>
+                <a:hlinkClick r:id="rIdReading"/>
+              </a:rPr>
+              <a:t>完整解释与操作：配套 Markdown P003 3.5</a:t>
+            </a:r>
+          </a:p>
+        </p:txBody>
+      </p:sp>
+      <p:sp>
+        <p:nvSpPr>
+          <p:cNvPr id="8" name="PageNumber"/>
+          <p:cNvSpPr>
+            <a:spLocks noGrp="1"/>
+          </p:cNvSpPr>
+          <p:nvPr/>
+        </p:nvSpPr>
+        <p:spPr>
+          <a:xfrm>
+            <a:off x="10858500" y="6438900"/>
+            <a:ext cx="723900" cy="266700"/>
+          </a:xfrm>
+          <a:prstGeom prst="rect">
+            <a:avLst/>
+          </a:prstGeom>
+          <a:noFill/>
+          <a:ln w="0">
+            <a:noFill/>
+          </a:ln>
+        </p:spPr>
+        <p:txBody>
+          <a:bodyPr lIns="0" tIns="0" rIns="0" bIns="0" anchor="ctr">
+            <a:noAutofit/>
+          </a:bodyPr>
+          <a:lstStyle>
+            <a:defPPr algn="r">
+              <a:defRPr sz="1350">
+                <a:solidFill>
+                  <a:srgbClr val="646173"/>
+                </a:solidFill>
+                <a:latin typeface="Microsoft YaHei"/>
+                <a:ea typeface="Microsoft YaHei"/>
+                <a:cs typeface="Microsoft YaHei"/>
+              </a:defRPr>
+            </a:defPPr>
+          </a:lstStyle>
+          <a:p>
+            <a:pPr algn="r">
+              <a:lnSpc>
+                <a:spcPct val="120000"/>
+              </a:lnSpc>
+              <a:defRPr sz="1350">
+                <a:solidFill>
+                  <a:srgbClr val="646173"/>
+                </a:solidFill>
+                <a:latin typeface="Microsoft YaHei"/>
+                <a:ea typeface="Microsoft YaHei"/>
+                <a:cs typeface="Microsoft YaHei"/>
+              </a:defRPr>
+            </a:pPr>
+            <a:fld id="{A6D60AA6-094F-45B6-9EA1-0DDA696087E0}" type="slidenum">
+              <a:rPr sz="1350">
+                <a:solidFill>
+                  <a:srgbClr val="646173"/>
+                </a:solidFill>
+                <a:latin typeface="Microsoft YaHei"/>
+                <a:ea typeface="Microsoft YaHei"/>
+                <a:cs typeface="Microsoft YaHei"/>
+              </a:rPr>
+              <a:t>28</a:t>
+            </a:fld>
+            <a:endParaRPr sz="1350">
+              <a:solidFill>
+                <a:srgbClr val="646173"/>
+              </a:solidFill>
+              <a:latin typeface="Microsoft YaHei"/>
+              <a:ea typeface="Microsoft YaHei"/>
+              <a:cs typeface="Microsoft YaHei"/>
+            </a:endParaRPr>
+          </a:p>
+        </p:txBody>
+      </p:sp>
+    </p:spTree>
+  </p:cSld>
+  <p:clrMapOvr>
+    <a:masterClrMapping/>
+  </p:clrMapOvr>
+</p:sld>
+</file>
+
 <file path=ppt/slides/slide1.xml><?xml version="1.0" encoding="utf-8"?>
 <p:sld xmlns:a="http://schemas.openxmlformats.org/drawingml/2006/main" xmlns:r="http://schemas.openxmlformats.org/officeDocument/2006/relationships" xmlns:p="http://schemas.openxmlformats.org/presentationml/2006/main">
   <p:cSld>
@@ -24583,7 +25815,7 @@
                 <a:cs typeface="Microsoft YaHei"/>
               </a:defRPr>
             </a:pPr>
-            <a:fld id="{75B848E0-9682-403C-9CB3-292C512CADED}" type="slidenum">
+            <a:fld id="{CDF7DEAC-6531-4C86-B841-15A5A7A205E3}" type="slidenum">
               <a:rPr sz="1350">
                 <a:solidFill>
                   <a:srgbClr val="646173"/>
@@ -24592,7 +25824,7 @@
                 <a:ea typeface="Microsoft YaHei"/>
                 <a:cs typeface="Microsoft YaHei"/>
               </a:rPr>
-              <a:t>10</a:t>
+              <a:t>11</a:t>
             </a:fld>
             <a:endParaRPr sz="1350">
               <a:solidFill>
@@ -25652,7 +26884,7 @@
                 <a:cs typeface="Microsoft YaHei"/>
               </a:defRPr>
             </a:pPr>
-            <a:fld id="{75B848E0-9682-403C-9CB3-292C512CADED}" type="slidenum">
+            <a:fld id="{28E6C678-ED3E-4E6A-BEA4-3A326ABC4B22}" type="slidenum">
               <a:rPr sz="1350">
                 <a:solidFill>
                   <a:srgbClr val="646173"/>
@@ -25661,7 +26893,7 @@
                 <a:ea typeface="Microsoft YaHei"/>
                 <a:cs typeface="Microsoft YaHei"/>
               </a:rPr>
-              <a:t>11</a:t>
+              <a:t>12</a:t>
             </a:fld>
             <a:endParaRPr sz="1350">
               <a:solidFill>
@@ -26831,7 +28063,7 @@
                 <a:cs typeface="Microsoft YaHei"/>
               </a:defRPr>
             </a:pPr>
-            <a:fld id="{75B848E0-9682-403C-9CB3-292C512CADED}" type="slidenum">
+            <a:fld id="{B62507FE-0CFD-4347-906E-476DCC805DB7}" type="slidenum">
               <a:rPr sz="1350">
                 <a:solidFill>
                   <a:srgbClr val="646173"/>
@@ -26840,7 +28072,7 @@
                 <a:ea typeface="Microsoft YaHei"/>
                 <a:cs typeface="Microsoft YaHei"/>
               </a:rPr>
-              <a:t>12</a:t>
+              <a:t>13</a:t>
             </a:fld>
             <a:endParaRPr sz="1350">
               <a:solidFill>
@@ -27657,7 +28889,7 @@
                 <a:cs typeface="Microsoft YaHei"/>
               </a:defRPr>
             </a:pPr>
-            <a:fld id="{75B848E0-9682-403C-9CB3-292C512CADED}" type="slidenum">
+            <a:fld id="{0B5CD67C-6067-4079-9794-E94E37653C51}" type="slidenum">
               <a:rPr sz="1350">
                 <a:solidFill>
                   <a:srgbClr val="646173"/>
@@ -27666,7 +28898,7 @@
                 <a:ea typeface="Microsoft YaHei"/>
                 <a:cs typeface="Microsoft YaHei"/>
               </a:rPr>
-              <a:t>13</a:t>
+              <a:t>14</a:t>
             </a:fld>
             <a:endParaRPr sz="1350">
               <a:solidFill>
@@ -28676,7 +29908,7 @@
                 <a:cs typeface="Microsoft YaHei"/>
               </a:defRPr>
             </a:pPr>
-            <a:fld id="{75B848E0-9682-403C-9CB3-292C512CADED}" type="slidenum">
+            <a:fld id="{729A3AEC-CC3A-41EC-82C5-F4697F1DFA32}" type="slidenum">
               <a:rPr sz="1350">
                 <a:solidFill>
                   <a:srgbClr val="646173"/>
@@ -28685,7 +29917,7 @@
                 <a:ea typeface="Microsoft YaHei"/>
                 <a:cs typeface="Microsoft YaHei"/>
               </a:rPr>
-              <a:t>14</a:t>
+              <a:t>15</a:t>
             </a:fld>
             <a:endParaRPr sz="1350">
               <a:solidFill>
@@ -29576,7 +30808,7 @@
                 <a:cs typeface="Microsoft YaHei"/>
               </a:defRPr>
             </a:pPr>
-            <a:fld id="{75B848E0-9682-403C-9CB3-292C512CADED}" type="slidenum">
+            <a:fld id="{E5E61DE3-ACE4-4A7E-A8D9-4AEC0F549D2F}" type="slidenum">
               <a:rPr sz="1350">
                 <a:solidFill>
                   <a:srgbClr val="646173"/>
@@ -29585,7 +30817,7 @@
                 <a:ea typeface="Microsoft YaHei"/>
                 <a:cs typeface="Microsoft YaHei"/>
               </a:rPr>
-              <a:t>15</a:t>
+              <a:t>16</a:t>
             </a:fld>
             <a:endParaRPr sz="1350">
               <a:solidFill>
@@ -30710,7 +31942,7 @@
                 <a:cs typeface="Microsoft YaHei"/>
               </a:defRPr>
             </a:pPr>
-            <a:fld id="{75B848E0-9682-403C-9CB3-292C512CADED}" type="slidenum">
+            <a:fld id="{263A34F6-762C-4232-B83A-B6F1E33874CC}" type="slidenum">
               <a:rPr sz="1350">
                 <a:solidFill>
                   <a:srgbClr val="646173"/>
@@ -30719,7 +31951,7 @@
                 <a:ea typeface="Microsoft YaHei"/>
                 <a:cs typeface="Microsoft YaHei"/>
               </a:rPr>
-              <a:t>16</a:t>
+              <a:t>17</a:t>
             </a:fld>
             <a:endParaRPr sz="1350">
               <a:solidFill>
@@ -31659,7 +32891,7 @@
                 <a:cs typeface="Microsoft YaHei"/>
               </a:defRPr>
             </a:pPr>
-            <a:fld id="{75B848E0-9682-403C-9CB3-292C512CADED}" type="slidenum">
+            <a:fld id="{916441CD-1952-47F9-9F02-0A30A22DBA0B}" type="slidenum">
               <a:rPr sz="1350">
                 <a:solidFill>
                   <a:srgbClr val="646173"/>
@@ -31668,7 +32900,7 @@
                 <a:ea typeface="Microsoft YaHei"/>
                 <a:cs typeface="Microsoft YaHei"/>
               </a:rPr>
-              <a:t>17</a:t>
+              <a:t>18</a:t>
             </a:fld>
             <a:endParaRPr sz="1350">
               <a:solidFill>
@@ -32230,7 +33462,7 @@
             </a:pPr>
             <a:r>
               <a:rPr/>
-              <a:t>已有构建缓存会保留上次选择，换 SDK 时使用新构建目录或按 P010 更新缓存。</a:t>
+              <a:t>已有构建缓存会保留上次选择，换 SDK 时使用新构建目录或按 P011 更新缓存。</a:t>
             </a:r>
           </a:p>
         </p:txBody>
@@ -32538,7 +33770,7 @@
                 <a:cs typeface="Microsoft YaHei"/>
               </a:defRPr>
             </a:pPr>
-            <a:fld id="{75B848E0-9682-403C-9CB3-292C512CADED}" type="slidenum">
+            <a:fld id="{51FACB26-4C5F-4120-B95A-2405D2833C0A}" type="slidenum">
               <a:rPr sz="1350">
                 <a:solidFill>
                   <a:srgbClr val="646173"/>
@@ -32547,7 +33779,7 @@
                 <a:ea typeface="Microsoft YaHei"/>
                 <a:cs typeface="Microsoft YaHei"/>
               </a:rPr>
-              <a:t>18</a:t>
+              <a:t>19</a:t>
             </a:fld>
             <a:endParaRPr sz="1350">
               <a:solidFill>
@@ -32796,23 +34028,7 @@
                   <a:srgbClr val="646173"/>
                 </a:solidFill>
               </a:rPr>
-              <a:t># Windows UCRT64；完成 P002—P005 </a:t>
-            </a:r>
-            <a:r>
-              <a:rPr dirty="0" err="1">
-                <a:solidFill>
-                  <a:srgbClr val="646173"/>
-                </a:solidFill>
-              </a:rPr>
-              <a:t>后执行；新构建目录</a:t>
-            </a:r>
-            <a:r>
-              <a:rPr dirty="0">
-                <a:solidFill>
-                  <a:srgbClr val="646173"/>
-                </a:solidFill>
-              </a:rPr>
-              <a:t>。</a:t>
+              <a:t># Windows UCRT64；完成 P002—P005 后执行；新构建目录。</a:t>
             </a:r>
           </a:p>
           <a:p>
@@ -32854,23 +34070,7 @@
                   <a:srgbClr val="0070C0"/>
                 </a:solidFill>
               </a:rPr>
-              <a:t>/g/</a:t>
-            </a:r>
-            <a:r>
-              <a:rPr dirty="0" err="1">
-                <a:solidFill>
-                  <a:srgbClr val="0070C0"/>
-                </a:solidFill>
-              </a:rPr>
-              <a:t>zephyr_practice</a:t>
-            </a:r>
-            <a:r>
-              <a:rPr dirty="0">
-                <a:solidFill>
-                  <a:srgbClr val="0070C0"/>
-                </a:solidFill>
-              </a:rPr>
-              <a:t>/zephyr-main</a:t>
+              <a:t>/g/zephyr_practice/zephyr-main</a:t>
             </a:r>
           </a:p>
           <a:p>
@@ -32904,31 +34104,7 @@
                   <a:srgbClr val="29263B"/>
                 </a:solidFill>
               </a:rPr>
-              <a:t> </a:t>
-            </a:r>
-            <a:r>
-              <a:rPr dirty="0">
-                <a:solidFill>
-                  <a:srgbClr val="0070C0"/>
-                </a:solidFill>
-              </a:rPr>
-              <a:t>.</a:t>
-            </a:r>
-            <a:r>
-              <a:rPr dirty="0" err="1">
-                <a:solidFill>
-                  <a:srgbClr val="0070C0"/>
-                </a:solidFill>
-              </a:rPr>
-              <a:t>venv</a:t>
-            </a:r>
-            <a:r>
-              <a:rPr dirty="0">
-                <a:solidFill>
-                  <a:srgbClr val="0070C0"/>
-                </a:solidFill>
-              </a:rPr>
-              <a:t>/Scripts/activate</a:t>
+              <a:t> .venv/Scripts/activate</a:t>
             </a:r>
           </a:p>
           <a:p>
@@ -32949,7 +34125,7 @@
               </a:defRPr>
             </a:pPr>
             <a:r>
-              <a:rPr dirty="0" err="1">
+              <a:rPr dirty="0">
                 <a:solidFill>
                   <a:srgbClr val="A02B93"/>
                 </a:solidFill>
@@ -32962,15 +34138,15 @@
                   <a:srgbClr val="29263B"/>
                 </a:solidFill>
               </a:rPr>
-              <a:t> </a:t>
+              <a:t> -S </a:t>
             </a:r>
             <a:r>
               <a:rPr dirty="0">
                 <a:solidFill>
-                  <a:srgbClr val="B84E00"/>
-                </a:solidFill>
-              </a:rPr>
-              <a:t>-S</a:t>
+                  <a:srgbClr val="0070C0"/>
+                </a:solidFill>
+              </a:rPr>
+              <a:t>samples/hello_world</a:t>
             </a:r>
             <a:r>
               <a:rPr dirty="0">
@@ -32978,7 +34154,7 @@
                   <a:srgbClr val="29263B"/>
                 </a:solidFill>
               </a:rPr>
-              <a:t> </a:t>
+              <a:t> -B </a:t>
             </a:r>
             <a:r>
               <a:rPr dirty="0">
@@ -32986,63 +34162,7 @@
                   <a:srgbClr val="0070C0"/>
                 </a:solidFill>
               </a:rPr>
-              <a:t>samples/</a:t>
-            </a:r>
-            <a:r>
-              <a:rPr dirty="0" err="1">
-                <a:solidFill>
-                  <a:srgbClr val="0070C0"/>
-                </a:solidFill>
-              </a:rPr>
-              <a:t>hello_world</a:t>
-            </a:r>
-            <a:r>
-              <a:rPr dirty="0">
-                <a:solidFill>
-                  <a:srgbClr val="29263B"/>
-                </a:solidFill>
-              </a:rPr>
-              <a:t> </a:t>
-            </a:r>
-            <a:r>
-              <a:rPr dirty="0">
-                <a:solidFill>
-                  <a:srgbClr val="B84E00"/>
-                </a:solidFill>
-              </a:rPr>
-              <a:t>-B</a:t>
-            </a:r>
-            <a:r>
-              <a:rPr dirty="0">
-                <a:solidFill>
-                  <a:srgbClr val="29263B"/>
-                </a:solidFill>
-              </a:rPr>
-              <a:t> </a:t>
-            </a:r>
-            <a:r>
-              <a:rPr dirty="0">
-                <a:solidFill>
-                  <a:srgbClr val="0070C0"/>
-                </a:solidFill>
-              </a:rPr>
-              <a:t>build/learning-tools/p003/</a:t>
-            </a:r>
-            <a:r>
-              <a:rPr dirty="0" err="1">
-                <a:solidFill>
-                  <a:srgbClr val="0070C0"/>
-                </a:solidFill>
-              </a:rPr>
-              <a:t>sdk</a:t>
-            </a:r>
-            <a:r>
-              <a:rPr dirty="0">
-                <a:solidFill>
-                  <a:srgbClr val="0070C0"/>
-                </a:solidFill>
-              </a:rPr>
-              <a:t>-explicit</a:t>
+              <a:t>build/learning-tools/p003/sdk-explicit</a:t>
             </a:r>
             <a:r>
               <a:rPr dirty="0">
@@ -33076,63 +34196,7 @@
                   <a:srgbClr val="29263B"/>
                 </a:solidFill>
               </a:rPr>
-              <a:t>  </a:t>
-            </a:r>
-            <a:r>
-              <a:rPr dirty="0">
-                <a:solidFill>
-                  <a:srgbClr val="B84E00"/>
-                </a:solidFill>
-              </a:rPr>
-              <a:t>-G</a:t>
-            </a:r>
-            <a:r>
-              <a:rPr dirty="0">
-                <a:solidFill>
-                  <a:srgbClr val="29263B"/>
-                </a:solidFill>
-              </a:rPr>
-              <a:t> Ninja </a:t>
-            </a:r>
-            <a:r>
-              <a:rPr dirty="0">
-                <a:solidFill>
-                  <a:srgbClr val="B84E00"/>
-                </a:solidFill>
-              </a:rPr>
-              <a:t>-D</a:t>
-            </a:r>
-            <a:r>
-              <a:rPr dirty="0">
-                <a:solidFill>
-                  <a:srgbClr val="B84E00"/>
-                </a:solidFill>
-              </a:rPr>
-              <a:t>BOARD</a:t>
-            </a:r>
-            <a:r>
-              <a:rPr dirty="0">
-                <a:solidFill>
-                  <a:srgbClr val="29263B"/>
-                </a:solidFill>
-              </a:rPr>
-              <a:t>=</a:t>
-            </a:r>
-            <a:r>
-              <a:rPr dirty="0">
-                <a:solidFill>
-                  <a:srgbClr val="29263B"/>
-                </a:solidFill>
-              </a:rPr>
-              <a:t>mps2/an386</a:t>
-            </a:r>
-            <a:r>
-              <a:rPr dirty="0">
-                <a:solidFill>
-                  <a:srgbClr val="29263B"/>
-                </a:solidFill>
-              </a:rPr>
-              <a:t> \</a:t>
+              <a:t>  -G Ninja -DBOARD=mps2/an386 \</a:t>
             </a:r>
           </a:p>
           <a:p>
@@ -33158,100 +34222,12 @@
                   <a:srgbClr val="29263B"/>
                 </a:solidFill>
               </a:rPr>
-              <a:t>  "</a:t>
+              <a:t>  "-DZephyr_DIR=$(cygpath -m "$PWD")/share/zephyr-package/</a:t>
             </a:r>
             <a:r>
               <a:rPr dirty="0">
                 <a:solidFill>
-                  <a:srgbClr val="B84E00"/>
-                </a:solidFill>
-              </a:rPr>
-              <a:t>-</a:t>
-            </a:r>
-            <a:r>
-              <a:rPr dirty="0" err="1">
-                <a:solidFill>
-                  <a:srgbClr val="B84E00"/>
-                </a:solidFill>
-              </a:rPr>
-              <a:t>D</a:t>
-            </a:r>
-            <a:r>
-              <a:rPr dirty="0" err="1">
-                <a:solidFill>
-                  <a:srgbClr val="B84E00"/>
-                </a:solidFill>
-              </a:rPr>
-              <a:t>Zephyr_DIR</a:t>
-            </a:r>
-            <a:r>
-              <a:rPr dirty="0">
-                <a:solidFill>
-                  <a:srgbClr val="29263B"/>
-                </a:solidFill>
-              </a:rPr>
-              <a:t>=$(</a:t>
-            </a:r>
-            <a:r>
-              <a:rPr dirty="0" err="1">
-                <a:solidFill>
                   <a:srgbClr val="A02B93"/>
-                </a:solidFill>
-              </a:rPr>
-              <a:t>cygpath</a:t>
-            </a:r>
-            <a:r>
-              <a:rPr dirty="0">
-                <a:solidFill>
-                  <a:srgbClr val="29263B"/>
-                </a:solidFill>
-              </a:rPr>
-              <a:t> </a:t>
-            </a:r>
-            <a:r>
-              <a:rPr dirty="0">
-                <a:solidFill>
-                  <a:srgbClr val="B84E00"/>
-                </a:solidFill>
-              </a:rPr>
-              <a:t>-m</a:t>
-            </a:r>
-            <a:r>
-              <a:rPr dirty="0">
-                <a:solidFill>
-                  <a:srgbClr val="29263B"/>
-                </a:solidFill>
-              </a:rPr>
-              <a:t> "</a:t>
-            </a:r>
-            <a:r>
-              <a:rPr dirty="0">
-                <a:solidFill>
-                  <a:srgbClr val="B84E00"/>
-                </a:solidFill>
-              </a:rPr>
-              <a:t>$PWD</a:t>
-            </a:r>
-            <a:r>
-              <a:rPr dirty="0">
-                <a:solidFill>
-                  <a:srgbClr val="29263B"/>
-                </a:solidFill>
-              </a:rPr>
-              <a:t>")</a:t>
-            </a:r>
-            <a:r>
-              <a:rPr dirty="0">
-                <a:solidFill>
-                  <a:srgbClr val="29263B"/>
-                </a:solidFill>
-              </a:rPr>
-              <a:t>/share/zephyr-package/</a:t>
-            </a:r>
-            <a:r>
-              <a:rPr dirty="0" err="1">
-                <a:solidFill>
-                  <a:srgbClr val="29263B"/>
                 </a:solidFill>
               </a:rPr>
               <a:t>cmake</a:t>
@@ -33288,95 +34264,7 @@
                   <a:srgbClr val="29263B"/>
                 </a:solidFill>
               </a:rPr>
-              <a:t>  "</a:t>
-            </a:r>
-            <a:r>
-              <a:rPr dirty="0">
-                <a:solidFill>
-                  <a:srgbClr val="B84E00"/>
-                </a:solidFill>
-              </a:rPr>
-              <a:t>-D</a:t>
-            </a:r>
-            <a:r>
-              <a:rPr dirty="0">
-                <a:solidFill>
-                  <a:srgbClr val="B84E00"/>
-                </a:solidFill>
-              </a:rPr>
-              <a:t>Python3_EXECUTABLE</a:t>
-            </a:r>
-            <a:r>
-              <a:rPr dirty="0">
-                <a:solidFill>
-                  <a:srgbClr val="29263B"/>
-                </a:solidFill>
-              </a:rPr>
-              <a:t>=$(</a:t>
-            </a:r>
-            <a:r>
-              <a:rPr dirty="0" err="1">
-                <a:solidFill>
-                  <a:srgbClr val="A02B93"/>
-                </a:solidFill>
-              </a:rPr>
-              <a:t>cygpath</a:t>
-            </a:r>
-            <a:r>
-              <a:rPr dirty="0">
-                <a:solidFill>
-                  <a:srgbClr val="29263B"/>
-                </a:solidFill>
-              </a:rPr>
-              <a:t> </a:t>
-            </a:r>
-            <a:r>
-              <a:rPr dirty="0">
-                <a:solidFill>
-                  <a:srgbClr val="B84E00"/>
-                </a:solidFill>
-              </a:rPr>
-              <a:t>-m</a:t>
-            </a:r>
-            <a:r>
-              <a:rPr dirty="0">
-                <a:solidFill>
-                  <a:srgbClr val="29263B"/>
-                </a:solidFill>
-              </a:rPr>
-              <a:t> "$(</a:t>
-            </a:r>
-            <a:r>
-              <a:rPr dirty="0">
-                <a:solidFill>
-                  <a:srgbClr val="A02B93"/>
-                </a:solidFill>
-              </a:rPr>
-              <a:t>command</a:t>
-            </a:r>
-            <a:r>
-              <a:rPr dirty="0">
-                <a:solidFill>
-                  <a:srgbClr val="29263B"/>
-                </a:solidFill>
-              </a:rPr>
-              <a:t> </a:t>
-            </a:r>
-            <a:r>
-              <a:rPr dirty="0">
-                <a:solidFill>
-                  <a:srgbClr val="B84E00"/>
-                </a:solidFill>
-              </a:rPr>
-              <a:t>-v</a:t>
-            </a:r>
-            <a:r>
-              <a:rPr dirty="0">
-                <a:solidFill>
-                  <a:srgbClr val="29263B"/>
-                </a:solidFill>
-              </a:rPr>
-              <a:t> </a:t>
+              <a:t>  "-DPython3_EXECUTABLE=$(cygpath -m "$(command -v </a:t>
             </a:r>
             <a:r>
               <a:rPr dirty="0">
@@ -33418,31 +34306,7 @@
                   <a:srgbClr val="29263B"/>
                 </a:solidFill>
               </a:rPr>
-              <a:t>  </a:t>
-            </a:r>
-            <a:r>
-              <a:rPr dirty="0">
-                <a:solidFill>
-                  <a:srgbClr val="B84E00"/>
-                </a:solidFill>
-              </a:rPr>
-              <a:t>-D</a:t>
-            </a:r>
-            <a:r>
-              <a:rPr dirty="0">
-                <a:solidFill>
-                  <a:srgbClr val="B84E00"/>
-                </a:solidFill>
-              </a:rPr>
-              <a:t>ZEPHYR_SDK_INSTALL_DIR</a:t>
-            </a:r>
-            <a:r>
-              <a:rPr dirty="0">
-                <a:solidFill>
-                  <a:srgbClr val="29263B"/>
-                </a:solidFill>
-              </a:rPr>
-              <a:t>=</a:t>
+              <a:t>  -DZEPHYR_SDK_INSTALL_DIR=</a:t>
             </a:r>
             <a:r>
               <a:rPr dirty="0">
@@ -33484,138 +34348,7 @@
                   <a:srgbClr val="29263B"/>
                 </a:solidFill>
               </a:rPr>
-              <a:t>  </a:t>
-            </a:r>
-            <a:r>
-              <a:rPr dirty="0">
-                <a:solidFill>
-                  <a:srgbClr val="B84E00"/>
-                </a:solidFill>
-              </a:rPr>
-              <a:t>-D</a:t>
-            </a:r>
-            <a:r>
-              <a:rPr dirty="0">
-                <a:solidFill>
-                  <a:srgbClr val="B84E00"/>
-                </a:solidFill>
-              </a:rPr>
-              <a:t>CMAKE_EXPORT_COMPILE_COMMANDS</a:t>
-            </a:r>
-            <a:r>
-              <a:rPr dirty="0">
-                <a:solidFill>
-                  <a:srgbClr val="29263B"/>
-                </a:solidFill>
-              </a:rPr>
-              <a:t>=ON</a:t>
-            </a:r>
-            <a:br>
-              <a:rPr lang="en-US" dirty="0"/>
-            </a:br>
-            <a:r>
-              <a:rPr lang="en-US" altLang="zh-CN" dirty="0" err="1">
-                <a:solidFill>
-                  <a:srgbClr val="A02B93"/>
-                </a:solidFill>
-              </a:rPr>
-              <a:t>cmake</a:t>
-            </a:r>
-            <a:r>
-              <a:rPr lang="en-US" dirty="0">
-                <a:solidFill>
-                  <a:srgbClr val="29263B"/>
-                </a:solidFill>
-              </a:rPr>
-              <a:t> </a:t>
-            </a:r>
-            <a:r>
-              <a:rPr lang="en-US" dirty="0">
-                <a:solidFill>
-                  <a:srgbClr val="B84E00"/>
-                </a:solidFill>
-              </a:rPr>
-              <a:t>--build</a:t>
-            </a:r>
-            <a:r>
-              <a:rPr lang="en-US" dirty="0">
-                <a:solidFill>
-                  <a:srgbClr val="29263B"/>
-                </a:solidFill>
-              </a:rPr>
-              <a:t> </a:t>
-            </a:r>
-            <a:r>
-              <a:rPr lang="en-US" dirty="0">
-                <a:solidFill>
-                  <a:srgbClr val="0070C0"/>
-                </a:solidFill>
-              </a:rPr>
-              <a:t>build/learning-tools/p003/</a:t>
-            </a:r>
-            <a:r>
-              <a:rPr lang="en-US" dirty="0" err="1">
-                <a:solidFill>
-                  <a:srgbClr val="0070C0"/>
-                </a:solidFill>
-              </a:rPr>
-              <a:t>sdk</a:t>
-            </a:r>
-            <a:r>
-              <a:rPr lang="en-US" dirty="0">
-                <a:solidFill>
-                  <a:srgbClr val="0070C0"/>
-                </a:solidFill>
-              </a:rPr>
-              <a:t>-explicit</a:t>
-            </a:r>
-            <a:r>
-              <a:rPr lang="en-US" dirty="0">
-                <a:solidFill>
-                  <a:srgbClr val="29263B"/>
-                </a:solidFill>
-              </a:rPr>
-              <a:t> </a:t>
-            </a:r>
-            <a:r>
-              <a:rPr lang="en-US" dirty="0">
-                <a:solidFill>
-                  <a:srgbClr val="B84E00"/>
-                </a:solidFill>
-              </a:rPr>
-              <a:t>--parallel</a:t>
-            </a:r>
-            <a:r>
-              <a:rPr lang="en-US" dirty="0">
-                <a:solidFill>
-                  <a:srgbClr val="29263B"/>
-                </a:solidFill>
-              </a:rPr>
-              <a:t> </a:t>
-            </a:r>
-            <a:r>
-              <a:rPr lang="en-US" dirty="0">
-                <a:solidFill>
-                  <a:srgbClr val="29263B"/>
-                </a:solidFill>
-              </a:rPr>
-              <a:t>$(</a:t>
-            </a:r>
-            <a:r>
-              <a:rPr lang="en-US" dirty="0" err="1">
-                <a:solidFill>
-                  <a:srgbClr val="A02B93"/>
-                </a:solidFill>
-              </a:rPr>
-              <a:t>nproc</a:t>
-            </a:r>
-            <a:r>
-              <a:rPr lang="en-US" dirty="0">
-                <a:solidFill>
-                  <a:srgbClr val="29263B"/>
-                </a:solidFill>
-              </a:rPr>
-              <a:t>)</a:t>
+              <a:t>  -DCMAKE_EXPORT_COMPILE_COMMANDS=ON</a:t>
             </a:r>
           </a:p>
         </p:txBody>
@@ -33711,24 +34444,12 @@
               </a:defRPr>
             </a:pPr>
             <a:r>
-              <a:rPr dirty="0"/>
-              <a:t>本页展示接入口；P004—P005 </a:t>
-            </a:r>
-            <a:r>
-              <a:rPr dirty="0" err="1"/>
-              <a:t>依赖未齐时先不执行。配置成功应显示所选</a:t>
-            </a:r>
-            <a:r>
-              <a:rPr dirty="0"/>
-              <a:t> SDK </a:t>
-            </a:r>
-            <a:r>
-              <a:rPr dirty="0" err="1"/>
-              <a:t>路径</a:t>
-            </a:r>
-            <a:r>
-              <a:rPr dirty="0"/>
-              <a:t>。</a:t>
+              <a:rPr dirty="0">
+                <a:solidFill>
+                  <a:srgbClr val="29263B"/>
+                </a:solidFill>
+              </a:rPr>
+              <a:t>本页先认识 SDK 接入口；P004 取得 CMSIS，P005 核对 MPS2 工程输入后再配置。</a:t>
             </a:r>
           </a:p>
         </p:txBody>
@@ -33797,7 +34518,7 @@
               <a:rPr u="sng">
                 <a:hlinkClick r:id="rId3"/>
               </a:rPr>
-              <a:t>依据：官方 hello_world + mps2/an386；编译与运行见 P007</a:t>
+              <a:t>依据：官方 hello_world + mps2/an386；编译与运行见 P008</a:t>
             </a:r>
           </a:p>
         </p:txBody>
@@ -33997,7 +34718,7 @@
                 <a:cs typeface="Microsoft YaHei"/>
               </a:defRPr>
             </a:pPr>
-            <a:fld id="{75B848E0-9682-403C-9CB3-292C512CADED}" type="slidenum">
+            <a:fld id="{C2D55DDB-4DA1-49E3-B7C3-2207DA454EC3}" type="slidenum">
               <a:rPr sz="1350">
                 <a:solidFill>
                   <a:srgbClr val="646173"/>
@@ -34006,7 +34727,7 @@
                 <a:ea typeface="Microsoft YaHei"/>
                 <a:cs typeface="Microsoft YaHei"/>
               </a:rPr>
-              <a:t>19</a:t>
+              <a:t>20</a:t>
             </a:fld>
             <a:endParaRPr sz="1350">
               <a:solidFill>
@@ -34343,20 +35064,12 @@
               </a:defRPr>
             </a:pPr>
             <a:r>
-              <a:rPr/>
-              <a:t>前置：P002 的 CMake、7-Zip、Python 与 </a:t>
-            </a:r>
-            <a:r>
               <a:rPr>
                 <a:solidFill>
-                  <a:srgbClr val="0070C0"/>
-                </a:solidFill>
-              </a:rPr>
-              <a:t>.venv</a:t>
-            </a:r>
-            <a:r>
-              <a:rPr/>
-              <a:t>。</a:t>
+                  <a:srgbClr val="29263B"/>
+                </a:solidFill>
+              </a:rPr>
+              <a:t>主机工具已可用；接着为 hello_world + MPS2 准备 ARM 编译器。</a:t>
             </a:r>
           </a:p>
           <a:p>
@@ -34743,7 +35456,7 @@
             </a:r>
             <a:r>
               <a:rPr dirty="0"/>
-              <a:t>。编译、运行在 P007；独立工具链是可选分支。</a:t>
+              <a:t>。编译、运行在 P008；独立工具链是可选分支。</a:t>
             </a:r>
           </a:p>
         </p:txBody>
@@ -34981,7 +35694,7 @@
                 <a:cs typeface="Microsoft YaHei"/>
               </a:defRPr>
             </a:pPr>
-            <a:fld id="{75B848E0-9682-403C-9CB3-292C512CADED}" type="slidenum">
+            <a:fld id="{81C5696D-DFDD-4398-A4A4-47A18C241FAA}" type="slidenum">
               <a:rPr sz="1350">
                 <a:solidFill>
                   <a:srgbClr val="646173"/>
@@ -35786,7 +36499,7 @@
                 <a:cs typeface="Microsoft YaHei"/>
               </a:defRPr>
             </a:pPr>
-            <a:fld id="{75B848E0-9682-403C-9CB3-292C512CADED}" type="slidenum">
+            <a:fld id="{0AE461E4-CB21-41DC-A658-25EC360AE9B6}" type="slidenum">
               <a:rPr sz="1350">
                 <a:solidFill>
                   <a:srgbClr val="646173"/>
@@ -35795,7 +36508,7 @@
                 <a:ea typeface="Microsoft YaHei"/>
                 <a:cs typeface="Microsoft YaHei"/>
               </a:rPr>
-              <a:t>20</a:t>
+              <a:t>21</a:t>
             </a:fld>
             <a:endParaRPr sz="1350">
               <a:solidFill>
@@ -36680,7 +37393,7 @@
             </a:pPr>
             <a:r>
               <a:rPr/>
-              <a:t>HC32F4A0 为 Cortex-M4F，复用 ARM 工具链；板 / SoC 支持仍需 P011 新增。</a:t>
+              <a:t>HC32F4A0 为 Cortex-M4F，复用 ARM 工具链；板 / SoC 支持仍需 P012 新增。</a:t>
             </a:r>
           </a:p>
         </p:txBody>
@@ -36904,7 +37617,7 @@
                 <a:cs typeface="Microsoft YaHei"/>
               </a:defRPr>
             </a:pPr>
-            <a:fld id="{75B848E0-9682-403C-9CB3-292C512CADED}" type="slidenum">
+            <a:fld id="{C9E4052E-0A9D-49D6-8FE3-53F90A8040F6}" type="slidenum">
               <a:rPr sz="1350">
                 <a:solidFill>
                   <a:srgbClr val="646173"/>
@@ -36913,7 +37626,7 @@
                 <a:ea typeface="Microsoft YaHei"/>
                 <a:cs typeface="Microsoft YaHei"/>
               </a:rPr>
-              <a:t>21</a:t>
+              <a:t>22</a:t>
             </a:fld>
             <a:endParaRPr sz="1350">
               <a:solidFill>
@@ -37892,7 +38605,7 @@
                 <a:cs typeface="Microsoft YaHei"/>
               </a:defRPr>
             </a:pPr>
-            <a:fld id="{75B848E0-9682-403C-9CB3-292C512CADED}" type="slidenum">
+            <a:fld id="{66BEAD32-01B8-4144-82F6-13E302F592CF}" type="slidenum">
               <a:rPr sz="1350">
                 <a:solidFill>
                   <a:srgbClr val="646173"/>
@@ -37901,7 +38614,7 @@
                 <a:ea typeface="Microsoft YaHei"/>
                 <a:cs typeface="Microsoft YaHei"/>
               </a:rPr>
-              <a:t>22</a:t>
+              <a:t>23</a:t>
             </a:fld>
             <a:endParaRPr sz="1350">
               <a:solidFill>
@@ -39122,9 +39835,12 @@
             </a:pPr>
             <a:r>
               <a:rPr u="sng">
+                <a:solidFill>
+                  <a:srgbClr val="29263B"/>
+                </a:solidFill>
                 <a:hlinkClick r:id="rId3"/>
               </a:rPr>
-              <a:t>依据：主机工具仍需 P002；依赖仍需 P004—P005；运行见 P011</a:t>
+              <a:t>前提：主机工具 + 当前清单的 CMSIS；仍构建同一 MPS2，不追加 HC32 HAL。</a:t>
             </a:r>
           </a:p>
         </p:txBody>
@@ -39324,7 +40040,7 @@
                 <a:cs typeface="Microsoft YaHei"/>
               </a:defRPr>
             </a:pPr>
-            <a:fld id="{75B848E0-9682-403C-9CB3-292C512CADED}" type="slidenum">
+            <a:fld id="{952C96E1-C743-4B52-9600-10539B75187B}" type="slidenum">
               <a:rPr sz="1350">
                 <a:solidFill>
                   <a:srgbClr val="646173"/>
@@ -39333,7 +40049,7 @@
                 <a:ea typeface="Microsoft YaHei"/>
                 <a:cs typeface="Microsoft YaHei"/>
               </a:rPr>
-              <a:t>23</a:t>
+              <a:t>24</a:t>
             </a:fld>
             <a:endParaRPr sz="1350">
               <a:solidFill>
@@ -39582,7 +40298,7 @@
                   <a:srgbClr val="646173"/>
                 </a:solidFill>
               </a:rPr>
-              <a:t># Windows UCRT64；先完成第 19 页的 CMake 配置，才有这些产物。</a:t>
+              <a:t># Windows UCRT64；依赖齐全且 3.3.4 配置成功后，才有这些产物。</a:t>
             </a:r>
           </a:p>
           <a:p>
@@ -40019,7 +40735,7 @@
               <a:rPr u="sng">
                 <a:hlinkClick r:id="rId3"/>
               </a:rPr>
-              <a:t> 目录产物；编译日志和产物在 P007 继续核验</a:t>
+              <a:t> 目录产物；编译日志和产物在 P008 继续核验</a:t>
             </a:r>
           </a:p>
         </p:txBody>
@@ -40219,7 +40935,7 @@
                 <a:cs typeface="Microsoft YaHei"/>
               </a:defRPr>
             </a:pPr>
-            <a:fld id="{75B848E0-9682-403C-9CB3-292C512CADED}" type="slidenum">
+            <a:fld id="{009E6B3E-E1DB-446A-8B3C-8542B55C3949}" type="slidenum">
               <a:rPr sz="1350">
                 <a:solidFill>
                   <a:srgbClr val="646173"/>
@@ -40228,7 +40944,7 @@
                 <a:ea typeface="Microsoft YaHei"/>
                 <a:cs typeface="Microsoft YaHei"/>
               </a:rPr>
-              <a:t>24</a:t>
+              <a:t>25</a:t>
             </a:fld>
             <a:endParaRPr sz="1350">
               <a:solidFill>
@@ -41074,7 +41790,7 @@
                           <a:ea typeface="Microsoft YaHei"/>
                           <a:cs typeface="Microsoft YaHei"/>
                         </a:rPr>
-                        <a:t>P010</a:t>
+                        <a:t>P011</a:t>
                       </a:r>
                     </a:p>
                   </a:txBody>
@@ -41311,7 +42027,7 @@
                 <a:cs typeface="Microsoft YaHei"/>
               </a:defRPr>
             </a:pPr>
-            <a:fld id="{75B848E0-9682-403C-9CB3-292C512CADED}" type="slidenum">
+            <a:fld id="{2FBFCA21-95D0-4B68-BA46-3D5C7AB077FE}" type="slidenum">
               <a:rPr sz="1350">
                 <a:solidFill>
                   <a:srgbClr val="646173"/>
@@ -41320,7 +42036,7 @@
                 <a:ea typeface="Microsoft YaHei"/>
                 <a:cs typeface="Microsoft YaHei"/>
               </a:rPr>
-              <a:t>25</a:t>
+              <a:t>26</a:t>
             </a:fld>
             <a:endParaRPr sz="1350">
               <a:solidFill>
@@ -41867,8 +42583,12 @@
               </a:defRPr>
             </a:pPr>
             <a:r>
-              <a:rPr/>
-              <a:t>P004 下载 CMSIS / HAL</a:t>
+              <a:rPr>
+                <a:solidFill>
+                  <a:srgbClr val="29263B"/>
+                </a:solidFill>
+              </a:rPr>
+              <a:t>P004 按芯片查 CMSIS 并下载</a:t>
             </a:r>
           </a:p>
         </p:txBody>
@@ -41939,7 +42659,7 @@
             </a:pPr>
             <a:r>
               <a:rPr/>
-              <a:t>P005 源码模块接入</a:t>
+              <a:t>P005 驱动模型（HC32 见 P006）</a:t>
             </a:r>
           </a:p>
         </p:txBody>
@@ -42010,7 +42730,7 @@
             </a:pPr>
             <a:r>
               <a:rPr/>
-              <a:t>P007 配置与编译</a:t>
+              <a:t>P008 配置与编译</a:t>
             </a:r>
           </a:p>
         </p:txBody>
@@ -42076,8 +42796,12 @@
               </a:defRPr>
             </a:pPr>
             <a:r>
-              <a:rPr/>
-              <a:t>P006 讲 CMake 基础；P009 / P010 展开接口与缓存。</a:t>
+              <a:rPr>
+                <a:solidFill>
+                  <a:srgbClr val="29263B"/>
+                </a:solidFill>
+              </a:rPr>
+              <a:t>MPS2 的板/SoC/驱动随主仓取得；HC32 迁移时再追加厂商库与适配。</a:t>
             </a:r>
           </a:p>
           <a:p>
@@ -42242,7 +42966,7 @@
                 <a:cs typeface="Microsoft YaHei"/>
               </a:defRPr>
             </a:pPr>
-            <a:fld id="{75B848E0-9682-403C-9CB3-292C512CADED}" type="slidenum">
+            <a:fld id="{C3FBEB46-50C7-4E8A-B4C8-9CA4D2AEE536}" type="slidenum">
               <a:rPr sz="1350">
                 <a:solidFill>
                   <a:srgbClr val="646173"/>
@@ -42251,7 +42975,7 @@
                 <a:ea typeface="Microsoft YaHei"/>
                 <a:cs typeface="Microsoft YaHei"/>
               </a:rPr>
-              <a:t>26</a:t>
+              <a:t>27</a:t>
             </a:fld>
             <a:endParaRPr sz="1350">
               <a:solidFill>
@@ -43198,7 +43922,7 @@
                 <a:cs typeface="Microsoft YaHei"/>
               </a:defRPr>
             </a:pPr>
-            <a:fld id="{75B848E0-9682-403C-9CB3-292C512CADED}" type="slidenum">
+            <a:fld id="{DFDC2788-8339-4EA7-92A4-C663A3D31292}" type="slidenum">
               <a:rPr sz="1350">
                 <a:solidFill>
                   <a:srgbClr val="646173"/>
@@ -43207,7 +43931,7 @@
                 <a:ea typeface="Microsoft YaHei"/>
                 <a:cs typeface="Microsoft YaHei"/>
               </a:rPr>
-              <a:t>3</a:t>
+              <a:t>4</a:t>
             </a:fld>
             <a:endParaRPr sz="1350">
               <a:solidFill>
@@ -44041,7 +44765,7 @@
                 <a:cs typeface="Microsoft YaHei"/>
               </a:defRPr>
             </a:pPr>
-            <a:fld id="{75B848E0-9682-403C-9CB3-292C512CADED}" type="slidenum">
+            <a:fld id="{B3812B1F-73B8-44C1-8B46-48D7368E8123}" type="slidenum">
               <a:rPr sz="1350">
                 <a:solidFill>
                   <a:srgbClr val="646173"/>
@@ -44050,7 +44774,7 @@
                 <a:ea typeface="Microsoft YaHei"/>
                 <a:cs typeface="Microsoft YaHei"/>
               </a:rPr>
-              <a:t>4</a:t>
+              <a:t>5</a:t>
             </a:fld>
             <a:endParaRPr sz="1350">
               <a:solidFill>
@@ -44939,7 +45663,7 @@
                 <a:cs typeface="Microsoft YaHei"/>
               </a:defRPr>
             </a:pPr>
-            <a:fld id="{F2FB6E41-9875-48AC-AE64-422E4821BA46}" type="slidenum">
+            <a:fld id="{AADA380B-1B25-4184-991A-534F268141B4}" type="slidenum">
               <a:rPr sz="1350">
                 <a:solidFill>
                   <a:srgbClr val="646173"/>
@@ -44948,7 +45672,7 @@
                 <a:ea typeface="Microsoft YaHei"/>
                 <a:cs typeface="Microsoft YaHei"/>
               </a:rPr>
-              <a:t>5</a:t>
+              <a:t>6</a:t>
             </a:fld>
             <a:endParaRPr sz="1350">
               <a:solidFill>
@@ -46324,7 +47048,7 @@
                 <a:cs typeface="Microsoft YaHei"/>
               </a:defRPr>
             </a:pPr>
-            <a:fld id="{C4A71D6F-17D1-424B-BF67-6917C05691D6}" type="slidenum">
+            <a:fld id="{CF85D9F6-9C28-4CAC-A4A1-3FC586F2426C}" type="slidenum">
               <a:rPr sz="1350">
                 <a:solidFill>
                   <a:srgbClr val="646173"/>
@@ -46333,7 +47057,7 @@
                 <a:ea typeface="Microsoft YaHei"/>
                 <a:cs typeface="Microsoft YaHei"/>
               </a:rPr>
-              <a:t>6</a:t>
+              <a:t>7</a:t>
             </a:fld>
             <a:endParaRPr sz="1350">
               <a:solidFill>
@@ -47276,7 +48000,7 @@
                 <a:cs typeface="Microsoft YaHei"/>
               </a:defRPr>
             </a:pPr>
-            <a:fld id="{75B848E0-9682-403C-9CB3-292C512CADED}" type="slidenum">
+            <a:fld id="{43BA0F32-12FA-47AD-AF6B-CC7D64D578F3}" type="slidenum">
               <a:rPr sz="1350">
                 <a:solidFill>
                   <a:srgbClr val="646173"/>
@@ -47285,7 +48009,7 @@
                 <a:ea typeface="Microsoft YaHei"/>
                 <a:cs typeface="Microsoft YaHei"/>
               </a:rPr>
-              <a:t>7</a:t>
+              <a:t>8</a:t>
             </a:fld>
             <a:endParaRPr sz="1350">
               <a:solidFill>
@@ -48062,7 +48786,7 @@
                 <a:cs typeface="Microsoft YaHei"/>
               </a:defRPr>
             </a:pPr>
-            <a:fld id="{75B848E0-9682-403C-9CB3-292C512CADED}" type="slidenum">
+            <a:fld id="{B2E448FB-BC47-4AFB-9CB5-65C0E8BE6E4B}" type="slidenum">
               <a:rPr sz="1350">
                 <a:solidFill>
                   <a:srgbClr val="646173"/>
@@ -48071,7 +48795,7 @@
                 <a:ea typeface="Microsoft YaHei"/>
                 <a:cs typeface="Microsoft YaHei"/>
               </a:rPr>
-              <a:t>8</a:t>
+              <a:t>9</a:t>
             </a:fld>
             <a:endParaRPr sz="1350">
               <a:solidFill>
@@ -49039,7 +49763,7 @@
                 <a:cs typeface="Microsoft YaHei"/>
               </a:defRPr>
             </a:pPr>
-            <a:fld id="{75B848E0-9682-403C-9CB3-292C512CADED}" type="slidenum">
+            <a:fld id="{B1E90421-C1B0-436D-8F6A-CE9F2E0A56C2}" type="slidenum">
               <a:rPr sz="1350">
                 <a:solidFill>
                   <a:srgbClr val="646173"/>
@@ -49048,7 +49772,7 @@
                 <a:ea typeface="Microsoft YaHei"/>
                 <a:cs typeface="Microsoft YaHei"/>
               </a:rPr>
-              <a:t>9</a:t>
+              <a:t>10</a:t>
             </a:fld>
             <a:endParaRPr sz="1350">
               <a:solidFill>
@@ -49067,6 +49791,769 @@
         <p14:creationId xmlns:p14="http://schemas.microsoft.com/office/powerpoint/2010/main" val="1534138162"/>
       </p:ext>
     </p:extLst>
+  </p:cSld>
+  <p:clrMapOvr>
+    <a:masterClrMapping/>
+  </p:clrMapOvr>
+</p:sld>
+</file>
+
+<file path=ppt/slides/westGit27.xml><?xml version="1.0" encoding="utf-8"?>
+<p:sld xmlns:a="http://schemas.openxmlformats.org/drawingml/2006/main" xmlns:r="http://schemas.openxmlformats.org/officeDocument/2006/relationships" xmlns:p="http://schemas.openxmlformats.org/presentationml/2006/main">
+  <p:cSld>
+    <p:bg>
+      <p:bgPr>
+        <a:solidFill>
+          <a:srgbClr val="FFFFFF"/>
+        </a:solidFill>
+        <a:effectLst/>
+      </p:bgPr>
+    </p:bg>
+    <p:spTree>
+      <p:nvGrpSpPr>
+        <p:cNvPr id="1" name=""/>
+        <p:cNvGrpSpPr/>
+        <p:nvPr/>
+      </p:nvGrpSpPr>
+      <p:grpSpPr>
+        <a:xfrm>
+          <a:off x="0" y="0"/>
+          <a:ext cx="0" cy="0"/>
+          <a:chOff x="0" y="0"/>
+          <a:chExt cx="0" cy="0"/>
+        </a:xfrm>
+      </p:grpSpPr>
+      <p:sp>
+        <p:nvSpPr>
+          <p:cNvPr id="2" name="Title"/>
+          <p:cNvSpPr>
+            <a:spLocks noGrp="1"/>
+          </p:cNvSpPr>
+          <p:nvPr/>
+        </p:nvSpPr>
+        <p:spPr>
+          <a:xfrm>
+            <a:off x="609600" y="381000"/>
+            <a:ext cx="10972800" cy="619125"/>
+          </a:xfrm>
+          <a:prstGeom prst="rect">
+            <a:avLst/>
+          </a:prstGeom>
+          <a:noFill/>
+          <a:ln w="0">
+            <a:noFill/>
+          </a:ln>
+        </p:spPr>
+        <p:txBody>
+          <a:bodyPr>
+            <a:noAutofit/>
+          </a:bodyPr>
+          <a:lstStyle>
+            <a:defPPr>
+              <a:defRPr sz="3000" b="1">
+                <a:solidFill>
+                  <a:srgbClr val="29263B"/>
+                </a:solidFill>
+                <a:latin typeface="Microsoft YaHei"/>
+                <a:ea typeface="Microsoft YaHei"/>
+                <a:cs typeface="Microsoft YaHei"/>
+              </a:defRPr>
+            </a:defPPr>
+          </a:lstStyle>
+          <a:p>
+            <a:pPr>
+              <a:lnSpc>
+                <a:spcPct val="120000"/>
+              </a:lnSpc>
+              <a:spcAft>
+                <a:spcPts val="10"/>
+              </a:spcAft>
+              <a:defRPr sz="3000" b="1">
+                <a:solidFill>
+                  <a:srgbClr val="29263B"/>
+                </a:solidFill>
+                <a:latin typeface="Microsoft YaHei"/>
+                <a:ea typeface="Microsoft YaHei"/>
+                <a:cs typeface="Microsoft YaHei"/>
+              </a:defRPr>
+            </a:pPr>
+            <a:r>
+              <a:t>进入 CMSIS 下载前，核对 Python 使用的 Git</a:t>
+            </a:r>
+          </a:p>
+        </p:txBody>
+      </p:sp>
+      <p:sp>
+        <p:nvSpPr>
+          <p:cNvPr id="3" name="Stage"/>
+          <p:cNvSpPr>
+            <a:spLocks noGrp="1"/>
+          </p:cNvSpPr>
+          <p:nvPr/>
+        </p:nvSpPr>
+        <p:spPr>
+          <a:xfrm>
+            <a:off x="609600" y="1190625"/>
+            <a:ext cx="10972800" cy="400050"/>
+          </a:xfrm>
+          <a:prstGeom prst="rect">
+            <a:avLst/>
+          </a:prstGeom>
+          <a:noFill/>
+          <a:ln w="0">
+            <a:noFill/>
+          </a:ln>
+        </p:spPr>
+        <p:txBody>
+          <a:bodyPr>
+            <a:noAutofit/>
+          </a:bodyPr>
+          <a:lstStyle>
+            <a:defPPr>
+              <a:defRPr sz="1650" b="0">
+                <a:solidFill>
+                  <a:srgbClr val="6845AC"/>
+                </a:solidFill>
+                <a:latin typeface="Microsoft YaHei"/>
+                <a:ea typeface="Microsoft YaHei"/>
+                <a:cs typeface="Microsoft YaHei"/>
+              </a:defRPr>
+            </a:defPPr>
+          </a:lstStyle>
+          <a:p>
+            <a:pPr>
+              <a:lnSpc>
+                <a:spcPct val="120000"/>
+              </a:lnSpc>
+              <a:spcAft>
+                <a:spcPts val="10"/>
+              </a:spcAft>
+              <a:defRPr sz="1650" b="0">
+                <a:solidFill>
+                  <a:srgbClr val="6845AC"/>
+                </a:solidFill>
+                <a:latin typeface="Microsoft YaHei"/>
+                <a:ea typeface="Microsoft YaHei"/>
+                <a:cs typeface="Microsoft YaHei"/>
+              </a:defRPr>
+            </a:pPr>
+            <a:r>
+              <a:t>3.5.2 · SDK 准备完成后的交接检查</a:t>
+            </a:r>
+          </a:p>
+        </p:txBody>
+      </p:sp>
+      <p:sp>
+        <p:nvSpPr>
+          <p:cNvPr id="4" name="Explanation"/>
+          <p:cNvSpPr>
+            <a:spLocks noGrp="1"/>
+          </p:cNvSpPr>
+          <p:nvPr/>
+        </p:nvSpPr>
+        <p:spPr>
+          <a:xfrm>
+            <a:off x="609600" y="1809750"/>
+            <a:ext cx="10972800" cy="895350"/>
+          </a:xfrm>
+          <a:prstGeom prst="rect">
+            <a:avLst/>
+          </a:prstGeom>
+          <a:noFill/>
+          <a:ln w="0">
+            <a:noFill/>
+          </a:ln>
+        </p:spPr>
+        <p:txBody>
+          <a:bodyPr>
+            <a:noAutofit/>
+          </a:bodyPr>
+          <a:lstStyle>
+            <a:defPPr>
+              <a:defRPr sz="2100" b="0">
+                <a:solidFill>
+                  <a:srgbClr val="29263B"/>
+                </a:solidFill>
+                <a:latin typeface="Microsoft YaHei"/>
+                <a:ea typeface="Microsoft YaHei"/>
+                <a:cs typeface="Microsoft YaHei"/>
+              </a:defRPr>
+            </a:defPPr>
+          </a:lstStyle>
+          <a:p>
+            <a:pPr>
+              <a:lnSpc>
+                <a:spcPct val="120000"/>
+              </a:lnSpc>
+              <a:spcAft>
+                <a:spcPts val="10"/>
+              </a:spcAft>
+              <a:defRPr sz="2100" b="0">
+                <a:solidFill>
+                  <a:srgbClr val="29263B"/>
+                </a:solidFill>
+                <a:latin typeface="Microsoft YaHei"/>
+                <a:ea typeface="Microsoft YaHei"/>
+                <a:cs typeface="Microsoft YaHei"/>
+              </a:defRPr>
+            </a:pPr>
+            <a:r>
+              <a:t>若 </a:t>
+            </a:r>
+            <a:r>
+              <a:rPr>
+                <a:solidFill>
+                  <a:srgbClr val="A02B93"/>
+                </a:solidFill>
+                <a:ea typeface="Microsoft YaHei"/>
+              </a:rPr>
+              <a:t>west update</a:t>
+            </a:r>
+            <a:r>
+              <a:t> 报 </a:t>
+            </a:r>
+            <a:r>
+              <a:rPr>
+                <a:solidFill>
+                  <a:srgbClr val="B84E00"/>
+                </a:solidFill>
+                <a:ea typeface="Microsoft YaHei"/>
+              </a:rPr>
+              <a:t>^commit</a:t>
+            </a:r>
+            <a:r>
+              <a:t>，应先对照正确的 </a:t>
+            </a:r>
+            <a:r>
+              <a:rPr>
+                <a:solidFill>
+                  <a:srgbClr val="B84E00"/>
+                </a:solidFill>
+                <a:ea typeface="Microsoft YaHei"/>
+              </a:rPr>
+              <a:t>^{commit}</a:t>
+            </a:r>
+            <a:r>
+              <a:t>。</a:t>
+            </a:r>
+          </a:p>
+          <a:p>
+            <a:pPr>
+              <a:lnSpc>
+                <a:spcPct val="120000"/>
+              </a:lnSpc>
+              <a:spcAft>
+                <a:spcPts val="10"/>
+              </a:spcAft>
+              <a:defRPr sz="2100" b="0">
+                <a:solidFill>
+                  <a:srgbClr val="29263B"/>
+                </a:solidFill>
+                <a:latin typeface="Microsoft YaHei"/>
+                <a:ea typeface="Microsoft YaHei"/>
+                <a:cs typeface="Microsoft YaHei"/>
+              </a:defRPr>
+            </a:pPr>
+            <a:r>
+              <a:t>本例更换 Git 后恢复，SDK、清单和 CMSIS 提交均保持不变。</a:t>
+            </a:r>
+          </a:p>
+        </p:txBody>
+      </p:sp>
+      <p:sp>
+        <p:nvSpPr>
+          <p:cNvPr id="5" name="Copyable command"/>
+          <p:cNvSpPr>
+            <a:spLocks noGrp="1"/>
+          </p:cNvSpPr>
+          <p:nvPr/>
+        </p:nvSpPr>
+        <p:spPr>
+          <a:xfrm>
+            <a:off x="609600" y="2952750"/>
+            <a:ext cx="10972800" cy="1962150"/>
+          </a:xfrm>
+          <a:prstGeom prst="rect">
+            <a:avLst/>
+          </a:prstGeom>
+          <a:noFill/>
+          <a:ln w="0">
+            <a:noFill/>
+          </a:ln>
+        </p:spPr>
+        <p:txBody>
+          <a:bodyPr>
+            <a:noAutofit/>
+          </a:bodyPr>
+          <a:lstStyle>
+            <a:defPPr>
+              <a:defRPr sz="1725" b="0">
+                <a:solidFill>
+                  <a:srgbClr val="29263B"/>
+                </a:solidFill>
+                <a:latin typeface="Consolas"/>
+                <a:ea typeface="Microsoft YaHei"/>
+                <a:cs typeface="Consolas"/>
+              </a:defRPr>
+            </a:defPPr>
+          </a:lstStyle>
+          <a:p>
+            <a:pPr>
+              <a:lnSpc>
+                <a:spcPct val="120000"/>
+              </a:lnSpc>
+              <a:spcAft>
+                <a:spcPts val="0"/>
+              </a:spcAft>
+              <a:defRPr sz="1725" b="0">
+                <a:solidFill>
+                  <a:srgbClr val="29263B"/>
+                </a:solidFill>
+                <a:latin typeface="Consolas"/>
+                <a:ea typeface="Microsoft YaHei"/>
+                <a:cs typeface="Consolas"/>
+              </a:defRPr>
+            </a:pPr>
+            <a:r>
+              <a:rPr>
+                <a:solidFill>
+                  <a:srgbClr val="646173"/>
+                </a:solidFill>
+                <a:ea typeface="Microsoft YaHei"/>
+              </a:rPr>
+              <a:t># Windows UCRT64；实验源码根；先激活 P002 创建的 Windows Python 环境。</a:t>
+            </a:r>
+          </a:p>
+          <a:p>
+            <a:pPr>
+              <a:lnSpc>
+                <a:spcPct val="120000"/>
+              </a:lnSpc>
+              <a:spcAft>
+                <a:spcPts val="0"/>
+              </a:spcAft>
+              <a:defRPr sz="1725" b="0">
+                <a:solidFill>
+                  <a:srgbClr val="29263B"/>
+                </a:solidFill>
+                <a:latin typeface="Consolas"/>
+                <a:ea typeface="Microsoft YaHei"/>
+                <a:cs typeface="Consolas"/>
+              </a:defRPr>
+            </a:pPr>
+            <a:r>
+              <a:rPr>
+                <a:solidFill>
+                  <a:srgbClr val="A02B93"/>
+                </a:solidFill>
+                <a:ea typeface="Microsoft YaHei"/>
+              </a:rPr>
+              <a:t>cd</a:t>
+            </a:r>
+            <a:r>
+              <a:t> </a:t>
+            </a:r>
+            <a:r>
+              <a:rPr>
+                <a:solidFill>
+                  <a:srgbClr val="0070C0"/>
+                </a:solidFill>
+                <a:ea typeface="Microsoft YaHei"/>
+              </a:rPr>
+              <a:t>/g/zephyr_practice/zephyr-main</a:t>
+            </a:r>
+          </a:p>
+          <a:p>
+            <a:pPr>
+              <a:lnSpc>
+                <a:spcPct val="120000"/>
+              </a:lnSpc>
+              <a:spcAft>
+                <a:spcPts val="0"/>
+              </a:spcAft>
+              <a:defRPr sz="1725" b="0">
+                <a:solidFill>
+                  <a:srgbClr val="29263B"/>
+                </a:solidFill>
+                <a:latin typeface="Consolas"/>
+                <a:ea typeface="Microsoft YaHei"/>
+                <a:cs typeface="Consolas"/>
+              </a:defRPr>
+            </a:pPr>
+            <a:r>
+              <a:rPr>
+                <a:solidFill>
+                  <a:srgbClr val="A02B93"/>
+                </a:solidFill>
+                <a:ea typeface="Microsoft YaHei"/>
+              </a:rPr>
+              <a:t>source</a:t>
+            </a:r>
+            <a:r>
+              <a:t> </a:t>
+            </a:r>
+            <a:r>
+              <a:rPr>
+                <a:solidFill>
+                  <a:srgbClr val="0070C0"/>
+                </a:solidFill>
+                <a:ea typeface="Microsoft YaHei"/>
+              </a:rPr>
+              <a:t>.venv/Scripts/activate</a:t>
+            </a:r>
+          </a:p>
+          <a:p>
+            <a:pPr>
+              <a:lnSpc>
+                <a:spcPct val="120000"/>
+              </a:lnSpc>
+              <a:spcAft>
+                <a:spcPts val="0"/>
+              </a:spcAft>
+              <a:defRPr sz="1725" b="0">
+                <a:solidFill>
+                  <a:srgbClr val="29263B"/>
+                </a:solidFill>
+                <a:latin typeface="Consolas"/>
+                <a:ea typeface="Microsoft YaHei"/>
+                <a:cs typeface="Consolas"/>
+              </a:defRPr>
+            </a:pPr>
+            <a:r>
+              <a:rPr>
+                <a:solidFill>
+                  <a:srgbClr val="A02B93"/>
+                </a:solidFill>
+                <a:ea typeface="Microsoft YaHei"/>
+              </a:rPr>
+              <a:t>type</a:t>
+            </a:r>
+            <a:r>
+              <a:t> -a </a:t>
+            </a:r>
+            <a:r>
+              <a:rPr>
+                <a:solidFill>
+                  <a:srgbClr val="A02B93"/>
+                </a:solidFill>
+                <a:ea typeface="Microsoft YaHei"/>
+              </a:rPr>
+              <a:t>git</a:t>
+            </a:r>
+          </a:p>
+          <a:p>
+            <a:pPr>
+              <a:lnSpc>
+                <a:spcPct val="120000"/>
+              </a:lnSpc>
+              <a:spcAft>
+                <a:spcPts val="0"/>
+              </a:spcAft>
+              <a:defRPr sz="1725" b="0">
+                <a:solidFill>
+                  <a:srgbClr val="29263B"/>
+                </a:solidFill>
+                <a:latin typeface="Consolas"/>
+                <a:ea typeface="Microsoft YaHei"/>
+                <a:cs typeface="Consolas"/>
+              </a:defRPr>
+            </a:pPr>
+            <a:r>
+              <a:rPr>
+                <a:solidFill>
+                  <a:srgbClr val="A02B93"/>
+                </a:solidFill>
+                <a:ea typeface="Microsoft YaHei"/>
+              </a:rPr>
+              <a:t>python</a:t>
+            </a:r>
+            <a:r>
+              <a:t> -c "import sys, shutil; print(sys.executable); print(shutil.which('</a:t>
+            </a:r>
+            <a:r>
+              <a:rPr>
+                <a:solidFill>
+                  <a:srgbClr val="A02B93"/>
+                </a:solidFill>
+                <a:ea typeface="Microsoft YaHei"/>
+              </a:rPr>
+              <a:t>git</a:t>
+            </a:r>
+            <a:r>
+              <a:t>'))"</a:t>
+            </a:r>
+          </a:p>
+          <a:p>
+            <a:pPr>
+              <a:lnSpc>
+                <a:spcPct val="120000"/>
+              </a:lnSpc>
+              <a:spcAft>
+                <a:spcPts val="0"/>
+              </a:spcAft>
+              <a:defRPr sz="1725" b="0">
+                <a:solidFill>
+                  <a:srgbClr val="29263B"/>
+                </a:solidFill>
+                <a:latin typeface="Consolas"/>
+                <a:ea typeface="Microsoft YaHei"/>
+                <a:cs typeface="Consolas"/>
+              </a:defRPr>
+            </a:pPr>
+            <a:r>
+              <a:rPr>
+                <a:solidFill>
+                  <a:srgbClr val="A02B93"/>
+                </a:solidFill>
+                <a:ea typeface="Microsoft YaHei"/>
+              </a:rPr>
+              <a:t>git --version</a:t>
+            </a:r>
+          </a:p>
+        </p:txBody>
+      </p:sp>
+      <p:sp>
+        <p:nvSpPr>
+          <p:cNvPr id="6" name="Result and interpretation"/>
+          <p:cNvSpPr>
+            <a:spLocks noGrp="1"/>
+          </p:cNvSpPr>
+          <p:nvPr/>
+        </p:nvSpPr>
+        <p:spPr>
+          <a:xfrm>
+            <a:off x="609600" y="5162550"/>
+            <a:ext cx="10972800" cy="790575"/>
+          </a:xfrm>
+          <a:prstGeom prst="rect">
+            <a:avLst/>
+          </a:prstGeom>
+          <a:noFill/>
+          <a:ln w="0">
+            <a:noFill/>
+          </a:ln>
+        </p:spPr>
+        <p:txBody>
+          <a:bodyPr>
+            <a:noAutofit/>
+          </a:bodyPr>
+          <a:lstStyle>
+            <a:defPPr>
+              <a:defRPr sz="1950" b="0">
+                <a:solidFill>
+                  <a:srgbClr val="29263B"/>
+                </a:solidFill>
+                <a:latin typeface="Microsoft YaHei"/>
+                <a:ea typeface="Microsoft YaHei"/>
+                <a:cs typeface="Microsoft YaHei"/>
+              </a:defRPr>
+            </a:defPPr>
+          </a:lstStyle>
+          <a:p>
+            <a:pPr>
+              <a:lnSpc>
+                <a:spcPct val="120000"/>
+              </a:lnSpc>
+              <a:spcAft>
+                <a:spcPts val="10"/>
+              </a:spcAft>
+              <a:defRPr sz="1950" b="0">
+                <a:solidFill>
+                  <a:srgbClr val="29263B"/>
+                </a:solidFill>
+                <a:latin typeface="Microsoft YaHei"/>
+                <a:ea typeface="Microsoft YaHei"/>
+                <a:cs typeface="Microsoft YaHei"/>
+              </a:defRPr>
+            </a:pPr>
+            <a:r>
+              <a:t>优先 </a:t>
+            </a:r>
+            <a:r>
+              <a:rPr>
+                <a:solidFill>
+                  <a:srgbClr val="0070C0"/>
+                </a:solidFill>
+                <a:ea typeface="Microsoft YaHei"/>
+              </a:rPr>
+              <a:t>/ucrt64/bin/git</a:t>
+            </a:r>
+            <a:r>
+              <a:t>，已有 Git for Windows 也可用。</a:t>
+            </a:r>
+          </a:p>
+          <a:p>
+            <a:pPr>
+              <a:lnSpc>
+                <a:spcPct val="120000"/>
+              </a:lnSpc>
+              <a:spcAft>
+                <a:spcPts val="10"/>
+              </a:spcAft>
+              <a:defRPr sz="1950" b="0">
+                <a:solidFill>
+                  <a:srgbClr val="29263B"/>
+                </a:solidFill>
+                <a:latin typeface="Microsoft YaHei"/>
+                <a:ea typeface="Microsoft YaHei"/>
+                <a:cs typeface="Microsoft YaHei"/>
+              </a:defRPr>
+            </a:pPr>
+            <a:r>
+              <a:t>Python 输出仍落在 </a:t>
+            </a:r>
+            <a:r>
+              <a:rPr>
+                <a:solidFill>
+                  <a:srgbClr val="0070C0"/>
+                </a:solidFill>
+                <a:ea typeface="Microsoft YaHei"/>
+              </a:rPr>
+              <a:t>/usr/bin</a:t>
+            </a:r>
+            <a:r>
+              <a:t> 时停止，按 P004 4.2 / 4.4 修正。</a:t>
+            </a:r>
+          </a:p>
+        </p:txBody>
+      </p:sp>
+      <p:sp>
+        <p:nvSpPr>
+          <p:cNvPr id="7" name="PageNumber"/>
+          <p:cNvSpPr>
+            <a:spLocks noGrp="1"/>
+          </p:cNvSpPr>
+          <p:nvPr/>
+        </p:nvSpPr>
+        <p:spPr>
+          <a:xfrm>
+            <a:off x="10858500" y="6438900"/>
+            <a:ext cx="723900" cy="266700"/>
+          </a:xfrm>
+          <a:prstGeom prst="rect">
+            <a:avLst/>
+          </a:prstGeom>
+          <a:noFill/>
+          <a:ln w="0">
+            <a:noFill/>
+          </a:ln>
+        </p:spPr>
+        <p:txBody>
+          <a:bodyPr lIns="0" tIns="0" rIns="0" bIns="0" anchor="ctr">
+            <a:noAutofit/>
+          </a:bodyPr>
+          <a:lstStyle>
+            <a:defPPr algn="r">
+              <a:defRPr sz="1350">
+                <a:solidFill>
+                  <a:srgbClr val="646173"/>
+                </a:solidFill>
+                <a:latin typeface="Microsoft YaHei"/>
+                <a:ea typeface="Microsoft YaHei"/>
+                <a:cs typeface="Microsoft YaHei"/>
+              </a:defRPr>
+            </a:defPPr>
+          </a:lstStyle>
+          <a:p>
+            <a:pPr algn="r">
+              <a:lnSpc>
+                <a:spcPct val="120000"/>
+              </a:lnSpc>
+              <a:defRPr sz="1350">
+                <a:solidFill>
+                  <a:srgbClr val="646173"/>
+                </a:solidFill>
+                <a:latin typeface="Microsoft YaHei"/>
+                <a:ea typeface="Microsoft YaHei"/>
+                <a:cs typeface="Microsoft YaHei"/>
+              </a:defRPr>
+            </a:pPr>
+            <a:fld id="{8F99F974-C46D-45F4-BD0B-3C48FDD4DB76}" type="slidenum">
+              <a:rPr sz="1350">
+                <a:solidFill>
+                  <a:srgbClr val="646173"/>
+                </a:solidFill>
+                <a:latin typeface="Microsoft YaHei"/>
+                <a:ea typeface="Microsoft YaHei"/>
+                <a:cs typeface="Microsoft YaHei"/>
+              </a:rPr>
+              <a:t>29</a:t>
+            </a:fld>
+            <a:endParaRPr sz="1350">
+              <a:solidFill>
+                <a:srgbClr val="646173"/>
+              </a:solidFill>
+              <a:latin typeface="Microsoft YaHei"/>
+              <a:ea typeface="Microsoft YaHei"/>
+              <a:cs typeface="Microsoft YaHei"/>
+            </a:endParaRPr>
+          </a:p>
+        </p:txBody>
+      </p:sp>
+      <p:sp>
+        <p:nvSpPr>
+          <p:cNvPr id="8" name="Source"/>
+          <p:cNvSpPr>
+            <a:spLocks noGrp="1"/>
+          </p:cNvSpPr>
+          <p:nvPr/>
+        </p:nvSpPr>
+        <p:spPr>
+          <a:xfrm>
+            <a:off x="609600" y="6105525"/>
+            <a:ext cx="10972800" cy="276225"/>
+          </a:xfrm>
+          <a:prstGeom prst="rect">
+            <a:avLst/>
+          </a:prstGeom>
+          <a:noFill/>
+          <a:ln w="0">
+            <a:noFill/>
+          </a:ln>
+        </p:spPr>
+        <p:txBody>
+          <a:bodyPr lIns="0" tIns="0" rIns="0" bIns="0" anchor="t">
+            <a:noAutofit/>
+          </a:bodyPr>
+          <a:lstStyle>
+            <a:defPPr>
+              <a:defRPr sz="1163" b="0">
+                <a:solidFill>
+                  <a:srgbClr val="397589"/>
+                </a:solidFill>
+                <a:latin typeface="Microsoft YaHei"/>
+                <a:ea typeface="Microsoft YaHei"/>
+                <a:cs typeface="Microsoft YaHei"/>
+              </a:defRPr>
+            </a:defPPr>
+          </a:lstStyle>
+          <a:p>
+            <a:pPr>
+              <a:lnSpc>
+                <a:spcPct val="120000"/>
+              </a:lnSpc>
+              <a:spcAft>
+                <a:spcPts val="400"/>
+              </a:spcAft>
+              <a:defRPr sz="1163" b="0">
+                <a:solidFill>
+                  <a:srgbClr val="397589"/>
+                </a:solidFill>
+                <a:latin typeface="Microsoft YaHei"/>
+                <a:ea typeface="Microsoft YaHei"/>
+                <a:cs typeface="Microsoft YaHei"/>
+              </a:defRPr>
+            </a:pPr>
+            <a:r>
+              <a:rPr u="sng">
+                <a:hlinkClick r:id="rId3"/>
+              </a:rPr>
+              <a:t>完整检查命令：P003_Windows/west-git-check.txt</a:t>
+            </a:r>
+          </a:p>
+        </p:txBody>
+      </p:sp>
+    </p:spTree>
   </p:cSld>
   <p:clrMapOvr>
     <a:masterClrMapping/>

--- a/learning/P01_zephyr_make_project/slides/P003_SDK准备与编译器选型_Windows.pptx
+++ b/learning/P01_zephyr_make_project/slides/P003_SDK准备与编译器选型_Windows.pptx
@@ -1465,37 +1465,45 @@
           <a:lstStyle/>
           <a:p>
             <a:r>
+              <a:rPr/>
               <a:t>对应正文：P003_SDK准备与编译器选型_Windows.md#sdk-discovery</a:t>
             </a:r>
           </a:p>
           <a:p>
             <a:r>
+              <a:rPr/>
               <a:t>③ 把 SDK 交给工程</a:t>
             </a:r>
           </a:p>
           <a:p>
             <a:r>
+              <a:rPr/>
               <a:t>SDK 发现方式：选一种入口即可</a:t>
             </a:r>
           </a:p>
           <a:p>
             <a:endParaRPr/>
           </a:p>
-          <a:p>
-            <a:endParaRPr/>
-          </a:p>
-          <a:p>
-            <a:r>
-              <a:t>显式 SDK 根由 Zephyr 读取并限定查找位置。默认发现成功时，不再重复指定根或类型。</a:t>
-            </a:r>
-          </a:p>
-          <a:p>
-            <a:r>
+          <a:p/>
+          <a:p>
+            <a:r>
+              <a:rPr>
+                <a:solidFill>
+                  <a:srgbClr val="29263B"/>
+                </a:solidFill>
+              </a:rPr>
+              <a:t>本例指定单套 SDK 根；也可传多版本父目录，选择兼容 SDK。默认发现成功时，无需另设。</a:t>
+            </a:r>
+          </a:p>
+          <a:p>
+            <a:r>
+              <a:rPr/>
               <a:t>依据：https://github.com/zephyrproject-rtos/zephyr/blob/3777ab91262f93c2c2da7e1ab8cff4e8ea5f4ce4/cmake/modules/FindZephyr-sdk.cmake</a:t>
             </a:r>
           </a:p>
           <a:p>
             <a:r>
+              <a:rPr/>
               <a:t>原文件定位：zephyr_get；带 NO_DEFAULT_PATH 的 find_package 分支</a:t>
             </a:r>
           </a:p>
@@ -2118,69 +2126,118 @@
           <a:lstStyle/>
           <a:p>
             <a:r>
+              <a:rPr/>
               <a:t>对应正文：P003_SDK准备与编译器选型_Windows.md#sdk-discovery</a:t>
             </a:r>
           </a:p>
           <a:p>
             <a:r>
+              <a:rPr/>
               <a:t>③ 把 SDK 交给工程 · 读取依据</a:t>
             </a:r>
           </a:p>
           <a:p>
             <a:r>
+              <a:rPr/>
               <a:t>路径由 Zephyr 查找脚本读取</a:t>
             </a:r>
           </a:p>
           <a:p>
             <a:r>
+              <a:rPr/>
               <a:t>只读 zephyr-main/cmake/modules/FindZephyr-sdk.cmake；不新建或替换。</a:t>
             </a:r>
           </a:p>
           <a:p>
             <a:r>
+              <a:rPr/>
               <a:t>zephyr_get(ZEPHYR_SDK_INSTALL_DIR)</a:t>
             </a:r>
           </a:p>
-          <a:p>
-            <a:endParaRPr/>
-          </a:p>
-          <a:p>
-            <a:r>
-              <a:t># 在显式 SDK 根分支内，官方调用的关键参数：</a:t>
-            </a:r>
-          </a:p>
-          <a:p>
-            <a:r>
+          <a:p/>
+          <a:p>
+            <a:r>
+              <a:rPr>
+                <a:solidFill>
+                  <a:srgbClr val="646173"/>
+                </a:solidFill>
+              </a:rPr>
+              <a:t># 在显式 SDK 路径分支内，官方调用的关键参数：</a:t>
+            </a:r>
+          </a:p>
+          <a:p>
+            <a:r>
+              <a:rPr/>
               <a:t>find_package(Zephyr-sdk ${Zephyr-sdk_FIND_VERSION_COMPLETE}</a:t>
             </a:r>
           </a:p>
           <a:p>
             <a:r>
-              <a:t>  REQUIRED QUIET CONFIG</a:t>
-            </a:r>
-          </a:p>
-          <a:p>
-            <a:r>
-              <a:t>  HINTS ${ZEPHYR_SDK_INSTALL_DIR} NO_DEFAULT_PATH)</a:t>
-            </a:r>
-          </a:p>
-          <a:p>
-            <a:r>
-              <a:t>没有显式根：按包记录 / 搜索路径选择兼容 SDK。</a:t>
-            </a:r>
-          </a:p>
-          <a:p>
-            <a:r>
-              <a:t>已有显式根：只在指定位置找；位置或版本错误就报错，不偷偷换另一套。</a:t>
-            </a:r>
-          </a:p>
-          <a:p>
-            <a:r>
+              <a:rPr/>
+              <a:t xml:space="preserve">  REQUIRED QUIET CONFIG</a:t>
+            </a:r>
+          </a:p>
+          <a:p>
+            <a:r>
+              <a:rPr/>
+              <a:t xml:space="preserve">  HINTS ${ZEPHYR_SDK_INSTALL_DIR} NO_DEFAULT_PATH)</a:t>
+            </a:r>
+          </a:p>
+          <a:p>
+            <a:r>
+              <a:rPr>
+                <a:solidFill>
+                  <a:srgbClr val="29263B"/>
+                </a:solidFill>
+              </a:rPr>
+              <a:t>无显式路径：按包记录 / 搜索路径选择兼容 SDK。</a:t>
+            </a:r>
+          </a:p>
+          <a:p>
+            <a:r>
+              <a:rPr>
+                <a:solidFill>
+                  <a:srgbClr val="29263B"/>
+                </a:solidFill>
+              </a:rPr>
+              <a:t>新目录无旧包缓存时，显式路径限定搜索前缀。</a:t>
+            </a:r>
+          </a:p>
+          <a:p>
+            <a:r>
+              <a:rPr>
+                <a:solidFill>
+                  <a:srgbClr val="29263B"/>
+                </a:solidFill>
+              </a:rPr>
+              <a:t xml:space="preserve">已有 </a:t>
+            </a:r>
+            <a:r>
+              <a:rPr>
+                <a:solidFill>
+                  <a:srgbClr val="B84E00"/>
+                </a:solidFill>
+              </a:rPr>
+              <a:t>Zephyr-sdk_DIR</a:t>
+            </a:r>
+            <a:r>
+              <a:rPr>
+                <a:solidFill>
+                  <a:srgbClr val="29263B"/>
+                </a:solidFill>
+              </a:rPr>
+              <a:t xml:space="preserve"> 仍可影响选择；换 SDK 用新构建目录。</a:t>
+            </a:r>
+          </a:p>
+          <a:p>
+            <a:r>
+              <a:rPr/>
               <a:t>依据：https://github.com/zephyrproject-rtos/zephyr/blob/3777ab91262f93c2c2da7e1ab8cff4e8ea5f4ce4/cmake/modules/FindZephyr-sdk.cmake</a:t>
             </a:r>
           </a:p>
           <a:p>
             <a:r>
+              <a:rPr/>
               <a:t>原文件定位：文件第 46、76—88 行及后续自动搜索分支（本期修订）</a:t>
             </a:r>
           </a:p>
@@ -31711,8 +31768,12 @@
               </a:defRPr>
             </a:pPr>
             <a:r>
-              <a:rPr/>
-              <a:t>显式 SDK 根由 Zephyr 读取并限定查找位置。默认发现成功时，不再重复指定根或类型。</a:t>
+              <a:rPr>
+                <a:solidFill>
+                  <a:srgbClr val="29263B"/>
+                </a:solidFill>
+              </a:rPr>
+              <a:t>本例指定单套 SDK 根；也可传多版本父目录，选择兼容 SDK。默认发现成功时，无需另设。</a:t>
             </a:r>
           </a:p>
         </p:txBody>
@@ -36067,7 +36128,6 @@
                 <a:cs typeface="Consolas"/>
               </a:defRPr>
             </a:pPr>
-            <a:endParaRPr/>
           </a:p>
           <a:p>
             <a:pPr>
@@ -36087,8 +36147,12 @@
               </a:defRPr>
             </a:pPr>
             <a:r>
-              <a:rPr/>
-              <a:t># 在显式 SDK 根分支内，官方调用的关键参数：</a:t>
+              <a:rPr>
+                <a:solidFill>
+                  <a:srgbClr val="646173"/>
+                </a:solidFill>
+              </a:rPr>
+              <a:t># 在显式 SDK 路径分支内，官方调用的关键参数：</a:t>
             </a:r>
           </a:p>
           <a:p>
@@ -36118,7 +36182,7 @@
             </a:r>
             <a:r>
               <a:rPr/>
-              <a:t>(Zephyr-sdk </a:t>
+              <a:t xml:space="preserve">(Zephyr-sdk </a:t>
             </a:r>
             <a:r>
               <a:rPr>
@@ -36148,7 +36212,7 @@
             </a:pPr>
             <a:r>
               <a:rPr/>
-              <a:t>  REQUIRED QUIET CONFIG</a:t>
+              <a:t xml:space="preserve">  REQUIRED QUIET CONFIG</a:t>
             </a:r>
           </a:p>
           <a:p>
@@ -36170,7 +36234,7 @@
             </a:pPr>
             <a:r>
               <a:rPr/>
-              <a:t>  HINTS </a:t>
+              <a:t xml:space="preserve">  HINTS </a:t>
             </a:r>
             <a:r>
               <a:rPr>
@@ -36178,27 +36242,11 @@
                   <a:srgbClr val="B84E00"/>
                 </a:solidFill>
               </a:rPr>
-              <a:t>${</a:t>
-            </a:r>
-            <a:r>
-              <a:rPr>
-                <a:solidFill>
-                  <a:srgbClr val="B84E00"/>
-                </a:solidFill>
-              </a:rPr>
-              <a:t>ZEPHYR_SDK_INSTALL_DIR</a:t>
-            </a:r>
-            <a:r>
-              <a:rPr>
-                <a:solidFill>
-                  <a:srgbClr val="B84E00"/>
-                </a:solidFill>
-              </a:rPr>
-              <a:t>}</a:t>
+              <a:t>${ZEPHYR_SDK_INSTALL_DIR}</a:t>
             </a:r>
             <a:r>
               <a:rPr/>
-              <a:t> </a:t>
+              <a:t xml:space="preserve"> </a:t>
             </a:r>
             <a:r>
               <a:rPr>
@@ -36276,8 +36324,12 @@
               </a:defRPr>
             </a:pPr>
             <a:r>
-              <a:rPr/>
-              <a:t>没有显式根：按包记录 / 搜索路径选择兼容 SDK。</a:t>
+              <a:rPr>
+                <a:solidFill>
+                  <a:srgbClr val="29263B"/>
+                </a:solidFill>
+              </a:rPr>
+              <a:t>无显式路径：按包记录 / 搜索路径选择兼容 SDK。</a:t>
             </a:r>
           </a:p>
           <a:p>
@@ -36298,8 +36350,54 @@
               </a:defRPr>
             </a:pPr>
             <a:r>
-              <a:rPr/>
-              <a:t>已有显式根：只在指定位置找；位置或版本错误就报错，不偷偷换另一套。</a:t>
+              <a:rPr>
+                <a:solidFill>
+                  <a:srgbClr val="29263B"/>
+                </a:solidFill>
+              </a:rPr>
+              <a:t>新目录无旧包缓存时，显式路径限定搜索前缀。</a:t>
+            </a:r>
+          </a:p>
+          <a:p>
+            <a:pPr>
+              <a:lnSpc>
+                <a:spcPct val="120000"/>
+              </a:lnSpc>
+              <a:spcAft>
+                <a:spcPts val="400"/>
+              </a:spcAft>
+              <a:defRPr sz="1875" b="0">
+                <a:solidFill>
+                  <a:srgbClr val="29263B"/>
+                </a:solidFill>
+                <a:latin typeface="Microsoft YaHei"/>
+                <a:ea typeface="Microsoft YaHei"/>
+                <a:cs typeface="Microsoft YaHei"/>
+              </a:defRPr>
+            </a:pPr>
+            <a:r>
+              <a:rPr>
+                <a:solidFill>
+                  <a:srgbClr val="29263B"/>
+                </a:solidFill>
+              </a:rPr>
+              <a:t xml:space="preserve">已有 </a:t>
+            </a:r>
+            <a:r>
+              <a:rPr>
+                <a:solidFill>
+                  <a:srgbClr val="B84E00"/>
+                </a:solidFill>
+              </a:rPr>
+              <a:t>Zephyr-sdk_DIR</a:t>
+            </a:r>
+            <a:r>
+              <a:rPr>
+                <a:solidFill>
+                  <a:srgbClr val="29263B"/>
+                </a:solidFill>
+              </a:rPr>
+              <a:t xml:space="preserve"> 仍可影响选择；换 SDK 用新构建目录。</a:t>
             </a:r>
           </a:p>
         </p:txBody>
